--- a/deliverables/THOX_Kickstarter_Deck.pptx
+++ b/deliverables/THOX_Kickstarter_Deck.pptx
@@ -5,22 +5,22 @@
     <p:sldMasterId id="2147483648" r:id="rId1"/>
   </p:sldMasterIdLst>
   <p:sldIdLst>
-    <p:sldId id="256" r:id="rId7"/>
-    <p:sldId id="257" r:id="rId8"/>
-    <p:sldId id="258" r:id="rId9"/>
-    <p:sldId id="259" r:id="rId10"/>
-    <p:sldId id="260" r:id="rId11"/>
-    <p:sldId id="261" r:id="rId12"/>
-    <p:sldId id="262" r:id="rId13"/>
-    <p:sldId id="263" r:id="rId14"/>
-    <p:sldId id="264" r:id="rId15"/>
-    <p:sldId id="265" r:id="rId16"/>
-    <p:sldId id="266" r:id="rId17"/>
-    <p:sldId id="267" r:id="rId18"/>
-    <p:sldId id="268" r:id="rId19"/>
-    <p:sldId id="269" r:id="rId20"/>
+    <p:sldId id="256" r:id="rId2"/>
+    <p:sldId id="257" r:id="rId3"/>
+    <p:sldId id="258" r:id="rId4"/>
+    <p:sldId id="259" r:id="rId5"/>
+    <p:sldId id="260" r:id="rId6"/>
+    <p:sldId id="261" r:id="rId7"/>
+    <p:sldId id="262" r:id="rId8"/>
+    <p:sldId id="263" r:id="rId9"/>
+    <p:sldId id="264" r:id="rId10"/>
+    <p:sldId id="265" r:id="rId11"/>
+    <p:sldId id="266" r:id="rId12"/>
+    <p:sldId id="267" r:id="rId13"/>
+    <p:sldId id="268" r:id="rId14"/>
+    <p:sldId id="269" r:id="rId15"/>
   </p:sldIdLst>
-  <p:sldSz cx="12191695" cy="6858000" type="screen4x3"/>
+  <p:sldSz cx="12192000" cy="6858000"/>
   <p:notesSz cx="6858000" cy="9144000"/>
   <p:defaultTextStyle>
     <a:defPPr>
@@ -117,6 +117,22 @@
       </a:defRPr>
     </a:lvl9pPr>
   </p:defaultTextStyle>
+  <p:extLst>
+    <p:ext uri="{EFAFB233-063F-42B5-8137-9DF3F51BA10A}">
+      <p15:sldGuideLst xmlns:p15="http://schemas.microsoft.com/office/powerpoint/2012/main">
+        <p15:guide id="1" orient="horz" pos="2160">
+          <p15:clr>
+            <a:srgbClr val="A4A3A4"/>
+          </p15:clr>
+        </p15:guide>
+        <p15:guide id="2" pos="2880">
+          <p15:clr>
+            <a:srgbClr val="A4A3A4"/>
+          </p15:clr>
+        </p15:guide>
+      </p15:sldGuideLst>
+    </p:ext>
+  </p:extLst>
 </p:presentation>
 </file>
 
@@ -158,10 +174,9 @@
           <a:lstStyle/>
           <a:p>
             <a:r>
-              <a:rPr lang="en-US" smtClean="0"/>
+              <a:rPr lang="en-US"/>
               <a:t>Click to edit Master title style</a:t>
             </a:r>
-            <a:endParaRPr lang="en-US"/>
           </a:p>
         </p:txBody>
       </p:sp>
@@ -277,10 +292,9 @@
           </a:lstStyle>
           <a:p>
             <a:r>
-              <a:rPr lang="en-US" smtClean="0"/>
+              <a:rPr lang="en-US"/>
               <a:t>Click to edit Master subtitle style</a:t>
             </a:r>
-            <a:endParaRPr lang="en-US"/>
           </a:p>
         </p:txBody>
       </p:sp>
@@ -301,7 +315,7 @@
           <a:p>
             <a:fld id="{5BCAD085-E8A6-8845-BD4E-CB4CCA059FC4}" type="datetimeFigureOut">
               <a:rPr lang="en-US" smtClean="0"/>
-              <a:t>1/27/13</a:t>
+              <a:t>6/10/26</a:t>
             </a:fld>
             <a:endParaRPr lang="en-US"/>
           </a:p>
@@ -395,10 +409,9 @@
           <a:lstStyle/>
           <a:p>
             <a:r>
-              <a:rPr lang="en-US" smtClean="0"/>
+              <a:rPr lang="en-US"/>
               <a:t>Click to edit Master title style</a:t>
             </a:r>
-            <a:endParaRPr lang="en-US"/>
           </a:p>
         </p:txBody>
       </p:sp>
@@ -419,38 +432,37 @@
           <a:p>
             <a:pPr lvl="0"/>
             <a:r>
-              <a:rPr lang="en-US" smtClean="0"/>
+              <a:rPr lang="en-US"/>
               <a:t>Click to edit Master text styles</a:t>
             </a:r>
           </a:p>
           <a:p>
             <a:pPr lvl="1"/>
             <a:r>
-              <a:rPr lang="en-US" smtClean="0"/>
+              <a:rPr lang="en-US"/>
               <a:t>Second level</a:t>
             </a:r>
           </a:p>
           <a:p>
             <a:pPr lvl="2"/>
             <a:r>
-              <a:rPr lang="en-US" smtClean="0"/>
+              <a:rPr lang="en-US"/>
               <a:t>Third level</a:t>
             </a:r>
           </a:p>
           <a:p>
             <a:pPr lvl="3"/>
             <a:r>
-              <a:rPr lang="en-US" smtClean="0"/>
+              <a:rPr lang="en-US"/>
               <a:t>Fourth level</a:t>
             </a:r>
           </a:p>
           <a:p>
             <a:pPr lvl="4"/>
             <a:r>
-              <a:rPr lang="en-US" smtClean="0"/>
+              <a:rPr lang="en-US"/>
               <a:t>Fifth level</a:t>
             </a:r>
-            <a:endParaRPr lang="en-US"/>
           </a:p>
         </p:txBody>
       </p:sp>
@@ -471,7 +483,7 @@
           <a:p>
             <a:fld id="{5BCAD085-E8A6-8845-BD4E-CB4CCA059FC4}" type="datetimeFigureOut">
               <a:rPr lang="en-US" smtClean="0"/>
-              <a:t>1/27/13</a:t>
+              <a:t>6/10/26</a:t>
             </a:fld>
             <a:endParaRPr lang="en-US"/>
           </a:p>
@@ -570,10 +582,9 @@
           <a:lstStyle/>
           <a:p>
             <a:r>
-              <a:rPr lang="en-US" smtClean="0"/>
+              <a:rPr lang="en-US"/>
               <a:t>Click to edit Master title style</a:t>
             </a:r>
-            <a:endParaRPr lang="en-US"/>
           </a:p>
         </p:txBody>
       </p:sp>
@@ -599,38 +610,37 @@
           <a:p>
             <a:pPr lvl="0"/>
             <a:r>
-              <a:rPr lang="en-US" smtClean="0"/>
+              <a:rPr lang="en-US"/>
               <a:t>Click to edit Master text styles</a:t>
             </a:r>
           </a:p>
           <a:p>
             <a:pPr lvl="1"/>
             <a:r>
-              <a:rPr lang="en-US" smtClean="0"/>
+              <a:rPr lang="en-US"/>
               <a:t>Second level</a:t>
             </a:r>
           </a:p>
           <a:p>
             <a:pPr lvl="2"/>
             <a:r>
-              <a:rPr lang="en-US" smtClean="0"/>
+              <a:rPr lang="en-US"/>
               <a:t>Third level</a:t>
             </a:r>
           </a:p>
           <a:p>
             <a:pPr lvl="3"/>
             <a:r>
-              <a:rPr lang="en-US" smtClean="0"/>
+              <a:rPr lang="en-US"/>
               <a:t>Fourth level</a:t>
             </a:r>
           </a:p>
           <a:p>
             <a:pPr lvl="4"/>
             <a:r>
-              <a:rPr lang="en-US" smtClean="0"/>
+              <a:rPr lang="en-US"/>
               <a:t>Fifth level</a:t>
             </a:r>
-            <a:endParaRPr lang="en-US"/>
           </a:p>
         </p:txBody>
       </p:sp>
@@ -651,7 +661,7 @@
           <a:p>
             <a:fld id="{5BCAD085-E8A6-8845-BD4E-CB4CCA059FC4}" type="datetimeFigureOut">
               <a:rPr lang="en-US" smtClean="0"/>
-              <a:t>1/27/13</a:t>
+              <a:t>6/10/26</a:t>
             </a:fld>
             <a:endParaRPr lang="en-US"/>
           </a:p>
@@ -745,10 +755,9 @@
           <a:lstStyle/>
           <a:p>
             <a:r>
-              <a:rPr lang="en-US" smtClean="0"/>
+              <a:rPr lang="en-US"/>
               <a:t>Click to edit Master title style</a:t>
             </a:r>
-            <a:endParaRPr lang="en-US"/>
           </a:p>
         </p:txBody>
       </p:sp>
@@ -769,38 +778,37 @@
           <a:p>
             <a:pPr lvl="0"/>
             <a:r>
-              <a:rPr lang="en-US" smtClean="0"/>
+              <a:rPr lang="en-US"/>
               <a:t>Click to edit Master text styles</a:t>
             </a:r>
           </a:p>
           <a:p>
             <a:pPr lvl="1"/>
             <a:r>
-              <a:rPr lang="en-US" smtClean="0"/>
+              <a:rPr lang="en-US"/>
               <a:t>Second level</a:t>
             </a:r>
           </a:p>
           <a:p>
             <a:pPr lvl="2"/>
             <a:r>
-              <a:rPr lang="en-US" smtClean="0"/>
+              <a:rPr lang="en-US"/>
               <a:t>Third level</a:t>
             </a:r>
           </a:p>
           <a:p>
             <a:pPr lvl="3"/>
             <a:r>
-              <a:rPr lang="en-US" smtClean="0"/>
+              <a:rPr lang="en-US"/>
               <a:t>Fourth level</a:t>
             </a:r>
           </a:p>
           <a:p>
             <a:pPr lvl="4"/>
             <a:r>
-              <a:rPr lang="en-US" smtClean="0"/>
+              <a:rPr lang="en-US"/>
               <a:t>Fifth level</a:t>
             </a:r>
-            <a:endParaRPr lang="en-US"/>
           </a:p>
         </p:txBody>
       </p:sp>
@@ -821,7 +829,7 @@
           <a:p>
             <a:fld id="{5BCAD085-E8A6-8845-BD4E-CB4CCA059FC4}" type="datetimeFigureOut">
               <a:rPr lang="en-US" smtClean="0"/>
-              <a:t>1/27/13</a:t>
+              <a:t>6/10/26</a:t>
             </a:fld>
             <a:endParaRPr lang="en-US"/>
           </a:p>
@@ -924,10 +932,9 @@
           </a:lstStyle>
           <a:p>
             <a:r>
-              <a:rPr lang="en-US" smtClean="0"/>
+              <a:rPr lang="en-US"/>
               <a:t>Click to edit Master title style</a:t>
             </a:r>
-            <a:endParaRPr lang="en-US"/>
           </a:p>
         </p:txBody>
       </p:sp>
@@ -1044,7 +1051,7 @@
           <a:p>
             <a:pPr lvl="0"/>
             <a:r>
-              <a:rPr lang="en-US" smtClean="0"/>
+              <a:rPr lang="en-US"/>
               <a:t>Click to edit Master text styles</a:t>
             </a:r>
           </a:p>
@@ -1067,7 +1074,7 @@
           <a:p>
             <a:fld id="{5BCAD085-E8A6-8845-BD4E-CB4CCA059FC4}" type="datetimeFigureOut">
               <a:rPr lang="en-US" smtClean="0"/>
-              <a:t>1/27/13</a:t>
+              <a:t>6/10/26</a:t>
             </a:fld>
             <a:endParaRPr lang="en-US"/>
           </a:p>
@@ -1161,10 +1168,9 @@
           <a:lstStyle/>
           <a:p>
             <a:r>
-              <a:rPr lang="en-US" smtClean="0"/>
+              <a:rPr lang="en-US"/>
               <a:t>Click to edit Master title style</a:t>
             </a:r>
-            <a:endParaRPr lang="en-US"/>
           </a:p>
         </p:txBody>
       </p:sp>
@@ -1218,38 +1224,37 @@
           <a:p>
             <a:pPr lvl="0"/>
             <a:r>
-              <a:rPr lang="en-US" smtClean="0"/>
+              <a:rPr lang="en-US"/>
               <a:t>Click to edit Master text styles</a:t>
             </a:r>
           </a:p>
           <a:p>
             <a:pPr lvl="1"/>
             <a:r>
-              <a:rPr lang="en-US" smtClean="0"/>
+              <a:rPr lang="en-US"/>
               <a:t>Second level</a:t>
             </a:r>
           </a:p>
           <a:p>
             <a:pPr lvl="2"/>
             <a:r>
-              <a:rPr lang="en-US" smtClean="0"/>
+              <a:rPr lang="en-US"/>
               <a:t>Third level</a:t>
             </a:r>
           </a:p>
           <a:p>
             <a:pPr lvl="3"/>
             <a:r>
-              <a:rPr lang="en-US" smtClean="0"/>
+              <a:rPr lang="en-US"/>
               <a:t>Fourth level</a:t>
             </a:r>
           </a:p>
           <a:p>
             <a:pPr lvl="4"/>
             <a:r>
-              <a:rPr lang="en-US" smtClean="0"/>
+              <a:rPr lang="en-US"/>
               <a:t>Fifth level</a:t>
             </a:r>
-            <a:endParaRPr lang="en-US"/>
           </a:p>
         </p:txBody>
       </p:sp>
@@ -1303,38 +1308,37 @@
           <a:p>
             <a:pPr lvl="0"/>
             <a:r>
-              <a:rPr lang="en-US" smtClean="0"/>
+              <a:rPr lang="en-US"/>
               <a:t>Click to edit Master text styles</a:t>
             </a:r>
           </a:p>
           <a:p>
             <a:pPr lvl="1"/>
             <a:r>
-              <a:rPr lang="en-US" smtClean="0"/>
+              <a:rPr lang="en-US"/>
               <a:t>Second level</a:t>
             </a:r>
           </a:p>
           <a:p>
             <a:pPr lvl="2"/>
             <a:r>
-              <a:rPr lang="en-US" smtClean="0"/>
+              <a:rPr lang="en-US"/>
               <a:t>Third level</a:t>
             </a:r>
           </a:p>
           <a:p>
             <a:pPr lvl="3"/>
             <a:r>
-              <a:rPr lang="en-US" smtClean="0"/>
+              <a:rPr lang="en-US"/>
               <a:t>Fourth level</a:t>
             </a:r>
           </a:p>
           <a:p>
             <a:pPr lvl="4"/>
             <a:r>
-              <a:rPr lang="en-US" smtClean="0"/>
+              <a:rPr lang="en-US"/>
               <a:t>Fifth level</a:t>
             </a:r>
-            <a:endParaRPr lang="en-US"/>
           </a:p>
         </p:txBody>
       </p:sp>
@@ -1355,7 +1359,7 @@
           <a:p>
             <a:fld id="{5BCAD085-E8A6-8845-BD4E-CB4CCA059FC4}" type="datetimeFigureOut">
               <a:rPr lang="en-US" smtClean="0"/>
-              <a:t>1/27/13</a:t>
+              <a:t>6/10/26</a:t>
             </a:fld>
             <a:endParaRPr lang="en-US"/>
           </a:p>
@@ -1453,10 +1457,9 @@
           </a:lstStyle>
           <a:p>
             <a:r>
-              <a:rPr lang="en-US" smtClean="0"/>
+              <a:rPr lang="en-US"/>
               <a:t>Click to edit Master title style</a:t>
             </a:r>
-            <a:endParaRPr lang="en-US"/>
           </a:p>
         </p:txBody>
       </p:sp>
@@ -1519,7 +1522,7 @@
           <a:p>
             <a:pPr lvl="0"/>
             <a:r>
-              <a:rPr lang="en-US" smtClean="0"/>
+              <a:rPr lang="en-US"/>
               <a:t>Click to edit Master text styles</a:t>
             </a:r>
           </a:p>
@@ -1575,38 +1578,37 @@
           <a:p>
             <a:pPr lvl="0"/>
             <a:r>
-              <a:rPr lang="en-US" smtClean="0"/>
+              <a:rPr lang="en-US"/>
               <a:t>Click to edit Master text styles</a:t>
             </a:r>
           </a:p>
           <a:p>
             <a:pPr lvl="1"/>
             <a:r>
-              <a:rPr lang="en-US" smtClean="0"/>
+              <a:rPr lang="en-US"/>
               <a:t>Second level</a:t>
             </a:r>
           </a:p>
           <a:p>
             <a:pPr lvl="2"/>
             <a:r>
-              <a:rPr lang="en-US" smtClean="0"/>
+              <a:rPr lang="en-US"/>
               <a:t>Third level</a:t>
             </a:r>
           </a:p>
           <a:p>
             <a:pPr lvl="3"/>
             <a:r>
-              <a:rPr lang="en-US" smtClean="0"/>
+              <a:rPr lang="en-US"/>
               <a:t>Fourth level</a:t>
             </a:r>
           </a:p>
           <a:p>
             <a:pPr lvl="4"/>
             <a:r>
-              <a:rPr lang="en-US" smtClean="0"/>
+              <a:rPr lang="en-US"/>
               <a:t>Fifth level</a:t>
             </a:r>
-            <a:endParaRPr lang="en-US"/>
           </a:p>
         </p:txBody>
       </p:sp>
@@ -1669,7 +1671,7 @@
           <a:p>
             <a:pPr lvl="0"/>
             <a:r>
-              <a:rPr lang="en-US" smtClean="0"/>
+              <a:rPr lang="en-US"/>
               <a:t>Click to edit Master text styles</a:t>
             </a:r>
           </a:p>
@@ -1725,38 +1727,37 @@
           <a:p>
             <a:pPr lvl="0"/>
             <a:r>
-              <a:rPr lang="en-US" smtClean="0"/>
+              <a:rPr lang="en-US"/>
               <a:t>Click to edit Master text styles</a:t>
             </a:r>
           </a:p>
           <a:p>
             <a:pPr lvl="1"/>
             <a:r>
-              <a:rPr lang="en-US" smtClean="0"/>
+              <a:rPr lang="en-US"/>
               <a:t>Second level</a:t>
             </a:r>
           </a:p>
           <a:p>
             <a:pPr lvl="2"/>
             <a:r>
-              <a:rPr lang="en-US" smtClean="0"/>
+              <a:rPr lang="en-US"/>
               <a:t>Third level</a:t>
             </a:r>
           </a:p>
           <a:p>
             <a:pPr lvl="3"/>
             <a:r>
-              <a:rPr lang="en-US" smtClean="0"/>
+              <a:rPr lang="en-US"/>
               <a:t>Fourth level</a:t>
             </a:r>
           </a:p>
           <a:p>
             <a:pPr lvl="4"/>
             <a:r>
-              <a:rPr lang="en-US" smtClean="0"/>
+              <a:rPr lang="en-US"/>
               <a:t>Fifth level</a:t>
             </a:r>
-            <a:endParaRPr lang="en-US"/>
           </a:p>
         </p:txBody>
       </p:sp>
@@ -1777,7 +1778,7 @@
           <a:p>
             <a:fld id="{5BCAD085-E8A6-8845-BD4E-CB4CCA059FC4}" type="datetimeFigureOut">
               <a:rPr lang="en-US" smtClean="0"/>
-              <a:t>1/27/13</a:t>
+              <a:t>6/10/26</a:t>
             </a:fld>
             <a:endParaRPr lang="en-US"/>
           </a:p>
@@ -1871,10 +1872,9 @@
           <a:lstStyle/>
           <a:p>
             <a:r>
-              <a:rPr lang="en-US" smtClean="0"/>
+              <a:rPr lang="en-US"/>
               <a:t>Click to edit Master title style</a:t>
             </a:r>
-            <a:endParaRPr lang="en-US"/>
           </a:p>
         </p:txBody>
       </p:sp>
@@ -1895,7 +1895,7 @@
           <a:p>
             <a:fld id="{5BCAD085-E8A6-8845-BD4E-CB4CCA059FC4}" type="datetimeFigureOut">
               <a:rPr lang="en-US" smtClean="0"/>
-              <a:t>1/27/13</a:t>
+              <a:t>6/10/26</a:t>
             </a:fld>
             <a:endParaRPr lang="en-US"/>
           </a:p>
@@ -1990,7 +1990,7 @@
           <a:p>
             <a:fld id="{5BCAD085-E8A6-8845-BD4E-CB4CCA059FC4}" type="datetimeFigureOut">
               <a:rPr lang="en-US" smtClean="0"/>
-              <a:t>1/27/13</a:t>
+              <a:t>6/10/26</a:t>
             </a:fld>
             <a:endParaRPr lang="en-US"/>
           </a:p>
@@ -2093,10 +2093,9 @@
           </a:lstStyle>
           <a:p>
             <a:r>
-              <a:rPr lang="en-US" smtClean="0"/>
+              <a:rPr lang="en-US"/>
               <a:t>Click to edit Master title style</a:t>
             </a:r>
-            <a:endParaRPr lang="en-US"/>
           </a:p>
         </p:txBody>
       </p:sp>
@@ -2150,38 +2149,37 @@
           <a:p>
             <a:pPr lvl="0"/>
             <a:r>
-              <a:rPr lang="en-US" smtClean="0"/>
+              <a:rPr lang="en-US"/>
               <a:t>Click to edit Master text styles</a:t>
             </a:r>
           </a:p>
           <a:p>
             <a:pPr lvl="1"/>
             <a:r>
-              <a:rPr lang="en-US" smtClean="0"/>
+              <a:rPr lang="en-US"/>
               <a:t>Second level</a:t>
             </a:r>
           </a:p>
           <a:p>
             <a:pPr lvl="2"/>
             <a:r>
-              <a:rPr lang="en-US" smtClean="0"/>
+              <a:rPr lang="en-US"/>
               <a:t>Third level</a:t>
             </a:r>
           </a:p>
           <a:p>
             <a:pPr lvl="3"/>
             <a:r>
-              <a:rPr lang="en-US" smtClean="0"/>
+              <a:rPr lang="en-US"/>
               <a:t>Fourth level</a:t>
             </a:r>
           </a:p>
           <a:p>
             <a:pPr lvl="4"/>
             <a:r>
-              <a:rPr lang="en-US" smtClean="0"/>
+              <a:rPr lang="en-US"/>
               <a:t>Fifth level</a:t>
             </a:r>
-            <a:endParaRPr lang="en-US"/>
           </a:p>
         </p:txBody>
       </p:sp>
@@ -2244,7 +2242,7 @@
           <a:p>
             <a:pPr lvl="0"/>
             <a:r>
-              <a:rPr lang="en-US" smtClean="0"/>
+              <a:rPr lang="en-US"/>
               <a:t>Click to edit Master text styles</a:t>
             </a:r>
           </a:p>
@@ -2267,7 +2265,7 @@
           <a:p>
             <a:fld id="{5BCAD085-E8A6-8845-BD4E-CB4CCA059FC4}" type="datetimeFigureOut">
               <a:rPr lang="en-US" smtClean="0"/>
-              <a:t>1/27/13</a:t>
+              <a:t>6/10/26</a:t>
             </a:fld>
             <a:endParaRPr lang="en-US"/>
           </a:p>
@@ -2370,10 +2368,9 @@
           </a:lstStyle>
           <a:p>
             <a:r>
-              <a:rPr lang="en-US" smtClean="0"/>
+              <a:rPr lang="en-US"/>
               <a:t>Click to edit Master title style</a:t>
             </a:r>
-            <a:endParaRPr lang="en-US"/>
           </a:p>
         </p:txBody>
       </p:sp>
@@ -2497,7 +2494,7 @@
           <a:p>
             <a:pPr lvl="0"/>
             <a:r>
-              <a:rPr lang="en-US" smtClean="0"/>
+              <a:rPr lang="en-US"/>
               <a:t>Click to edit Master text styles</a:t>
             </a:r>
           </a:p>
@@ -2520,7 +2517,7 @@
           <a:p>
             <a:fld id="{5BCAD085-E8A6-8845-BD4E-CB4CCA059FC4}" type="datetimeFigureOut">
               <a:rPr lang="en-US" smtClean="0"/>
-              <a:t>1/27/13</a:t>
+              <a:t>6/10/26</a:t>
             </a:fld>
             <a:endParaRPr lang="en-US"/>
           </a:p>
@@ -2629,10 +2626,9 @@
           <a:lstStyle/>
           <a:p>
             <a:r>
-              <a:rPr lang="en-US" smtClean="0"/>
+              <a:rPr lang="en-US"/>
               <a:t>Click to edit Master title style</a:t>
             </a:r>
-            <a:endParaRPr lang="en-US"/>
           </a:p>
         </p:txBody>
       </p:sp>
@@ -2663,38 +2659,37 @@
           <a:p>
             <a:pPr lvl="0"/>
             <a:r>
-              <a:rPr lang="en-US" smtClean="0"/>
+              <a:rPr lang="en-US"/>
               <a:t>Click to edit Master text styles</a:t>
             </a:r>
           </a:p>
           <a:p>
             <a:pPr lvl="1"/>
             <a:r>
-              <a:rPr lang="en-US" smtClean="0"/>
+              <a:rPr lang="en-US"/>
               <a:t>Second level</a:t>
             </a:r>
           </a:p>
           <a:p>
             <a:pPr lvl="2"/>
             <a:r>
-              <a:rPr lang="en-US" smtClean="0"/>
+              <a:rPr lang="en-US"/>
               <a:t>Third level</a:t>
             </a:r>
           </a:p>
           <a:p>
             <a:pPr lvl="3"/>
             <a:r>
-              <a:rPr lang="en-US" smtClean="0"/>
+              <a:rPr lang="en-US"/>
               <a:t>Fourth level</a:t>
             </a:r>
           </a:p>
           <a:p>
             <a:pPr lvl="4"/>
             <a:r>
-              <a:rPr lang="en-US" smtClean="0"/>
+              <a:rPr lang="en-US"/>
               <a:t>Fifth level</a:t>
             </a:r>
-            <a:endParaRPr lang="en-US"/>
           </a:p>
         </p:txBody>
       </p:sp>
@@ -2733,7 +2728,7 @@
           <a:p>
             <a:fld id="{5BCAD085-E8A6-8845-BD4E-CB4CCA059FC4}" type="datetimeFigureOut">
               <a:rPr lang="en-US" smtClean="0"/>
-              <a:t>1/27/13</a:t>
+              <a:t>6/10/26</a:t>
             </a:fld>
             <a:endParaRPr lang="en-US"/>
           </a:p>
@@ -3092,7 +3087,7 @@
 </file>
 
 <file path=ppt/slides/slide1.xml><?xml version="1.0" encoding="utf-8"?>
-<p:sld xmlns:a="http://schemas.openxmlformats.org/drawingml/2006/main" xmlns:p="http://schemas.openxmlformats.org/presentationml/2006/main" xmlns:r="http://schemas.openxmlformats.org/officeDocument/2006/relationships">
+<p:sld xmlns:a="http://schemas.openxmlformats.org/drawingml/2006/main" xmlns:r="http://schemas.openxmlformats.org/officeDocument/2006/relationships" xmlns:p="http://schemas.openxmlformats.org/presentationml/2006/main">
   <p:cSld>
     <p:spTree>
       <p:nvGrpSpPr>
@@ -3100,7 +3095,14 @@
         <p:cNvGrpSpPr/>
         <p:nvPr/>
       </p:nvGrpSpPr>
-      <p:grpSpPr/>
+      <p:grpSpPr>
+        <a:xfrm>
+          <a:off x="0" y="0"/>
+          <a:ext cx="0" cy="0"/>
+          <a:chOff x="0" y="0"/>
+          <a:chExt cx="0" cy="0"/>
+        </a:xfrm>
+      </p:grpSpPr>
       <p:sp>
         <p:nvSpPr>
           <p:cNvPr id="2" name="Rectangle 1"/>
@@ -3110,7 +3112,7 @@
         <p:spPr>
           <a:xfrm>
             <a:off x="0" y="0"/>
-            <a:ext cx="12191695" cy="6858000"/>
+            <a:ext cx="12191695" cy="7086600"/>
           </a:xfrm>
           <a:prstGeom prst="rect">
             <a:avLst/>
@@ -3141,6 +3143,7 @@
           <a:lstStyle/>
           <a:p>
             <a:pPr algn="ctr"/>
+            <a:endParaRPr/>
           </a:p>
         </p:txBody>
       </p:sp>
@@ -3184,6 +3187,7 @@
           <a:lstStyle/>
           <a:p>
             <a:pPr algn="ctr"/>
+            <a:endParaRPr/>
           </a:p>
         </p:txBody>
       </p:sp>
@@ -3195,27 +3199,27 @@
         </p:nvSpPr>
         <p:spPr>
           <a:xfrm>
-            <a:off x="640080" y="228600"/>
-            <a:ext cx="3657600" cy="365760"/>
-          </a:xfrm>
-          <a:prstGeom prst="rect">
-            <a:avLst/>
-          </a:prstGeom>
-          <a:noFill/>
-        </p:spPr>
-        <p:txBody>
-          <a:bodyPr wrap="square" lIns="0" rIns="0" tIns="0" bIns="0" anchor="t">
-            <a:spAutoFit/>
-          </a:bodyPr>
-          <a:lstStyle/>
-          <a:p>
-            <a:pPr algn="l"/>
-            <a:r>
-              <a:rPr sz="1800" b="1" i="0">
+            <a:off x="628357" y="193431"/>
+            <a:ext cx="3657600" cy="276999"/>
+          </a:xfrm>
+          <a:prstGeom prst="rect">
+            <a:avLst/>
+          </a:prstGeom>
+          <a:noFill/>
+        </p:spPr>
+        <p:txBody>
+          <a:bodyPr wrap="square" lIns="0" tIns="0" rIns="0" bIns="0" anchor="t">
+            <a:spAutoFit/>
+          </a:bodyPr>
+          <a:lstStyle/>
+          <a:p>
+            <a:pPr algn="l"/>
+            <a:r>
+              <a:rPr sz="1800" dirty="0">
                 <a:solidFill>
                   <a:srgbClr val="FAFAFA"/>
                 </a:solidFill>
-                <a:latin typeface="Consolas"/>
+                <a:latin typeface="Xolonium" panose="02000503000000000000" pitchFamily="2" charset="0"/>
               </a:rPr>
               <a:t>THOX.ai</a:t>
             </a:r>
@@ -3230,7 +3234,7 @@
         </p:nvSpPr>
         <p:spPr>
           <a:xfrm>
-            <a:off x="1325880" y="384048"/>
+            <a:off x="1361049" y="360602"/>
             <a:ext cx="109728" cy="109728"/>
           </a:xfrm>
           <a:prstGeom prst="ellipse">
@@ -3262,6 +3266,7 @@
           <a:lstStyle/>
           <a:p>
             <a:pPr algn="ctr"/>
+            <a:endParaRPr/>
           </a:p>
         </p:txBody>
       </p:sp>
@@ -3282,7 +3287,7 @@
           <a:noFill/>
         </p:spPr>
         <p:txBody>
-          <a:bodyPr wrap="square" lIns="0" rIns="0" tIns="0" bIns="0" anchor="t">
+          <a:bodyPr wrap="square" lIns="0" tIns="0" rIns="0" bIns="0" anchor="t">
             <a:spAutoFit/>
           </a:bodyPr>
           <a:lstStyle/>
@@ -3317,7 +3322,7 @@
           <a:noFill/>
         </p:spPr>
         <p:txBody>
-          <a:bodyPr wrap="square" lIns="0" rIns="0" tIns="0" bIns="0" anchor="t">
+          <a:bodyPr wrap="square" lIns="0" tIns="0" rIns="0" bIns="0" anchor="t">
             <a:spAutoFit/>
           </a:bodyPr>
           <a:lstStyle/>
@@ -3373,16 +3378,16 @@
           </a:fontRef>
         </p:style>
         <p:txBody>
-          <a:bodyPr rtlCol="0" anchor="ctr" lIns="60000" rIns="60000" tIns="0" bIns="0"/>
+          <a:bodyPr lIns="60000" tIns="0" rIns="60000" bIns="0" rtlCol="0" anchor="ctr"/>
           <a:lstStyle/>
           <a:p>
             <a:pPr algn="ctr"/>
             <a:r>
-              <a:rPr sz="1100" b="1">
+              <a:rPr sz="1100" dirty="0">
                 <a:solidFill>
                   <a:srgbClr val="0A0E14"/>
                 </a:solidFill>
-                <a:latin typeface="Consolas"/>
+                <a:latin typeface="Xolonium" panose="02000503000000000000" pitchFamily="2" charset="0"/>
               </a:rPr>
               <a:t>Four devices</a:t>
             </a:r>
@@ -3427,16 +3432,16 @@
           </a:fontRef>
         </p:style>
         <p:txBody>
-          <a:bodyPr rtlCol="0" anchor="ctr" lIns="60000" rIns="60000" tIns="0" bIns="0"/>
+          <a:bodyPr lIns="60000" tIns="0" rIns="60000" bIns="0" rtlCol="0" anchor="ctr"/>
           <a:lstStyle/>
           <a:p>
             <a:pPr algn="ctr"/>
             <a:r>
-              <a:rPr sz="1100" b="1">
+              <a:rPr sz="1100" dirty="0">
                 <a:solidFill>
                   <a:srgbClr val="0A0E14"/>
                 </a:solidFill>
-                <a:latin typeface="Consolas"/>
+                <a:latin typeface="Xolonium" panose="02000503000000000000" pitchFamily="2" charset="0"/>
               </a:rPr>
               <a:t>One agent</a:t>
             </a:r>
@@ -3481,16 +3486,16 @@
           </a:fontRef>
         </p:style>
         <p:txBody>
-          <a:bodyPr rtlCol="0" anchor="ctr" lIns="60000" rIns="60000" tIns="0" bIns="0"/>
+          <a:bodyPr lIns="60000" tIns="0" rIns="60000" bIns="0" rtlCol="0" anchor="ctr"/>
           <a:lstStyle/>
           <a:p>
             <a:pPr algn="ctr"/>
             <a:r>
-              <a:rPr sz="1100" b="1">
+              <a:rPr sz="1100" dirty="0">
                 <a:solidFill>
                   <a:srgbClr val="0A0E14"/>
                 </a:solidFill>
-                <a:latin typeface="Consolas"/>
+                <a:latin typeface="Xolonium" panose="02000503000000000000" pitchFamily="2" charset="0"/>
               </a:rPr>
               <a:t>Honest silicon</a:t>
             </a:r>
@@ -3506,26 +3511,26 @@
         <p:spPr>
           <a:xfrm>
             <a:off x="640080" y="5852160"/>
-            <a:ext cx="10972800" cy="365760"/>
-          </a:xfrm>
-          <a:prstGeom prst="rect">
-            <a:avLst/>
-          </a:prstGeom>
-          <a:noFill/>
-        </p:spPr>
-        <p:txBody>
-          <a:bodyPr wrap="square" lIns="0" rIns="0" tIns="0" bIns="0" anchor="t">
-            <a:spAutoFit/>
-          </a:bodyPr>
-          <a:lstStyle/>
-          <a:p>
-            <a:pPr algn="l"/>
-            <a:r>
-              <a:rPr sz="1400" b="0" i="0">
+            <a:ext cx="10972800" cy="215444"/>
+          </a:xfrm>
+          <a:prstGeom prst="rect">
+            <a:avLst/>
+          </a:prstGeom>
+          <a:noFill/>
+        </p:spPr>
+        <p:txBody>
+          <a:bodyPr wrap="square" lIns="0" tIns="0" rIns="0" bIns="0" anchor="t">
+            <a:spAutoFit/>
+          </a:bodyPr>
+          <a:lstStyle/>
+          <a:p>
+            <a:pPr algn="l"/>
+            <a:r>
+              <a:rPr sz="1400" dirty="0">
                 <a:solidFill>
                   <a:srgbClr val="34D399"/>
                 </a:solidFill>
-                <a:latin typeface="Consolas"/>
+                <a:latin typeface="Xolonium" panose="02000503000000000000" pitchFamily="2" charset="0"/>
               </a:rPr>
               <a:t>Aug 2026 launch  |  $250K baseline  |  Ships Jan-Apr 2027</a:t>
             </a:r>
@@ -3541,26 +3546,26 @@
         <p:spPr>
           <a:xfrm>
             <a:off x="640080" y="6492240"/>
-            <a:ext cx="7315200" cy="274320"/>
-          </a:xfrm>
-          <a:prstGeom prst="rect">
-            <a:avLst/>
-          </a:prstGeom>
-          <a:noFill/>
-        </p:spPr>
-        <p:txBody>
-          <a:bodyPr wrap="square" lIns="0" rIns="0" tIns="0" bIns="0" anchor="t">
-            <a:spAutoFit/>
-          </a:bodyPr>
-          <a:lstStyle/>
-          <a:p>
-            <a:pPr algn="l"/>
-            <a:r>
-              <a:rPr sz="900" b="0" i="0">
+            <a:ext cx="7315200" cy="138499"/>
+          </a:xfrm>
+          <a:prstGeom prst="rect">
+            <a:avLst/>
+          </a:prstGeom>
+          <a:noFill/>
+        </p:spPr>
+        <p:txBody>
+          <a:bodyPr wrap="square" lIns="0" tIns="0" rIns="0" bIns="0" anchor="t">
+            <a:spAutoFit/>
+          </a:bodyPr>
+          <a:lstStyle/>
+          <a:p>
+            <a:pPr algn="l"/>
+            <a:r>
+              <a:rPr sz="900" dirty="0">
                 <a:solidFill>
                   <a:srgbClr val="475569"/>
                 </a:solidFill>
-                <a:latin typeface="Consolas"/>
+                <a:latin typeface="Xolonium" panose="02000503000000000000" pitchFamily="2" charset="0"/>
               </a:rPr>
               <a:t>THOX.ai  Your AI, on silicon you own.</a:t>
             </a:r>
@@ -3576,26 +3581,26 @@
         <p:spPr>
           <a:xfrm>
             <a:off x="10972800" y="6492240"/>
-            <a:ext cx="914400" cy="274320"/>
-          </a:xfrm>
-          <a:prstGeom prst="rect">
-            <a:avLst/>
-          </a:prstGeom>
-          <a:noFill/>
-        </p:spPr>
-        <p:txBody>
-          <a:bodyPr wrap="square" lIns="0" rIns="0" tIns="0" bIns="0" anchor="t">
+            <a:ext cx="914400" cy="138499"/>
+          </a:xfrm>
+          <a:prstGeom prst="rect">
+            <a:avLst/>
+          </a:prstGeom>
+          <a:noFill/>
+        </p:spPr>
+        <p:txBody>
+          <a:bodyPr wrap="square" lIns="0" tIns="0" rIns="0" bIns="0" anchor="t">
             <a:spAutoFit/>
           </a:bodyPr>
           <a:lstStyle/>
           <a:p>
             <a:pPr algn="r"/>
             <a:r>
-              <a:rPr sz="900" b="0" i="0">
+              <a:rPr sz="900" dirty="0">
                 <a:solidFill>
                   <a:srgbClr val="475569"/>
                 </a:solidFill>
-                <a:latin typeface="Consolas"/>
+                <a:latin typeface="Xolonium" panose="02000503000000000000" pitchFamily="2" charset="0"/>
               </a:rPr>
               <a:t>1 / 14</a:t>
             </a:r>
@@ -3611,7 +3616,7 @@
 </file>
 
 <file path=ppt/slides/slide10.xml><?xml version="1.0" encoding="utf-8"?>
-<p:sld xmlns:a="http://schemas.openxmlformats.org/drawingml/2006/main" xmlns:p="http://schemas.openxmlformats.org/presentationml/2006/main" xmlns:r="http://schemas.openxmlformats.org/officeDocument/2006/relationships">
+<p:sld xmlns:a="http://schemas.openxmlformats.org/drawingml/2006/main" xmlns:r="http://schemas.openxmlformats.org/officeDocument/2006/relationships" xmlns:p="http://schemas.openxmlformats.org/presentationml/2006/main">
   <p:cSld>
     <p:spTree>
       <p:nvGrpSpPr>
@@ -3619,7 +3624,14 @@
         <p:cNvGrpSpPr/>
         <p:nvPr/>
       </p:nvGrpSpPr>
-      <p:grpSpPr/>
+      <p:grpSpPr>
+        <a:xfrm>
+          <a:off x="0" y="0"/>
+          <a:ext cx="0" cy="0"/>
+          <a:chOff x="0" y="0"/>
+          <a:chExt cx="0" cy="0"/>
+        </a:xfrm>
+      </p:grpSpPr>
       <p:sp>
         <p:nvSpPr>
           <p:cNvPr id="2" name="Rectangle 1"/>
@@ -3660,6 +3672,7 @@
           <a:lstStyle/>
           <a:p>
             <a:pPr algn="ctr"/>
+            <a:endParaRPr/>
           </a:p>
         </p:txBody>
       </p:sp>
@@ -3703,6 +3716,7 @@
           <a:lstStyle/>
           <a:p>
             <a:pPr algn="ctr"/>
+            <a:endParaRPr/>
           </a:p>
         </p:txBody>
       </p:sp>
@@ -3715,26 +3729,26 @@
         <p:spPr>
           <a:xfrm>
             <a:off x="640080" y="502920"/>
-            <a:ext cx="7315200" cy="365760"/>
-          </a:xfrm>
-          <a:prstGeom prst="rect">
-            <a:avLst/>
-          </a:prstGeom>
-          <a:noFill/>
-        </p:spPr>
-        <p:txBody>
-          <a:bodyPr wrap="square" lIns="0" rIns="0" tIns="0" bIns="0" anchor="t">
-            <a:spAutoFit/>
-          </a:bodyPr>
-          <a:lstStyle/>
-          <a:p>
-            <a:pPr algn="l"/>
-            <a:r>
-              <a:rPr sz="1200" b="0" i="0">
+            <a:ext cx="7315200" cy="184666"/>
+          </a:xfrm>
+          <a:prstGeom prst="rect">
+            <a:avLst/>
+          </a:prstGeom>
+          <a:noFill/>
+        </p:spPr>
+        <p:txBody>
+          <a:bodyPr wrap="square" lIns="0" tIns="0" rIns="0" bIns="0" anchor="t">
+            <a:spAutoFit/>
+          </a:bodyPr>
+          <a:lstStyle/>
+          <a:p>
+            <a:pPr algn="l"/>
+            <a:r>
+              <a:rPr sz="1200" dirty="0">
                 <a:solidFill>
                   <a:srgbClr val="10B981"/>
                 </a:solidFill>
-                <a:latin typeface="Consolas"/>
+                <a:latin typeface="Xolonium" panose="02000503000000000000" pitchFamily="2" charset="0"/>
               </a:rPr>
               <a:t>WHY NOW</a:t>
             </a:r>
@@ -3758,7 +3772,7 @@
           <a:noFill/>
         </p:spPr>
         <p:txBody>
-          <a:bodyPr wrap="square" lIns="0" rIns="0" tIns="0" bIns="0" anchor="t">
+          <a:bodyPr wrap="square" lIns="0" tIns="0" rIns="0" bIns="0" anchor="t">
             <a:spAutoFit/>
           </a:bodyPr>
           <a:lstStyle/>
@@ -3785,29 +3799,35 @@
         <p:spPr>
           <a:xfrm>
             <a:off x="640080" y="2011680"/>
-            <a:ext cx="3017520" cy="457200"/>
-          </a:xfrm>
-          <a:prstGeom prst="rect">
-            <a:avLst/>
-          </a:prstGeom>
-          <a:noFill/>
-        </p:spPr>
-        <p:txBody>
-          <a:bodyPr wrap="square" lIns="0" rIns="0" tIns="0" bIns="0" anchor="t">
-            <a:spAutoFit/>
-          </a:bodyPr>
-          <a:lstStyle/>
-          <a:p>
-            <a:pPr algn="l"/>
-            <a:r>
-              <a:rPr sz="1300" b="0" i="0">
+            <a:ext cx="3017520" cy="200055"/>
+          </a:xfrm>
+          <a:prstGeom prst="rect">
+            <a:avLst/>
+          </a:prstGeom>
+          <a:noFill/>
+        </p:spPr>
+        <p:txBody>
+          <a:bodyPr wrap="square" lIns="0" tIns="0" rIns="0" bIns="0" anchor="t">
+            <a:spAutoFit/>
+          </a:bodyPr>
+          <a:lstStyle/>
+          <a:p>
+            <a:pPr algn="l"/>
+            <a:r>
+              <a:rPr sz="1300" dirty="0" err="1">
                 <a:solidFill>
                   <a:srgbClr val="34D399"/>
                 </a:solidFill>
-                <a:latin typeface="Consolas"/>
+                <a:latin typeface="Xolonium" panose="02000503000000000000" pitchFamily="2" charset="0"/>
               </a:rPr>
               <a:t>thox-vmlx</a:t>
             </a:r>
+            <a:endParaRPr sz="1300" dirty="0">
+              <a:solidFill>
+                <a:srgbClr val="34D399"/>
+              </a:solidFill>
+              <a:latin typeface="Xolonium" panose="02000503000000000000" pitchFamily="2" charset="0"/>
+            </a:endParaRPr>
           </a:p>
         </p:txBody>
       </p:sp>
@@ -3828,7 +3848,7 @@
           <a:noFill/>
         </p:spPr>
         <p:txBody>
-          <a:bodyPr wrap="square" lIns="0" rIns="0" tIns="0" bIns="0" anchor="t">
+          <a:bodyPr wrap="square" lIns="0" tIns="0" rIns="0" bIns="0" anchor="t">
             <a:spAutoFit/>
           </a:bodyPr>
           <a:lstStyle/>
@@ -3855,28 +3875,37 @@
         <p:spPr>
           <a:xfrm>
             <a:off x="640080" y="2606040"/>
-            <a:ext cx="3017520" cy="457200"/>
-          </a:xfrm>
-          <a:prstGeom prst="rect">
-            <a:avLst/>
-          </a:prstGeom>
-          <a:noFill/>
-        </p:spPr>
-        <p:txBody>
-          <a:bodyPr wrap="square" lIns="0" rIns="0" tIns="0" bIns="0" anchor="t">
-            <a:spAutoFit/>
-          </a:bodyPr>
-          <a:lstStyle/>
-          <a:p>
-            <a:pPr algn="l"/>
-            <a:r>
-              <a:rPr sz="1300" b="0" i="0">
+            <a:ext cx="3017520" cy="200055"/>
+          </a:xfrm>
+          <a:prstGeom prst="rect">
+            <a:avLst/>
+          </a:prstGeom>
+          <a:noFill/>
+        </p:spPr>
+        <p:txBody>
+          <a:bodyPr wrap="square" lIns="0" tIns="0" rIns="0" bIns="0" anchor="t">
+            <a:spAutoFit/>
+          </a:bodyPr>
+          <a:lstStyle/>
+          <a:p>
+            <a:pPr algn="l"/>
+            <a:r>
+              <a:rPr sz="1300" dirty="0" err="1">
                 <a:solidFill>
                   <a:srgbClr val="34D399"/>
                 </a:solidFill>
-                <a:latin typeface="Consolas"/>
-              </a:rPr>
-              <a:t>magstack-air family</a:t>
+                <a:latin typeface="Xolonium" panose="02000503000000000000" pitchFamily="2" charset="0"/>
+              </a:rPr>
+              <a:t>magstack</a:t>
+            </a:r>
+            <a:r>
+              <a:rPr sz="1300" dirty="0">
+                <a:solidFill>
+                  <a:srgbClr val="34D399"/>
+                </a:solidFill>
+                <a:latin typeface="Xolonium" panose="02000503000000000000" pitchFamily="2" charset="0"/>
+              </a:rPr>
+              <a:t>-air family</a:t>
             </a:r>
           </a:p>
         </p:txBody>
@@ -3898,7 +3927,7 @@
           <a:noFill/>
         </p:spPr>
         <p:txBody>
-          <a:bodyPr wrap="square" lIns="0" rIns="0" tIns="0" bIns="0" anchor="t">
+          <a:bodyPr wrap="square" lIns="0" tIns="0" rIns="0" bIns="0" anchor="t">
             <a:spAutoFit/>
           </a:bodyPr>
           <a:lstStyle/>
@@ -3925,28 +3954,37 @@
         <p:spPr>
           <a:xfrm>
             <a:off x="640080" y="3200400"/>
-            <a:ext cx="3017520" cy="457200"/>
-          </a:xfrm>
-          <a:prstGeom prst="rect">
-            <a:avLst/>
-          </a:prstGeom>
-          <a:noFill/>
-        </p:spPr>
-        <p:txBody>
-          <a:bodyPr wrap="square" lIns="0" rIns="0" tIns="0" bIns="0" anchor="t">
-            <a:spAutoFit/>
-          </a:bodyPr>
-          <a:lstStyle/>
-          <a:p>
-            <a:pPr algn="l"/>
-            <a:r>
-              <a:rPr sz="1300" b="0" i="0">
+            <a:ext cx="3017520" cy="200055"/>
+          </a:xfrm>
+          <a:prstGeom prst="rect">
+            <a:avLst/>
+          </a:prstGeom>
+          <a:noFill/>
+        </p:spPr>
+        <p:txBody>
+          <a:bodyPr wrap="square" lIns="0" tIns="0" rIns="0" bIns="0" anchor="t">
+            <a:spAutoFit/>
+          </a:bodyPr>
+          <a:lstStyle/>
+          <a:p>
+            <a:pPr algn="l"/>
+            <a:r>
+              <a:rPr sz="1300" dirty="0" err="1">
                 <a:solidFill>
                   <a:srgbClr val="34D399"/>
                 </a:solidFill>
-                <a:latin typeface="Consolas"/>
-              </a:rPr>
-              <a:t>thoxymicro family</a:t>
+                <a:latin typeface="Xolonium" panose="02000503000000000000" pitchFamily="2" charset="0"/>
+              </a:rPr>
+              <a:t>thoxymicro</a:t>
+            </a:r>
+            <a:r>
+              <a:rPr sz="1300" dirty="0">
+                <a:solidFill>
+                  <a:srgbClr val="34D399"/>
+                </a:solidFill>
+                <a:latin typeface="Xolonium" panose="02000503000000000000" pitchFamily="2" charset="0"/>
+              </a:rPr>
+              <a:t> family</a:t>
             </a:r>
           </a:p>
         </p:txBody>
@@ -3968,7 +4006,7 @@
           <a:noFill/>
         </p:spPr>
         <p:txBody>
-          <a:bodyPr wrap="square" lIns="0" rIns="0" tIns="0" bIns="0" anchor="t">
+          <a:bodyPr wrap="square" lIns="0" tIns="0" rIns="0" bIns="0" anchor="t">
             <a:spAutoFit/>
           </a:bodyPr>
           <a:lstStyle/>
@@ -3995,28 +4033,37 @@
         <p:spPr>
           <a:xfrm>
             <a:off x="640080" y="3794760"/>
-            <a:ext cx="3017520" cy="457200"/>
-          </a:xfrm>
-          <a:prstGeom prst="rect">
-            <a:avLst/>
-          </a:prstGeom>
-          <a:noFill/>
-        </p:spPr>
-        <p:txBody>
-          <a:bodyPr wrap="square" lIns="0" rIns="0" tIns="0" bIns="0" anchor="t">
-            <a:spAutoFit/>
-          </a:bodyPr>
-          <a:lstStyle/>
-          <a:p>
-            <a:pPr algn="l"/>
-            <a:r>
-              <a:rPr sz="1300" b="0" i="0">
+            <a:ext cx="3017520" cy="200055"/>
+          </a:xfrm>
+          <a:prstGeom prst="rect">
+            <a:avLst/>
+          </a:prstGeom>
+          <a:noFill/>
+        </p:spPr>
+        <p:txBody>
+          <a:bodyPr wrap="square" lIns="0" tIns="0" rIns="0" bIns="0" anchor="t">
+            <a:spAutoFit/>
+          </a:bodyPr>
+          <a:lstStyle/>
+          <a:p>
+            <a:pPr algn="l"/>
+            <a:r>
+              <a:rPr sz="1300" dirty="0" err="1">
                 <a:solidFill>
                   <a:srgbClr val="34D399"/>
                 </a:solidFill>
-                <a:latin typeface="Consolas"/>
-              </a:rPr>
-              <a:t>thox-forge</a:t>
+                <a:latin typeface="Xolonium" panose="02000503000000000000" pitchFamily="2" charset="0"/>
+              </a:rPr>
+              <a:t>thox</a:t>
+            </a:r>
+            <a:r>
+              <a:rPr sz="1300" dirty="0">
+                <a:solidFill>
+                  <a:srgbClr val="34D399"/>
+                </a:solidFill>
+                <a:latin typeface="Xolonium" panose="02000503000000000000" pitchFamily="2" charset="0"/>
+              </a:rPr>
+              <a:t>-forge</a:t>
             </a:r>
           </a:p>
         </p:txBody>
@@ -4038,7 +4085,7 @@
           <a:noFill/>
         </p:spPr>
         <p:txBody>
-          <a:bodyPr wrap="square" lIns="0" rIns="0" tIns="0" bIns="0" anchor="t">
+          <a:bodyPr wrap="square" lIns="0" tIns="0" rIns="0" bIns="0" anchor="t">
             <a:spAutoFit/>
           </a:bodyPr>
           <a:lstStyle/>
@@ -4065,28 +4112,37 @@
         <p:spPr>
           <a:xfrm>
             <a:off x="640080" y="4389120"/>
-            <a:ext cx="3017520" cy="457200"/>
-          </a:xfrm>
-          <a:prstGeom prst="rect">
-            <a:avLst/>
-          </a:prstGeom>
-          <a:noFill/>
-        </p:spPr>
-        <p:txBody>
-          <a:bodyPr wrap="square" lIns="0" rIns="0" tIns="0" bIns="0" anchor="t">
-            <a:spAutoFit/>
-          </a:bodyPr>
-          <a:lstStyle/>
-          <a:p>
-            <a:pPr algn="l"/>
-            <a:r>
-              <a:rPr sz="1300" b="0" i="0">
+            <a:ext cx="3017520" cy="200055"/>
+          </a:xfrm>
+          <a:prstGeom prst="rect">
+            <a:avLst/>
+          </a:prstGeom>
+          <a:noFill/>
+        </p:spPr>
+        <p:txBody>
+          <a:bodyPr wrap="square" lIns="0" tIns="0" rIns="0" bIns="0" anchor="t">
+            <a:spAutoFit/>
+          </a:bodyPr>
+          <a:lstStyle/>
+          <a:p>
+            <a:pPr algn="l"/>
+            <a:r>
+              <a:rPr sz="1300" dirty="0" err="1">
                 <a:solidFill>
                   <a:srgbClr val="34D399"/>
                 </a:solidFill>
-                <a:latin typeface="Consolas"/>
-              </a:rPr>
-              <a:t>thoxymicro-install</a:t>
+                <a:latin typeface="Xolonium" panose="02000503000000000000" pitchFamily="2" charset="0"/>
+              </a:rPr>
+              <a:t>thoxymicro</a:t>
+            </a:r>
+            <a:r>
+              <a:rPr sz="1300" dirty="0">
+                <a:solidFill>
+                  <a:srgbClr val="34D399"/>
+                </a:solidFill>
+                <a:latin typeface="Xolonium" panose="02000503000000000000" pitchFamily="2" charset="0"/>
+              </a:rPr>
+              <a:t>-install</a:t>
             </a:r>
           </a:p>
         </p:txBody>
@@ -4108,7 +4164,7 @@
           <a:noFill/>
         </p:spPr>
         <p:txBody>
-          <a:bodyPr wrap="square" lIns="0" rIns="0" tIns="0" bIns="0" anchor="t">
+          <a:bodyPr wrap="square" lIns="0" tIns="0" rIns="0" bIns="0" anchor="t">
             <a:spAutoFit/>
           </a:bodyPr>
           <a:lstStyle/>
@@ -4135,26 +4191,26 @@
         <p:spPr>
           <a:xfrm>
             <a:off x="640080" y="4983480"/>
-            <a:ext cx="3017520" cy="457200"/>
-          </a:xfrm>
-          <a:prstGeom prst="rect">
-            <a:avLst/>
-          </a:prstGeom>
-          <a:noFill/>
-        </p:spPr>
-        <p:txBody>
-          <a:bodyPr wrap="square" lIns="0" rIns="0" tIns="0" bIns="0" anchor="t">
-            <a:spAutoFit/>
-          </a:bodyPr>
-          <a:lstStyle/>
-          <a:p>
-            <a:pPr algn="l"/>
-            <a:r>
-              <a:rPr sz="1300" b="0" i="0">
+            <a:ext cx="3017520" cy="200055"/>
+          </a:xfrm>
+          <a:prstGeom prst="rect">
+            <a:avLst/>
+          </a:prstGeom>
+          <a:noFill/>
+        </p:spPr>
+        <p:txBody>
+          <a:bodyPr wrap="square" lIns="0" tIns="0" rIns="0" bIns="0" anchor="t">
+            <a:spAutoFit/>
+          </a:bodyPr>
+          <a:lstStyle/>
+          <a:p>
+            <a:pPr algn="l"/>
+            <a:r>
+              <a:rPr sz="1300" dirty="0">
                 <a:solidFill>
                   <a:srgbClr val="34D399"/>
                 </a:solidFill>
-                <a:latin typeface="Consolas"/>
+                <a:latin typeface="Xolonium" panose="02000503000000000000" pitchFamily="2" charset="0"/>
               </a:rPr>
               <a:t>Edge silicon caught up</a:t>
             </a:r>
@@ -4178,7 +4234,7 @@
           <a:noFill/>
         </p:spPr>
         <p:txBody>
-          <a:bodyPr wrap="square" lIns="0" rIns="0" tIns="0" bIns="0" anchor="t">
+          <a:bodyPr wrap="square" lIns="0" tIns="0" rIns="0" bIns="0" anchor="t">
             <a:spAutoFit/>
           </a:bodyPr>
           <a:lstStyle/>
@@ -4205,26 +4261,26 @@
         <p:spPr>
           <a:xfrm>
             <a:off x="640080" y="6492240"/>
-            <a:ext cx="7315200" cy="274320"/>
-          </a:xfrm>
-          <a:prstGeom prst="rect">
-            <a:avLst/>
-          </a:prstGeom>
-          <a:noFill/>
-        </p:spPr>
-        <p:txBody>
-          <a:bodyPr wrap="square" lIns="0" rIns="0" tIns="0" bIns="0" anchor="t">
-            <a:spAutoFit/>
-          </a:bodyPr>
-          <a:lstStyle/>
-          <a:p>
-            <a:pPr algn="l"/>
-            <a:r>
-              <a:rPr sz="900" b="0" i="0">
+            <a:ext cx="7315200" cy="138499"/>
+          </a:xfrm>
+          <a:prstGeom prst="rect">
+            <a:avLst/>
+          </a:prstGeom>
+          <a:noFill/>
+        </p:spPr>
+        <p:txBody>
+          <a:bodyPr wrap="square" lIns="0" tIns="0" rIns="0" bIns="0" anchor="t">
+            <a:spAutoFit/>
+          </a:bodyPr>
+          <a:lstStyle/>
+          <a:p>
+            <a:pPr algn="l"/>
+            <a:r>
+              <a:rPr sz="900" dirty="0">
                 <a:solidFill>
                   <a:srgbClr val="475569"/>
                 </a:solidFill>
-                <a:latin typeface="Consolas"/>
+                <a:latin typeface="Xolonium" panose="02000503000000000000" pitchFamily="2" charset="0"/>
               </a:rPr>
               <a:t>THOX.ai  Your AI, on silicon you own.</a:t>
             </a:r>
@@ -4240,26 +4296,26 @@
         <p:spPr>
           <a:xfrm>
             <a:off x="10972800" y="6492240"/>
-            <a:ext cx="914400" cy="274320"/>
-          </a:xfrm>
-          <a:prstGeom prst="rect">
-            <a:avLst/>
-          </a:prstGeom>
-          <a:noFill/>
-        </p:spPr>
-        <p:txBody>
-          <a:bodyPr wrap="square" lIns="0" rIns="0" tIns="0" bIns="0" anchor="t">
+            <a:ext cx="914400" cy="138499"/>
+          </a:xfrm>
+          <a:prstGeom prst="rect">
+            <a:avLst/>
+          </a:prstGeom>
+          <a:noFill/>
+        </p:spPr>
+        <p:txBody>
+          <a:bodyPr wrap="square" lIns="0" tIns="0" rIns="0" bIns="0" anchor="t">
             <a:spAutoFit/>
           </a:bodyPr>
           <a:lstStyle/>
           <a:p>
             <a:pPr algn="r"/>
             <a:r>
-              <a:rPr sz="900" b="0" i="0">
+              <a:rPr sz="900" dirty="0">
                 <a:solidFill>
                   <a:srgbClr val="475569"/>
                 </a:solidFill>
-                <a:latin typeface="Consolas"/>
+                <a:latin typeface="Xolonium" panose="02000503000000000000" pitchFamily="2" charset="0"/>
               </a:rPr>
               <a:t>10 / 14</a:t>
             </a:r>
@@ -4275,7 +4331,7 @@
 </file>
 
 <file path=ppt/slides/slide11.xml><?xml version="1.0" encoding="utf-8"?>
-<p:sld xmlns:a="http://schemas.openxmlformats.org/drawingml/2006/main" xmlns:p="http://schemas.openxmlformats.org/presentationml/2006/main" xmlns:r="http://schemas.openxmlformats.org/officeDocument/2006/relationships">
+<p:sld xmlns:a="http://schemas.openxmlformats.org/drawingml/2006/main" xmlns:r="http://schemas.openxmlformats.org/officeDocument/2006/relationships" xmlns:p="http://schemas.openxmlformats.org/presentationml/2006/main">
   <p:cSld>
     <p:spTree>
       <p:nvGrpSpPr>
@@ -4283,7 +4339,14 @@
         <p:cNvGrpSpPr/>
         <p:nvPr/>
       </p:nvGrpSpPr>
-      <p:grpSpPr/>
+      <p:grpSpPr>
+        <a:xfrm>
+          <a:off x="0" y="0"/>
+          <a:ext cx="0" cy="0"/>
+          <a:chOff x="0" y="0"/>
+          <a:chExt cx="0" cy="0"/>
+        </a:xfrm>
+      </p:grpSpPr>
       <p:sp>
         <p:nvSpPr>
           <p:cNvPr id="2" name="Rectangle 1"/>
@@ -4324,6 +4387,7 @@
           <a:lstStyle/>
           <a:p>
             <a:pPr algn="ctr"/>
+            <a:endParaRPr/>
           </a:p>
         </p:txBody>
       </p:sp>
@@ -4367,6 +4431,7 @@
           <a:lstStyle/>
           <a:p>
             <a:pPr algn="ctr"/>
+            <a:endParaRPr/>
           </a:p>
         </p:txBody>
       </p:sp>
@@ -4379,26 +4444,26 @@
         <p:spPr>
           <a:xfrm>
             <a:off x="640080" y="502920"/>
-            <a:ext cx="7315200" cy="365760"/>
-          </a:xfrm>
-          <a:prstGeom prst="rect">
-            <a:avLst/>
-          </a:prstGeom>
-          <a:noFill/>
-        </p:spPr>
-        <p:txBody>
-          <a:bodyPr wrap="square" lIns="0" rIns="0" tIns="0" bIns="0" anchor="t">
-            <a:spAutoFit/>
-          </a:bodyPr>
-          <a:lstStyle/>
-          <a:p>
-            <a:pPr algn="l"/>
-            <a:r>
-              <a:rPr sz="1200" b="0" i="0">
+            <a:ext cx="7315200" cy="184666"/>
+          </a:xfrm>
+          <a:prstGeom prst="rect">
+            <a:avLst/>
+          </a:prstGeom>
+          <a:noFill/>
+        </p:spPr>
+        <p:txBody>
+          <a:bodyPr wrap="square" lIns="0" tIns="0" rIns="0" bIns="0" anchor="t">
+            <a:spAutoFit/>
+          </a:bodyPr>
+          <a:lstStyle/>
+          <a:p>
+            <a:pPr algn="l"/>
+            <a:r>
+              <a:rPr sz="1200" dirty="0">
                 <a:solidFill>
                   <a:srgbClr val="10B981"/>
                 </a:solidFill>
-                <a:latin typeface="Consolas"/>
+                <a:latin typeface="Xolonium" panose="02000503000000000000" pitchFamily="2" charset="0"/>
               </a:rPr>
               <a:t>BACKER TIERS</a:t>
             </a:r>
@@ -4422,7 +4487,7 @@
           <a:noFill/>
         </p:spPr>
         <p:txBody>
-          <a:bodyPr wrap="square" lIns="0" rIns="0" tIns="0" bIns="0" anchor="t">
+          <a:bodyPr wrap="square" lIns="0" tIns="0" rIns="0" bIns="0" anchor="t">
             <a:spAutoFit/>
           </a:bodyPr>
           <a:lstStyle/>
@@ -4480,6 +4545,7 @@
           <a:lstStyle/>
           <a:p>
             <a:pPr algn="ctr"/>
+            <a:endParaRPr/>
           </a:p>
         </p:txBody>
       </p:sp>
@@ -4500,7 +4566,7 @@
           <a:noFill/>
         </p:spPr>
         <p:txBody>
-          <a:bodyPr wrap="square" lIns="0" rIns="0" tIns="0" bIns="0" anchor="t">
+          <a:bodyPr wrap="square" lIns="0" tIns="0" rIns="0" bIns="0" anchor="t">
             <a:spAutoFit/>
           </a:bodyPr>
           <a:lstStyle/>
@@ -4527,26 +4593,26 @@
         <p:spPr>
           <a:xfrm>
             <a:off x="4297680" y="1828800"/>
-            <a:ext cx="1371600" cy="365760"/>
-          </a:xfrm>
-          <a:prstGeom prst="rect">
-            <a:avLst/>
-          </a:prstGeom>
-          <a:noFill/>
-        </p:spPr>
-        <p:txBody>
-          <a:bodyPr wrap="square" lIns="0" rIns="0" tIns="0" bIns="0" anchor="t">
-            <a:spAutoFit/>
-          </a:bodyPr>
-          <a:lstStyle/>
-          <a:p>
-            <a:pPr algn="l"/>
-            <a:r>
-              <a:rPr sz="1400" b="0" i="0">
+            <a:ext cx="1371600" cy="215444"/>
+          </a:xfrm>
+          <a:prstGeom prst="rect">
+            <a:avLst/>
+          </a:prstGeom>
+          <a:noFill/>
+        </p:spPr>
+        <p:txBody>
+          <a:bodyPr wrap="square" lIns="0" tIns="0" rIns="0" bIns="0" anchor="t">
+            <a:spAutoFit/>
+          </a:bodyPr>
+          <a:lstStyle/>
+          <a:p>
+            <a:pPr algn="l"/>
+            <a:r>
+              <a:rPr sz="1400" dirty="0">
                 <a:solidFill>
                   <a:srgbClr val="10B981"/>
                 </a:solidFill>
-                <a:latin typeface="Consolas"/>
+                <a:latin typeface="Xolonium" panose="02000503000000000000" pitchFamily="2" charset="0"/>
               </a:rPr>
               <a:t>$39</a:t>
             </a:r>
@@ -4570,7 +4636,7 @@
           <a:noFill/>
         </p:spPr>
         <p:txBody>
-          <a:bodyPr wrap="square" lIns="0" rIns="0" tIns="0" bIns="0" anchor="t">
+          <a:bodyPr wrap="square" lIns="0" tIns="0" rIns="0" bIns="0" anchor="t">
             <a:spAutoFit/>
           </a:bodyPr>
           <a:lstStyle/>
@@ -4628,6 +4694,7 @@
           <a:lstStyle/>
           <a:p>
             <a:pPr algn="ctr"/>
+            <a:endParaRPr/>
           </a:p>
         </p:txBody>
       </p:sp>
@@ -4648,7 +4715,7 @@
           <a:noFill/>
         </p:spPr>
         <p:txBody>
-          <a:bodyPr wrap="square" lIns="0" rIns="0" tIns="0" bIns="0" anchor="t">
+          <a:bodyPr wrap="square" lIns="0" tIns="0" rIns="0" bIns="0" anchor="t">
             <a:spAutoFit/>
           </a:bodyPr>
           <a:lstStyle/>
@@ -4675,26 +4742,26 @@
         <p:spPr>
           <a:xfrm>
             <a:off x="4297680" y="2240280"/>
-            <a:ext cx="1371600" cy="365760"/>
-          </a:xfrm>
-          <a:prstGeom prst="rect">
-            <a:avLst/>
-          </a:prstGeom>
-          <a:noFill/>
-        </p:spPr>
-        <p:txBody>
-          <a:bodyPr wrap="square" lIns="0" rIns="0" tIns="0" bIns="0" anchor="t">
-            <a:spAutoFit/>
-          </a:bodyPr>
-          <a:lstStyle/>
-          <a:p>
-            <a:pPr algn="l"/>
-            <a:r>
-              <a:rPr sz="1400" b="0" i="0">
+            <a:ext cx="1371600" cy="215444"/>
+          </a:xfrm>
+          <a:prstGeom prst="rect">
+            <a:avLst/>
+          </a:prstGeom>
+          <a:noFill/>
+        </p:spPr>
+        <p:txBody>
+          <a:bodyPr wrap="square" lIns="0" tIns="0" rIns="0" bIns="0" anchor="t">
+            <a:spAutoFit/>
+          </a:bodyPr>
+          <a:lstStyle/>
+          <a:p>
+            <a:pPr algn="l"/>
+            <a:r>
+              <a:rPr sz="1400" dirty="0">
                 <a:solidFill>
                   <a:srgbClr val="10B981"/>
                 </a:solidFill>
-                <a:latin typeface="Consolas"/>
+                <a:latin typeface="Xolonium" panose="02000503000000000000" pitchFamily="2" charset="0"/>
               </a:rPr>
               <a:t>$49</a:t>
             </a:r>
@@ -4718,7 +4785,7 @@
           <a:noFill/>
         </p:spPr>
         <p:txBody>
-          <a:bodyPr wrap="square" lIns="0" rIns="0" tIns="0" bIns="0" anchor="t">
+          <a:bodyPr wrap="square" lIns="0" tIns="0" rIns="0" bIns="0" anchor="t">
             <a:spAutoFit/>
           </a:bodyPr>
           <a:lstStyle/>
@@ -4776,6 +4843,7 @@
           <a:lstStyle/>
           <a:p>
             <a:pPr algn="ctr"/>
+            <a:endParaRPr/>
           </a:p>
         </p:txBody>
       </p:sp>
@@ -4796,7 +4864,7 @@
           <a:noFill/>
         </p:spPr>
         <p:txBody>
-          <a:bodyPr wrap="square" lIns="0" rIns="0" tIns="0" bIns="0" anchor="t">
+          <a:bodyPr wrap="square" lIns="0" tIns="0" rIns="0" bIns="0" anchor="t">
             <a:spAutoFit/>
           </a:bodyPr>
           <a:lstStyle/>
@@ -4823,26 +4891,26 @@
         <p:spPr>
           <a:xfrm>
             <a:off x="4297680" y="2651760"/>
-            <a:ext cx="1371600" cy="365760"/>
-          </a:xfrm>
-          <a:prstGeom prst="rect">
-            <a:avLst/>
-          </a:prstGeom>
-          <a:noFill/>
-        </p:spPr>
-        <p:txBody>
-          <a:bodyPr wrap="square" lIns="0" rIns="0" tIns="0" bIns="0" anchor="t">
-            <a:spAutoFit/>
-          </a:bodyPr>
-          <a:lstStyle/>
-          <a:p>
-            <a:pPr algn="l"/>
-            <a:r>
-              <a:rPr sz="1400" b="0" i="0">
+            <a:ext cx="1371600" cy="215444"/>
+          </a:xfrm>
+          <a:prstGeom prst="rect">
+            <a:avLst/>
+          </a:prstGeom>
+          <a:noFill/>
+        </p:spPr>
+        <p:txBody>
+          <a:bodyPr wrap="square" lIns="0" tIns="0" rIns="0" bIns="0" anchor="t">
+            <a:spAutoFit/>
+          </a:bodyPr>
+          <a:lstStyle/>
+          <a:p>
+            <a:pPr algn="l"/>
+            <a:r>
+              <a:rPr sz="1400" dirty="0">
                 <a:solidFill>
                   <a:srgbClr val="34D399"/>
                 </a:solidFill>
-                <a:latin typeface="Consolas"/>
+                <a:latin typeface="Xolonium" panose="02000503000000000000" pitchFamily="2" charset="0"/>
               </a:rPr>
               <a:t>$69</a:t>
             </a:r>
@@ -4866,7 +4934,7 @@
           <a:noFill/>
         </p:spPr>
         <p:txBody>
-          <a:bodyPr wrap="square" lIns="0" rIns="0" tIns="0" bIns="0" anchor="t">
+          <a:bodyPr wrap="square" lIns="0" tIns="0" rIns="0" bIns="0" anchor="t">
             <a:spAutoFit/>
           </a:bodyPr>
           <a:lstStyle/>
@@ -4924,6 +4992,7 @@
           <a:lstStyle/>
           <a:p>
             <a:pPr algn="ctr"/>
+            <a:endParaRPr/>
           </a:p>
         </p:txBody>
       </p:sp>
@@ -4944,7 +5013,7 @@
           <a:noFill/>
         </p:spPr>
         <p:txBody>
-          <a:bodyPr wrap="square" lIns="0" rIns="0" tIns="0" bIns="0" anchor="t">
+          <a:bodyPr wrap="square" lIns="0" tIns="0" rIns="0" bIns="0" anchor="t">
             <a:spAutoFit/>
           </a:bodyPr>
           <a:lstStyle/>
@@ -4971,26 +5040,26 @@
         <p:spPr>
           <a:xfrm>
             <a:off x="4297680" y="3063240"/>
-            <a:ext cx="1371600" cy="365760"/>
-          </a:xfrm>
-          <a:prstGeom prst="rect">
-            <a:avLst/>
-          </a:prstGeom>
-          <a:noFill/>
-        </p:spPr>
-        <p:txBody>
-          <a:bodyPr wrap="square" lIns="0" rIns="0" tIns="0" bIns="0" anchor="t">
-            <a:spAutoFit/>
-          </a:bodyPr>
-          <a:lstStyle/>
-          <a:p>
-            <a:pPr algn="l"/>
-            <a:r>
-              <a:rPr sz="1400" b="0" i="0">
+            <a:ext cx="1371600" cy="215444"/>
+          </a:xfrm>
+          <a:prstGeom prst="rect">
+            <a:avLst/>
+          </a:prstGeom>
+          <a:noFill/>
+        </p:spPr>
+        <p:txBody>
+          <a:bodyPr wrap="square" lIns="0" tIns="0" rIns="0" bIns="0" anchor="t">
+            <a:spAutoFit/>
+          </a:bodyPr>
+          <a:lstStyle/>
+          <a:p>
+            <a:pPr algn="l"/>
+            <a:r>
+              <a:rPr sz="1400" dirty="0">
                 <a:solidFill>
                   <a:srgbClr val="A855F7"/>
                 </a:solidFill>
-                <a:latin typeface="Consolas"/>
+                <a:latin typeface="Xolonium" panose="02000503000000000000" pitchFamily="2" charset="0"/>
               </a:rPr>
               <a:t>$79</a:t>
             </a:r>
@@ -5014,7 +5083,7 @@
           <a:noFill/>
         </p:spPr>
         <p:txBody>
-          <a:bodyPr wrap="square" lIns="0" rIns="0" tIns="0" bIns="0" anchor="t">
+          <a:bodyPr wrap="square" lIns="0" tIns="0" rIns="0" bIns="0" anchor="t">
             <a:spAutoFit/>
           </a:bodyPr>
           <a:lstStyle/>
@@ -5072,6 +5141,7 @@
           <a:lstStyle/>
           <a:p>
             <a:pPr algn="ctr"/>
+            <a:endParaRPr/>
           </a:p>
         </p:txBody>
       </p:sp>
@@ -5092,7 +5162,7 @@
           <a:noFill/>
         </p:spPr>
         <p:txBody>
-          <a:bodyPr wrap="square" lIns="0" rIns="0" tIns="0" bIns="0" anchor="t">
+          <a:bodyPr wrap="square" lIns="0" tIns="0" rIns="0" bIns="0" anchor="t">
             <a:spAutoFit/>
           </a:bodyPr>
           <a:lstStyle/>
@@ -5119,26 +5189,26 @@
         <p:spPr>
           <a:xfrm>
             <a:off x="4297680" y="3474720"/>
-            <a:ext cx="1371600" cy="365760"/>
-          </a:xfrm>
-          <a:prstGeom prst="rect">
-            <a:avLst/>
-          </a:prstGeom>
-          <a:noFill/>
-        </p:spPr>
-        <p:txBody>
-          <a:bodyPr wrap="square" lIns="0" rIns="0" tIns="0" bIns="0" anchor="t">
-            <a:spAutoFit/>
-          </a:bodyPr>
-          <a:lstStyle/>
-          <a:p>
-            <a:pPr algn="l"/>
-            <a:r>
-              <a:rPr sz="1400" b="0" i="0">
+            <a:ext cx="1371600" cy="215444"/>
+          </a:xfrm>
+          <a:prstGeom prst="rect">
+            <a:avLst/>
+          </a:prstGeom>
+          <a:noFill/>
+        </p:spPr>
+        <p:txBody>
+          <a:bodyPr wrap="square" lIns="0" tIns="0" rIns="0" bIns="0" anchor="t">
+            <a:spAutoFit/>
+          </a:bodyPr>
+          <a:lstStyle/>
+          <a:p>
+            <a:pPr algn="l"/>
+            <a:r>
+              <a:rPr sz="1400" dirty="0">
                 <a:solidFill>
                   <a:srgbClr val="34D399"/>
                 </a:solidFill>
-                <a:latin typeface="Consolas"/>
+                <a:latin typeface="Xolonium" panose="02000503000000000000" pitchFamily="2" charset="0"/>
               </a:rPr>
               <a:t>$109</a:t>
             </a:r>
@@ -5162,7 +5232,7 @@
           <a:noFill/>
         </p:spPr>
         <p:txBody>
-          <a:bodyPr wrap="square" lIns="0" rIns="0" tIns="0" bIns="0" anchor="t">
+          <a:bodyPr wrap="square" lIns="0" tIns="0" rIns="0" bIns="0" anchor="t">
             <a:spAutoFit/>
           </a:bodyPr>
           <a:lstStyle/>
@@ -5220,6 +5290,7 @@
           <a:lstStyle/>
           <a:p>
             <a:pPr algn="ctr"/>
+            <a:endParaRPr/>
           </a:p>
         </p:txBody>
       </p:sp>
@@ -5240,7 +5311,7 @@
           <a:noFill/>
         </p:spPr>
         <p:txBody>
-          <a:bodyPr wrap="square" lIns="0" rIns="0" tIns="0" bIns="0" anchor="t">
+          <a:bodyPr wrap="square" lIns="0" tIns="0" rIns="0" bIns="0" anchor="t">
             <a:spAutoFit/>
           </a:bodyPr>
           <a:lstStyle/>
@@ -5267,26 +5338,26 @@
         <p:spPr>
           <a:xfrm>
             <a:off x="4297680" y="3886200"/>
-            <a:ext cx="1371600" cy="365760"/>
-          </a:xfrm>
-          <a:prstGeom prst="rect">
-            <a:avLst/>
-          </a:prstGeom>
-          <a:noFill/>
-        </p:spPr>
-        <p:txBody>
-          <a:bodyPr wrap="square" lIns="0" rIns="0" tIns="0" bIns="0" anchor="t">
-            <a:spAutoFit/>
-          </a:bodyPr>
-          <a:lstStyle/>
-          <a:p>
-            <a:pPr algn="l"/>
-            <a:r>
-              <a:rPr sz="1400" b="0" i="0">
+            <a:ext cx="1371600" cy="215444"/>
+          </a:xfrm>
+          <a:prstGeom prst="rect">
+            <a:avLst/>
+          </a:prstGeom>
+          <a:noFill/>
+        </p:spPr>
+        <p:txBody>
+          <a:bodyPr wrap="square" lIns="0" tIns="0" rIns="0" bIns="0" anchor="t">
+            <a:spAutoFit/>
+          </a:bodyPr>
+          <a:lstStyle/>
+          <a:p>
+            <a:pPr algn="l"/>
+            <a:r>
+              <a:rPr sz="1400" dirty="0">
                 <a:solidFill>
                   <a:srgbClr val="A855F7"/>
                 </a:solidFill>
-                <a:latin typeface="Consolas"/>
+                <a:latin typeface="Xolonium" panose="02000503000000000000" pitchFamily="2" charset="0"/>
               </a:rPr>
               <a:t>$119</a:t>
             </a:r>
@@ -5310,7 +5381,7 @@
           <a:noFill/>
         </p:spPr>
         <p:txBody>
-          <a:bodyPr wrap="square" lIns="0" rIns="0" tIns="0" bIns="0" anchor="t">
+          <a:bodyPr wrap="square" lIns="0" tIns="0" rIns="0" bIns="0" anchor="t">
             <a:spAutoFit/>
           </a:bodyPr>
           <a:lstStyle/>
@@ -5368,6 +5439,7 @@
           <a:lstStyle/>
           <a:p>
             <a:pPr algn="ctr"/>
+            <a:endParaRPr/>
           </a:p>
         </p:txBody>
       </p:sp>
@@ -5388,7 +5460,7 @@
           <a:noFill/>
         </p:spPr>
         <p:txBody>
-          <a:bodyPr wrap="square" lIns="0" rIns="0" tIns="0" bIns="0" anchor="t">
+          <a:bodyPr wrap="square" lIns="0" tIns="0" rIns="0" bIns="0" anchor="t">
             <a:spAutoFit/>
           </a:bodyPr>
           <a:lstStyle/>
@@ -5415,26 +5487,26 @@
         <p:spPr>
           <a:xfrm>
             <a:off x="4297680" y="4297680"/>
-            <a:ext cx="1371600" cy="365760"/>
-          </a:xfrm>
-          <a:prstGeom prst="rect">
-            <a:avLst/>
-          </a:prstGeom>
-          <a:noFill/>
-        </p:spPr>
-        <p:txBody>
-          <a:bodyPr wrap="square" lIns="0" rIns="0" tIns="0" bIns="0" anchor="t">
-            <a:spAutoFit/>
-          </a:bodyPr>
-          <a:lstStyle/>
-          <a:p>
-            <a:pPr algn="l"/>
-            <a:r>
-              <a:rPr sz="1400" b="0" i="0">
+            <a:ext cx="1371600" cy="215444"/>
+          </a:xfrm>
+          <a:prstGeom prst="rect">
+            <a:avLst/>
+          </a:prstGeom>
+          <a:noFill/>
+        </p:spPr>
+        <p:txBody>
+          <a:bodyPr wrap="square" lIns="0" tIns="0" rIns="0" bIns="0" anchor="t">
+            <a:spAutoFit/>
+          </a:bodyPr>
+          <a:lstStyle/>
+          <a:p>
+            <a:pPr algn="l"/>
+            <a:r>
+              <a:rPr sz="1400" dirty="0">
                 <a:solidFill>
                   <a:srgbClr val="F59E0B"/>
                 </a:solidFill>
-                <a:latin typeface="Consolas"/>
+                <a:latin typeface="Xolonium" panose="02000503000000000000" pitchFamily="2" charset="0"/>
               </a:rPr>
               <a:t>$499</a:t>
             </a:r>
@@ -5458,7 +5530,7 @@
           <a:noFill/>
         </p:spPr>
         <p:txBody>
-          <a:bodyPr wrap="square" lIns="0" rIns="0" tIns="0" bIns="0" anchor="t">
+          <a:bodyPr wrap="square" lIns="0" tIns="0" rIns="0" bIns="0" anchor="t">
             <a:spAutoFit/>
           </a:bodyPr>
           <a:lstStyle/>
@@ -5516,6 +5588,7 @@
           <a:lstStyle/>
           <a:p>
             <a:pPr algn="ctr"/>
+            <a:endParaRPr/>
           </a:p>
         </p:txBody>
       </p:sp>
@@ -5536,7 +5609,7 @@
           <a:noFill/>
         </p:spPr>
         <p:txBody>
-          <a:bodyPr wrap="square" lIns="0" rIns="0" tIns="0" bIns="0" anchor="t">
+          <a:bodyPr wrap="square" lIns="0" tIns="0" rIns="0" bIns="0" anchor="t">
             <a:spAutoFit/>
           </a:bodyPr>
           <a:lstStyle/>
@@ -5563,26 +5636,26 @@
         <p:spPr>
           <a:xfrm>
             <a:off x="4297680" y="4709160"/>
-            <a:ext cx="1371600" cy="365760"/>
-          </a:xfrm>
-          <a:prstGeom prst="rect">
-            <a:avLst/>
-          </a:prstGeom>
-          <a:noFill/>
-        </p:spPr>
-        <p:txBody>
-          <a:bodyPr wrap="square" lIns="0" rIns="0" tIns="0" bIns="0" anchor="t">
-            <a:spAutoFit/>
-          </a:bodyPr>
-          <a:lstStyle/>
-          <a:p>
-            <a:pPr algn="l"/>
-            <a:r>
-              <a:rPr sz="1400" b="0" i="0">
+            <a:ext cx="1371600" cy="215444"/>
+          </a:xfrm>
+          <a:prstGeom prst="rect">
+            <a:avLst/>
+          </a:prstGeom>
+          <a:noFill/>
+        </p:spPr>
+        <p:txBody>
+          <a:bodyPr wrap="square" lIns="0" tIns="0" rIns="0" bIns="0" anchor="t">
+            <a:spAutoFit/>
+          </a:bodyPr>
+          <a:lstStyle/>
+          <a:p>
+            <a:pPr algn="l"/>
+            <a:r>
+              <a:rPr sz="1400" dirty="0">
                 <a:solidFill>
                   <a:srgbClr val="A855F7"/>
                 </a:solidFill>
-                <a:latin typeface="Consolas"/>
+                <a:latin typeface="Xolonium" panose="02000503000000000000" pitchFamily="2" charset="0"/>
               </a:rPr>
               <a:t>$349</a:t>
             </a:r>
@@ -5606,7 +5679,7 @@
           <a:noFill/>
         </p:spPr>
         <p:txBody>
-          <a:bodyPr wrap="square" lIns="0" rIns="0" tIns="0" bIns="0" anchor="t">
+          <a:bodyPr wrap="square" lIns="0" tIns="0" rIns="0" bIns="0" anchor="t">
             <a:spAutoFit/>
           </a:bodyPr>
           <a:lstStyle/>
@@ -5664,6 +5737,7 @@
           <a:lstStyle/>
           <a:p>
             <a:pPr algn="ctr"/>
+            <a:endParaRPr/>
           </a:p>
         </p:txBody>
       </p:sp>
@@ -5684,7 +5758,7 @@
           <a:noFill/>
         </p:spPr>
         <p:txBody>
-          <a:bodyPr wrap="square" lIns="0" rIns="0" tIns="0" bIns="0" anchor="t">
+          <a:bodyPr wrap="square" lIns="0" tIns="0" rIns="0" bIns="0" anchor="t">
             <a:spAutoFit/>
           </a:bodyPr>
           <a:lstStyle/>
@@ -5711,26 +5785,26 @@
         <p:spPr>
           <a:xfrm>
             <a:off x="4297680" y="5120640"/>
-            <a:ext cx="1371600" cy="365760"/>
-          </a:xfrm>
-          <a:prstGeom prst="rect">
-            <a:avLst/>
-          </a:prstGeom>
-          <a:noFill/>
-        </p:spPr>
-        <p:txBody>
-          <a:bodyPr wrap="square" lIns="0" rIns="0" tIns="0" bIns="0" anchor="t">
-            <a:spAutoFit/>
-          </a:bodyPr>
-          <a:lstStyle/>
-          <a:p>
-            <a:pPr algn="l"/>
-            <a:r>
-              <a:rPr sz="1400" b="0" i="0">
+            <a:ext cx="1371600" cy="215444"/>
+          </a:xfrm>
+          <a:prstGeom prst="rect">
+            <a:avLst/>
+          </a:prstGeom>
+          <a:noFill/>
+        </p:spPr>
+        <p:txBody>
+          <a:bodyPr wrap="square" lIns="0" tIns="0" rIns="0" bIns="0" anchor="t">
+            <a:spAutoFit/>
+          </a:bodyPr>
+          <a:lstStyle/>
+          <a:p>
+            <a:pPr algn="l"/>
+            <a:r>
+              <a:rPr sz="1400" dirty="0">
                 <a:solidFill>
                   <a:srgbClr val="F59E0B"/>
                 </a:solidFill>
-                <a:latin typeface="Consolas"/>
+                <a:latin typeface="Xolonium" panose="02000503000000000000" pitchFamily="2" charset="0"/>
               </a:rPr>
               <a:t>$599</a:t>
             </a:r>
@@ -5754,7 +5828,7 @@
           <a:noFill/>
         </p:spPr>
         <p:txBody>
-          <a:bodyPr wrap="square" lIns="0" rIns="0" tIns="0" bIns="0" anchor="t">
+          <a:bodyPr wrap="square" lIns="0" tIns="0" rIns="0" bIns="0" anchor="t">
             <a:spAutoFit/>
           </a:bodyPr>
           <a:lstStyle/>
@@ -5812,6 +5886,7 @@
           <a:lstStyle/>
           <a:p>
             <a:pPr algn="ctr"/>
+            <a:endParaRPr/>
           </a:p>
         </p:txBody>
       </p:sp>
@@ -5832,7 +5907,7 @@
           <a:noFill/>
         </p:spPr>
         <p:txBody>
-          <a:bodyPr wrap="square" lIns="0" rIns="0" tIns="0" bIns="0" anchor="t">
+          <a:bodyPr wrap="square" lIns="0" tIns="0" rIns="0" bIns="0" anchor="t">
             <a:spAutoFit/>
           </a:bodyPr>
           <a:lstStyle/>
@@ -5859,26 +5934,26 @@
         <p:spPr>
           <a:xfrm>
             <a:off x="4297680" y="5532120"/>
-            <a:ext cx="1371600" cy="365760"/>
-          </a:xfrm>
-          <a:prstGeom prst="rect">
-            <a:avLst/>
-          </a:prstGeom>
-          <a:noFill/>
-        </p:spPr>
-        <p:txBody>
-          <a:bodyPr wrap="square" lIns="0" rIns="0" tIns="0" bIns="0" anchor="t">
-            <a:spAutoFit/>
-          </a:bodyPr>
-          <a:lstStyle/>
-          <a:p>
-            <a:pPr algn="l"/>
-            <a:r>
-              <a:rPr sz="1400" b="0" i="0">
+            <a:ext cx="1371600" cy="215444"/>
+          </a:xfrm>
+          <a:prstGeom prst="rect">
+            <a:avLst/>
+          </a:prstGeom>
+          <a:noFill/>
+        </p:spPr>
+        <p:txBody>
+          <a:bodyPr wrap="square" lIns="0" tIns="0" rIns="0" bIns="0" anchor="t">
+            <a:spAutoFit/>
+          </a:bodyPr>
+          <a:lstStyle/>
+          <a:p>
+            <a:pPr algn="l"/>
+            <a:r>
+              <a:rPr sz="1400" dirty="0">
                 <a:solidFill>
                   <a:srgbClr val="F59E0B"/>
                 </a:solidFill>
-                <a:latin typeface="Consolas"/>
+                <a:latin typeface="Xolonium" panose="02000503000000000000" pitchFamily="2" charset="0"/>
               </a:rPr>
               <a:t>$1,299</a:t>
             </a:r>
@@ -5902,7 +5977,7 @@
           <a:noFill/>
         </p:spPr>
         <p:txBody>
-          <a:bodyPr wrap="square" lIns="0" rIns="0" tIns="0" bIns="0" anchor="t">
+          <a:bodyPr wrap="square" lIns="0" tIns="0" rIns="0" bIns="0" anchor="t">
             <a:spAutoFit/>
           </a:bodyPr>
           <a:lstStyle/>
@@ -5929,26 +6004,26 @@
         <p:spPr>
           <a:xfrm>
             <a:off x="640080" y="6492240"/>
-            <a:ext cx="7315200" cy="274320"/>
-          </a:xfrm>
-          <a:prstGeom prst="rect">
-            <a:avLst/>
-          </a:prstGeom>
-          <a:noFill/>
-        </p:spPr>
-        <p:txBody>
-          <a:bodyPr wrap="square" lIns="0" rIns="0" tIns="0" bIns="0" anchor="t">
-            <a:spAutoFit/>
-          </a:bodyPr>
-          <a:lstStyle/>
-          <a:p>
-            <a:pPr algn="l"/>
-            <a:r>
-              <a:rPr sz="900" b="0" i="0">
+            <a:ext cx="7315200" cy="138499"/>
+          </a:xfrm>
+          <a:prstGeom prst="rect">
+            <a:avLst/>
+          </a:prstGeom>
+          <a:noFill/>
+        </p:spPr>
+        <p:txBody>
+          <a:bodyPr wrap="square" lIns="0" tIns="0" rIns="0" bIns="0" anchor="t">
+            <a:spAutoFit/>
+          </a:bodyPr>
+          <a:lstStyle/>
+          <a:p>
+            <a:pPr algn="l"/>
+            <a:r>
+              <a:rPr sz="900" dirty="0">
                 <a:solidFill>
                   <a:srgbClr val="475569"/>
                 </a:solidFill>
-                <a:latin typeface="Consolas"/>
+                <a:latin typeface="Xolonium" panose="02000503000000000000" pitchFamily="2" charset="0"/>
               </a:rPr>
               <a:t>THOX.ai  Your AI, on silicon you own.</a:t>
             </a:r>
@@ -5964,26 +6039,26 @@
         <p:spPr>
           <a:xfrm>
             <a:off x="10972800" y="6492240"/>
-            <a:ext cx="914400" cy="274320"/>
-          </a:xfrm>
-          <a:prstGeom prst="rect">
-            <a:avLst/>
-          </a:prstGeom>
-          <a:noFill/>
-        </p:spPr>
-        <p:txBody>
-          <a:bodyPr wrap="square" lIns="0" rIns="0" tIns="0" bIns="0" anchor="t">
+            <a:ext cx="914400" cy="138499"/>
+          </a:xfrm>
+          <a:prstGeom prst="rect">
+            <a:avLst/>
+          </a:prstGeom>
+          <a:noFill/>
+        </p:spPr>
+        <p:txBody>
+          <a:bodyPr wrap="square" lIns="0" tIns="0" rIns="0" bIns="0" anchor="t">
             <a:spAutoFit/>
           </a:bodyPr>
           <a:lstStyle/>
           <a:p>
             <a:pPr algn="r"/>
             <a:r>
-              <a:rPr sz="900" b="0" i="0">
+              <a:rPr sz="900" dirty="0">
                 <a:solidFill>
                   <a:srgbClr val="475569"/>
                 </a:solidFill>
-                <a:latin typeface="Consolas"/>
+                <a:latin typeface="Xolonium" panose="02000503000000000000" pitchFamily="2" charset="0"/>
               </a:rPr>
               <a:t>11 / 14</a:t>
             </a:r>
@@ -5999,7 +6074,7 @@
 </file>
 
 <file path=ppt/slides/slide12.xml><?xml version="1.0" encoding="utf-8"?>
-<p:sld xmlns:a="http://schemas.openxmlformats.org/drawingml/2006/main" xmlns:p="http://schemas.openxmlformats.org/presentationml/2006/main" xmlns:r="http://schemas.openxmlformats.org/officeDocument/2006/relationships">
+<p:sld xmlns:a="http://schemas.openxmlformats.org/drawingml/2006/main" xmlns:r="http://schemas.openxmlformats.org/officeDocument/2006/relationships" xmlns:p="http://schemas.openxmlformats.org/presentationml/2006/main">
   <p:cSld>
     <p:spTree>
       <p:nvGrpSpPr>
@@ -6007,7 +6082,14 @@
         <p:cNvGrpSpPr/>
         <p:nvPr/>
       </p:nvGrpSpPr>
-      <p:grpSpPr/>
+      <p:grpSpPr>
+        <a:xfrm>
+          <a:off x="0" y="0"/>
+          <a:ext cx="0" cy="0"/>
+          <a:chOff x="0" y="0"/>
+          <a:chExt cx="0" cy="0"/>
+        </a:xfrm>
+      </p:grpSpPr>
       <p:sp>
         <p:nvSpPr>
           <p:cNvPr id="2" name="Rectangle 1"/>
@@ -6048,6 +6130,7 @@
           <a:lstStyle/>
           <a:p>
             <a:pPr algn="ctr"/>
+            <a:endParaRPr/>
           </a:p>
         </p:txBody>
       </p:sp>
@@ -6091,6 +6174,7 @@
           <a:lstStyle/>
           <a:p>
             <a:pPr algn="ctr"/>
+            <a:endParaRPr/>
           </a:p>
         </p:txBody>
       </p:sp>
@@ -6103,26 +6187,26 @@
         <p:spPr>
           <a:xfrm>
             <a:off x="640080" y="502920"/>
-            <a:ext cx="7315200" cy="365760"/>
-          </a:xfrm>
-          <a:prstGeom prst="rect">
-            <a:avLst/>
-          </a:prstGeom>
-          <a:noFill/>
-        </p:spPr>
-        <p:txBody>
-          <a:bodyPr wrap="square" lIns="0" rIns="0" tIns="0" bIns="0" anchor="t">
-            <a:spAutoFit/>
-          </a:bodyPr>
-          <a:lstStyle/>
-          <a:p>
-            <a:pPr algn="l"/>
-            <a:r>
-              <a:rPr sz="1200" b="0" i="0">
+            <a:ext cx="7315200" cy="184666"/>
+          </a:xfrm>
+          <a:prstGeom prst="rect">
+            <a:avLst/>
+          </a:prstGeom>
+          <a:noFill/>
+        </p:spPr>
+        <p:txBody>
+          <a:bodyPr wrap="square" lIns="0" tIns="0" rIns="0" bIns="0" anchor="t">
+            <a:spAutoFit/>
+          </a:bodyPr>
+          <a:lstStyle/>
+          <a:p>
+            <a:pPr algn="l"/>
+            <a:r>
+              <a:rPr sz="1200" dirty="0">
                 <a:solidFill>
                   <a:srgbClr val="C084FC"/>
                 </a:solidFill>
-                <a:latin typeface="Consolas"/>
+                <a:latin typeface="Xolonium" panose="02000503000000000000" pitchFamily="2" charset="0"/>
               </a:rPr>
               <a:t>STRETCH GOALS</a:t>
             </a:r>
@@ -6146,7 +6230,7 @@
           <a:noFill/>
         </p:spPr>
         <p:txBody>
-          <a:bodyPr wrap="square" lIns="0" rIns="0" tIns="0" bIns="0" anchor="t">
+          <a:bodyPr wrap="square" lIns="0" tIns="0" rIns="0" bIns="0" anchor="t">
             <a:spAutoFit/>
           </a:bodyPr>
           <a:lstStyle/>
@@ -6204,6 +6288,7 @@
           <a:lstStyle/>
           <a:p>
             <a:pPr algn="ctr"/>
+            <a:endParaRPr/>
           </a:p>
         </p:txBody>
       </p:sp>
@@ -6216,26 +6301,26 @@
         <p:spPr>
           <a:xfrm>
             <a:off x="914400" y="2011680"/>
-            <a:ext cx="2286000" cy="457200"/>
-          </a:xfrm>
-          <a:prstGeom prst="rect">
-            <a:avLst/>
-          </a:prstGeom>
-          <a:noFill/>
-        </p:spPr>
-        <p:txBody>
-          <a:bodyPr wrap="square" lIns="0" rIns="0" tIns="0" bIns="0" anchor="t">
-            <a:spAutoFit/>
-          </a:bodyPr>
-          <a:lstStyle/>
-          <a:p>
-            <a:pPr algn="l"/>
-            <a:r>
-              <a:rPr sz="1800" b="1" i="0">
+            <a:ext cx="2286000" cy="276999"/>
+          </a:xfrm>
+          <a:prstGeom prst="rect">
+            <a:avLst/>
+          </a:prstGeom>
+          <a:noFill/>
+        </p:spPr>
+        <p:txBody>
+          <a:bodyPr wrap="square" lIns="0" tIns="0" rIns="0" bIns="0" anchor="t">
+            <a:spAutoFit/>
+          </a:bodyPr>
+          <a:lstStyle/>
+          <a:p>
+            <a:pPr algn="l"/>
+            <a:r>
+              <a:rPr sz="1800" dirty="0">
                 <a:solidFill>
                   <a:srgbClr val="10B981"/>
                 </a:solidFill>
-                <a:latin typeface="Consolas"/>
+                <a:latin typeface="Xolonium" panose="02000503000000000000" pitchFamily="2" charset="0"/>
               </a:rPr>
               <a:t>$250K</a:t>
             </a:r>
@@ -6259,7 +6344,7 @@
           <a:noFill/>
         </p:spPr>
         <p:txBody>
-          <a:bodyPr wrap="square" lIns="0" rIns="0" tIns="0" bIns="0" anchor="t">
+          <a:bodyPr wrap="square" lIns="0" tIns="0" rIns="0" bIns="0" anchor="t">
             <a:spAutoFit/>
           </a:bodyPr>
           <a:lstStyle/>
@@ -6317,6 +6402,7 @@
           <a:lstStyle/>
           <a:p>
             <a:pPr algn="ctr"/>
+            <a:endParaRPr/>
           </a:p>
         </p:txBody>
       </p:sp>
@@ -6329,26 +6415,26 @@
         <p:spPr>
           <a:xfrm>
             <a:off x="914400" y="2651760"/>
-            <a:ext cx="2286000" cy="457200"/>
-          </a:xfrm>
-          <a:prstGeom prst="rect">
-            <a:avLst/>
-          </a:prstGeom>
-          <a:noFill/>
-        </p:spPr>
-        <p:txBody>
-          <a:bodyPr wrap="square" lIns="0" rIns="0" tIns="0" bIns="0" anchor="t">
-            <a:spAutoFit/>
-          </a:bodyPr>
-          <a:lstStyle/>
-          <a:p>
-            <a:pPr algn="l"/>
-            <a:r>
-              <a:rPr sz="1800" b="1" i="0">
+            <a:ext cx="2286000" cy="276999"/>
+          </a:xfrm>
+          <a:prstGeom prst="rect">
+            <a:avLst/>
+          </a:prstGeom>
+          <a:noFill/>
+        </p:spPr>
+        <p:txBody>
+          <a:bodyPr wrap="square" lIns="0" tIns="0" rIns="0" bIns="0" anchor="t">
+            <a:spAutoFit/>
+          </a:bodyPr>
+          <a:lstStyle/>
+          <a:p>
+            <a:pPr algn="l"/>
+            <a:r>
+              <a:rPr sz="1800" dirty="0">
                 <a:solidFill>
                   <a:srgbClr val="34D399"/>
                 </a:solidFill>
-                <a:latin typeface="Consolas"/>
+                <a:latin typeface="Xolonium" panose="02000503000000000000" pitchFamily="2" charset="0"/>
               </a:rPr>
               <a:t>$500K</a:t>
             </a:r>
@@ -6372,7 +6458,7 @@
           <a:noFill/>
         </p:spPr>
         <p:txBody>
-          <a:bodyPr wrap="square" lIns="0" rIns="0" tIns="0" bIns="0" anchor="t">
+          <a:bodyPr wrap="square" lIns="0" tIns="0" rIns="0" bIns="0" anchor="t">
             <a:spAutoFit/>
           </a:bodyPr>
           <a:lstStyle/>
@@ -6430,6 +6516,7 @@
           <a:lstStyle/>
           <a:p>
             <a:pPr algn="ctr"/>
+            <a:endParaRPr/>
           </a:p>
         </p:txBody>
       </p:sp>
@@ -6442,26 +6529,26 @@
         <p:spPr>
           <a:xfrm>
             <a:off x="914400" y="3291840"/>
-            <a:ext cx="2286000" cy="457200"/>
-          </a:xfrm>
-          <a:prstGeom prst="rect">
-            <a:avLst/>
-          </a:prstGeom>
-          <a:noFill/>
-        </p:spPr>
-        <p:txBody>
-          <a:bodyPr wrap="square" lIns="0" rIns="0" tIns="0" bIns="0" anchor="t">
-            <a:spAutoFit/>
-          </a:bodyPr>
-          <a:lstStyle/>
-          <a:p>
-            <a:pPr algn="l"/>
-            <a:r>
-              <a:rPr sz="1800" b="1" i="0">
+            <a:ext cx="2286000" cy="276999"/>
+          </a:xfrm>
+          <a:prstGeom prst="rect">
+            <a:avLst/>
+          </a:prstGeom>
+          <a:noFill/>
+        </p:spPr>
+        <p:txBody>
+          <a:bodyPr wrap="square" lIns="0" tIns="0" rIns="0" bIns="0" anchor="t">
+            <a:spAutoFit/>
+          </a:bodyPr>
+          <a:lstStyle/>
+          <a:p>
+            <a:pPr algn="l"/>
+            <a:r>
+              <a:rPr sz="1800" dirty="0">
                 <a:solidFill>
                   <a:srgbClr val="A855F7"/>
                 </a:solidFill>
-                <a:latin typeface="Consolas"/>
+                <a:latin typeface="Xolonium" panose="02000503000000000000" pitchFamily="2" charset="0"/>
               </a:rPr>
               <a:t>$1.0M</a:t>
             </a:r>
@@ -6485,7 +6572,7 @@
           <a:noFill/>
         </p:spPr>
         <p:txBody>
-          <a:bodyPr wrap="square" lIns="0" rIns="0" tIns="0" bIns="0" anchor="t">
+          <a:bodyPr wrap="square" lIns="0" tIns="0" rIns="0" bIns="0" anchor="t">
             <a:spAutoFit/>
           </a:bodyPr>
           <a:lstStyle/>
@@ -6543,6 +6630,7 @@
           <a:lstStyle/>
           <a:p>
             <a:pPr algn="ctr"/>
+            <a:endParaRPr/>
           </a:p>
         </p:txBody>
       </p:sp>
@@ -6555,26 +6643,26 @@
         <p:spPr>
           <a:xfrm>
             <a:off x="914400" y="3931920"/>
-            <a:ext cx="2286000" cy="457200"/>
-          </a:xfrm>
-          <a:prstGeom prst="rect">
-            <a:avLst/>
-          </a:prstGeom>
-          <a:noFill/>
-        </p:spPr>
-        <p:txBody>
-          <a:bodyPr wrap="square" lIns="0" rIns="0" tIns="0" bIns="0" anchor="t">
-            <a:spAutoFit/>
-          </a:bodyPr>
-          <a:lstStyle/>
-          <a:p>
-            <a:pPr algn="l"/>
-            <a:r>
-              <a:rPr sz="1800" b="1" i="0">
+            <a:ext cx="2286000" cy="276999"/>
+          </a:xfrm>
+          <a:prstGeom prst="rect">
+            <a:avLst/>
+          </a:prstGeom>
+          <a:noFill/>
+        </p:spPr>
+        <p:txBody>
+          <a:bodyPr wrap="square" lIns="0" tIns="0" rIns="0" bIns="0" anchor="t">
+            <a:spAutoFit/>
+          </a:bodyPr>
+          <a:lstStyle/>
+          <a:p>
+            <a:pPr algn="l"/>
+            <a:r>
+              <a:rPr sz="1800" dirty="0">
                 <a:solidFill>
                   <a:srgbClr val="C084FC"/>
                 </a:solidFill>
-                <a:latin typeface="Consolas"/>
+                <a:latin typeface="Xolonium" panose="02000503000000000000" pitchFamily="2" charset="0"/>
               </a:rPr>
               <a:t>$1.5M</a:t>
             </a:r>
@@ -6598,7 +6686,7 @@
           <a:noFill/>
         </p:spPr>
         <p:txBody>
-          <a:bodyPr wrap="square" lIns="0" rIns="0" tIns="0" bIns="0" anchor="t">
+          <a:bodyPr wrap="square" lIns="0" tIns="0" rIns="0" bIns="0" anchor="t">
             <a:spAutoFit/>
           </a:bodyPr>
           <a:lstStyle/>
@@ -6656,6 +6744,7 @@
           <a:lstStyle/>
           <a:p>
             <a:pPr algn="ctr"/>
+            <a:endParaRPr/>
           </a:p>
         </p:txBody>
       </p:sp>
@@ -6668,26 +6757,26 @@
         <p:spPr>
           <a:xfrm>
             <a:off x="914400" y="4572000"/>
-            <a:ext cx="2286000" cy="457200"/>
-          </a:xfrm>
-          <a:prstGeom prst="rect">
-            <a:avLst/>
-          </a:prstGeom>
-          <a:noFill/>
-        </p:spPr>
-        <p:txBody>
-          <a:bodyPr wrap="square" lIns="0" rIns="0" tIns="0" bIns="0" anchor="t">
-            <a:spAutoFit/>
-          </a:bodyPr>
-          <a:lstStyle/>
-          <a:p>
-            <a:pPr algn="l"/>
-            <a:r>
-              <a:rPr sz="1800" b="1" i="0">
+            <a:ext cx="2286000" cy="276999"/>
+          </a:xfrm>
+          <a:prstGeom prst="rect">
+            <a:avLst/>
+          </a:prstGeom>
+          <a:noFill/>
+        </p:spPr>
+        <p:txBody>
+          <a:bodyPr wrap="square" lIns="0" tIns="0" rIns="0" bIns="0" anchor="t">
+            <a:spAutoFit/>
+          </a:bodyPr>
+          <a:lstStyle/>
+          <a:p>
+            <a:pPr algn="l"/>
+            <a:r>
+              <a:rPr sz="1800" dirty="0">
                 <a:solidFill>
                   <a:srgbClr val="F59E0B"/>
                 </a:solidFill>
-                <a:latin typeface="Consolas"/>
+                <a:latin typeface="Xolonium" panose="02000503000000000000" pitchFamily="2" charset="0"/>
               </a:rPr>
               <a:t>$2.0M</a:t>
             </a:r>
@@ -6711,7 +6800,7 @@
           <a:noFill/>
         </p:spPr>
         <p:txBody>
-          <a:bodyPr wrap="square" lIns="0" rIns="0" tIns="0" bIns="0" anchor="t">
+          <a:bodyPr wrap="square" lIns="0" tIns="0" rIns="0" bIns="0" anchor="t">
             <a:spAutoFit/>
           </a:bodyPr>
           <a:lstStyle/>
@@ -6769,6 +6858,7 @@
           <a:lstStyle/>
           <a:p>
             <a:pPr algn="ctr"/>
+            <a:endParaRPr/>
           </a:p>
         </p:txBody>
       </p:sp>
@@ -6781,26 +6871,26 @@
         <p:spPr>
           <a:xfrm>
             <a:off x="914400" y="5212080"/>
-            <a:ext cx="2286000" cy="457200"/>
-          </a:xfrm>
-          <a:prstGeom prst="rect">
-            <a:avLst/>
-          </a:prstGeom>
-          <a:noFill/>
-        </p:spPr>
-        <p:txBody>
-          <a:bodyPr wrap="square" lIns="0" rIns="0" tIns="0" bIns="0" anchor="t">
-            <a:spAutoFit/>
-          </a:bodyPr>
-          <a:lstStyle/>
-          <a:p>
-            <a:pPr algn="l"/>
-            <a:r>
-              <a:rPr sz="1800" b="1" i="0">
+            <a:ext cx="2286000" cy="276999"/>
+          </a:xfrm>
+          <a:prstGeom prst="rect">
+            <a:avLst/>
+          </a:prstGeom>
+          <a:noFill/>
+        </p:spPr>
+        <p:txBody>
+          <a:bodyPr wrap="square" lIns="0" tIns="0" rIns="0" bIns="0" anchor="t">
+            <a:spAutoFit/>
+          </a:bodyPr>
+          <a:lstStyle/>
+          <a:p>
+            <a:pPr algn="l"/>
+            <a:r>
+              <a:rPr sz="1800" dirty="0">
                 <a:solidFill>
                   <a:srgbClr val="F59E0B"/>
                 </a:solidFill>
-                <a:latin typeface="Consolas"/>
+                <a:latin typeface="Xolonium" panose="02000503000000000000" pitchFamily="2" charset="0"/>
               </a:rPr>
               <a:t>$3.0M</a:t>
             </a:r>
@@ -6824,7 +6914,7 @@
           <a:noFill/>
         </p:spPr>
         <p:txBody>
-          <a:bodyPr wrap="square" lIns="0" rIns="0" tIns="0" bIns="0" anchor="t">
+          <a:bodyPr wrap="square" lIns="0" tIns="0" rIns="0" bIns="0" anchor="t">
             <a:spAutoFit/>
           </a:bodyPr>
           <a:lstStyle/>
@@ -6851,26 +6941,26 @@
         <p:spPr>
           <a:xfrm>
             <a:off x="640080" y="6492240"/>
-            <a:ext cx="7315200" cy="274320"/>
-          </a:xfrm>
-          <a:prstGeom prst="rect">
-            <a:avLst/>
-          </a:prstGeom>
-          <a:noFill/>
-        </p:spPr>
-        <p:txBody>
-          <a:bodyPr wrap="square" lIns="0" rIns="0" tIns="0" bIns="0" anchor="t">
-            <a:spAutoFit/>
-          </a:bodyPr>
-          <a:lstStyle/>
-          <a:p>
-            <a:pPr algn="l"/>
-            <a:r>
-              <a:rPr sz="900" b="0" i="0">
+            <a:ext cx="7315200" cy="138499"/>
+          </a:xfrm>
+          <a:prstGeom prst="rect">
+            <a:avLst/>
+          </a:prstGeom>
+          <a:noFill/>
+        </p:spPr>
+        <p:txBody>
+          <a:bodyPr wrap="square" lIns="0" tIns="0" rIns="0" bIns="0" anchor="t">
+            <a:spAutoFit/>
+          </a:bodyPr>
+          <a:lstStyle/>
+          <a:p>
+            <a:pPr algn="l"/>
+            <a:r>
+              <a:rPr sz="900" dirty="0">
                 <a:solidFill>
                   <a:srgbClr val="475569"/>
                 </a:solidFill>
-                <a:latin typeface="Consolas"/>
+                <a:latin typeface="Xolonium" panose="02000503000000000000" pitchFamily="2" charset="0"/>
               </a:rPr>
               <a:t>THOX.ai  Your AI, on silicon you own.</a:t>
             </a:r>
@@ -6886,26 +6976,26 @@
         <p:spPr>
           <a:xfrm>
             <a:off x="10972800" y="6492240"/>
-            <a:ext cx="914400" cy="274320"/>
-          </a:xfrm>
-          <a:prstGeom prst="rect">
-            <a:avLst/>
-          </a:prstGeom>
-          <a:noFill/>
-        </p:spPr>
-        <p:txBody>
-          <a:bodyPr wrap="square" lIns="0" rIns="0" tIns="0" bIns="0" anchor="t">
+            <a:ext cx="914400" cy="138499"/>
+          </a:xfrm>
+          <a:prstGeom prst="rect">
+            <a:avLst/>
+          </a:prstGeom>
+          <a:noFill/>
+        </p:spPr>
+        <p:txBody>
+          <a:bodyPr wrap="square" lIns="0" tIns="0" rIns="0" bIns="0" anchor="t">
             <a:spAutoFit/>
           </a:bodyPr>
           <a:lstStyle/>
           <a:p>
             <a:pPr algn="r"/>
             <a:r>
-              <a:rPr sz="900" b="0" i="0">
+              <a:rPr sz="900" dirty="0">
                 <a:solidFill>
                   <a:srgbClr val="475569"/>
                 </a:solidFill>
-                <a:latin typeface="Consolas"/>
+                <a:latin typeface="Xolonium" panose="02000503000000000000" pitchFamily="2" charset="0"/>
               </a:rPr>
               <a:t>12 / 14</a:t>
             </a:r>
@@ -6921,7 +7011,7 @@
 </file>
 
 <file path=ppt/slides/slide13.xml><?xml version="1.0" encoding="utf-8"?>
-<p:sld xmlns:a="http://schemas.openxmlformats.org/drawingml/2006/main" xmlns:p="http://schemas.openxmlformats.org/presentationml/2006/main" xmlns:r="http://schemas.openxmlformats.org/officeDocument/2006/relationships">
+<p:sld xmlns:a="http://schemas.openxmlformats.org/drawingml/2006/main" xmlns:r="http://schemas.openxmlformats.org/officeDocument/2006/relationships" xmlns:p="http://schemas.openxmlformats.org/presentationml/2006/main">
   <p:cSld>
     <p:spTree>
       <p:nvGrpSpPr>
@@ -6929,7 +7019,14 @@
         <p:cNvGrpSpPr/>
         <p:nvPr/>
       </p:nvGrpSpPr>
-      <p:grpSpPr/>
+      <p:grpSpPr>
+        <a:xfrm>
+          <a:off x="0" y="0"/>
+          <a:ext cx="0" cy="0"/>
+          <a:chOff x="0" y="0"/>
+          <a:chExt cx="0" cy="0"/>
+        </a:xfrm>
+      </p:grpSpPr>
       <p:sp>
         <p:nvSpPr>
           <p:cNvPr id="2" name="Rectangle 1"/>
@@ -6970,6 +7067,7 @@
           <a:lstStyle/>
           <a:p>
             <a:pPr algn="ctr"/>
+            <a:endParaRPr/>
           </a:p>
         </p:txBody>
       </p:sp>
@@ -7013,6 +7111,7 @@
           <a:lstStyle/>
           <a:p>
             <a:pPr algn="ctr"/>
+            <a:endParaRPr/>
           </a:p>
         </p:txBody>
       </p:sp>
@@ -7025,26 +7124,26 @@
         <p:spPr>
           <a:xfrm>
             <a:off x="640080" y="502920"/>
-            <a:ext cx="7315200" cy="365760"/>
-          </a:xfrm>
-          <a:prstGeom prst="rect">
-            <a:avLst/>
-          </a:prstGeom>
-          <a:noFill/>
-        </p:spPr>
-        <p:txBody>
-          <a:bodyPr wrap="square" lIns="0" rIns="0" tIns="0" bIns="0" anchor="t">
-            <a:spAutoFit/>
-          </a:bodyPr>
-          <a:lstStyle/>
-          <a:p>
-            <a:pPr algn="l"/>
-            <a:r>
-              <a:rPr sz="1200" b="0" i="0">
+            <a:ext cx="7315200" cy="184666"/>
+          </a:xfrm>
+          <a:prstGeom prst="rect">
+            <a:avLst/>
+          </a:prstGeom>
+          <a:noFill/>
+        </p:spPr>
+        <p:txBody>
+          <a:bodyPr wrap="square" lIns="0" tIns="0" rIns="0" bIns="0" anchor="t">
+            <a:spAutoFit/>
+          </a:bodyPr>
+          <a:lstStyle/>
+          <a:p>
+            <a:pPr algn="l"/>
+            <a:r>
+              <a:rPr sz="1200" dirty="0">
                 <a:solidFill>
                   <a:srgbClr val="10B981"/>
                 </a:solidFill>
-                <a:latin typeface="Consolas"/>
+                <a:latin typeface="Xolonium" panose="02000503000000000000" pitchFamily="2" charset="0"/>
               </a:rPr>
               <a:t>TIMELINE  +  RISKS</a:t>
             </a:r>
@@ -7068,7 +7167,7 @@
           <a:noFill/>
         </p:spPr>
         <p:txBody>
-          <a:bodyPr wrap="square" lIns="0" rIns="0" tIns="0" bIns="0" anchor="t">
+          <a:bodyPr wrap="square" lIns="0" tIns="0" rIns="0" bIns="0" anchor="t">
             <a:spAutoFit/>
           </a:bodyPr>
           <a:lstStyle/>
@@ -7095,26 +7194,26 @@
         <p:spPr>
           <a:xfrm>
             <a:off x="640080" y="2011680"/>
-            <a:ext cx="1828800" cy="365760"/>
-          </a:xfrm>
-          <a:prstGeom prst="rect">
-            <a:avLst/>
-          </a:prstGeom>
-          <a:noFill/>
-        </p:spPr>
-        <p:txBody>
-          <a:bodyPr wrap="square" lIns="0" rIns="0" tIns="0" bIns="0" anchor="t">
-            <a:spAutoFit/>
-          </a:bodyPr>
-          <a:lstStyle/>
-          <a:p>
-            <a:pPr algn="l"/>
-            <a:r>
-              <a:rPr sz="1300" b="0" i="0">
+            <a:ext cx="1828800" cy="200055"/>
+          </a:xfrm>
+          <a:prstGeom prst="rect">
+            <a:avLst/>
+          </a:prstGeom>
+          <a:noFill/>
+        </p:spPr>
+        <p:txBody>
+          <a:bodyPr wrap="square" lIns="0" tIns="0" rIns="0" bIns="0" anchor="t">
+            <a:spAutoFit/>
+          </a:bodyPr>
+          <a:lstStyle/>
+          <a:p>
+            <a:pPr algn="l"/>
+            <a:r>
+              <a:rPr sz="1300" dirty="0">
                 <a:solidFill>
                   <a:srgbClr val="10B981"/>
                 </a:solidFill>
-                <a:latin typeface="Consolas"/>
+                <a:latin typeface="Xolonium" panose="02000503000000000000" pitchFamily="2" charset="0"/>
               </a:rPr>
               <a:t>Aug 2026</a:t>
             </a:r>
@@ -7138,7 +7237,7 @@
           <a:noFill/>
         </p:spPr>
         <p:txBody>
-          <a:bodyPr wrap="square" lIns="0" rIns="0" tIns="0" bIns="0" anchor="t">
+          <a:bodyPr wrap="square" lIns="0" tIns="0" rIns="0" bIns="0" anchor="t">
             <a:spAutoFit/>
           </a:bodyPr>
           <a:lstStyle/>
@@ -7165,26 +7264,26 @@
         <p:spPr>
           <a:xfrm>
             <a:off x="640080" y="2468880"/>
-            <a:ext cx="1828800" cy="365760"/>
-          </a:xfrm>
-          <a:prstGeom prst="rect">
-            <a:avLst/>
-          </a:prstGeom>
-          <a:noFill/>
-        </p:spPr>
-        <p:txBody>
-          <a:bodyPr wrap="square" lIns="0" rIns="0" tIns="0" bIns="0" anchor="t">
-            <a:spAutoFit/>
-          </a:bodyPr>
-          <a:lstStyle/>
-          <a:p>
-            <a:pPr algn="l"/>
-            <a:r>
-              <a:rPr sz="1300" b="0" i="0">
+            <a:ext cx="1828800" cy="200055"/>
+          </a:xfrm>
+          <a:prstGeom prst="rect">
+            <a:avLst/>
+          </a:prstGeom>
+          <a:noFill/>
+        </p:spPr>
+        <p:txBody>
+          <a:bodyPr wrap="square" lIns="0" tIns="0" rIns="0" bIns="0" anchor="t">
+            <a:spAutoFit/>
+          </a:bodyPr>
+          <a:lstStyle/>
+          <a:p>
+            <a:pPr algn="l"/>
+            <a:r>
+              <a:rPr sz="1300" dirty="0">
                 <a:solidFill>
                   <a:srgbClr val="34D399"/>
                 </a:solidFill>
-                <a:latin typeface="Consolas"/>
+                <a:latin typeface="Xolonium" panose="02000503000000000000" pitchFamily="2" charset="0"/>
               </a:rPr>
               <a:t>Oct 2026</a:t>
             </a:r>
@@ -7208,7 +7307,7 @@
           <a:noFill/>
         </p:spPr>
         <p:txBody>
-          <a:bodyPr wrap="square" lIns="0" rIns="0" tIns="0" bIns="0" anchor="t">
+          <a:bodyPr wrap="square" lIns="0" tIns="0" rIns="0" bIns="0" anchor="t">
             <a:spAutoFit/>
           </a:bodyPr>
           <a:lstStyle/>
@@ -7235,26 +7334,26 @@
         <p:spPr>
           <a:xfrm>
             <a:off x="640080" y="2926080"/>
-            <a:ext cx="1828800" cy="365760"/>
-          </a:xfrm>
-          <a:prstGeom prst="rect">
-            <a:avLst/>
-          </a:prstGeom>
-          <a:noFill/>
-        </p:spPr>
-        <p:txBody>
-          <a:bodyPr wrap="square" lIns="0" rIns="0" tIns="0" bIns="0" anchor="t">
-            <a:spAutoFit/>
-          </a:bodyPr>
-          <a:lstStyle/>
-          <a:p>
-            <a:pPr algn="l"/>
-            <a:r>
-              <a:rPr sz="1300" b="0" i="0">
+            <a:ext cx="1828800" cy="200055"/>
+          </a:xfrm>
+          <a:prstGeom prst="rect">
+            <a:avLst/>
+          </a:prstGeom>
+          <a:noFill/>
+        </p:spPr>
+        <p:txBody>
+          <a:bodyPr wrap="square" lIns="0" tIns="0" rIns="0" bIns="0" anchor="t">
+            <a:spAutoFit/>
+          </a:bodyPr>
+          <a:lstStyle/>
+          <a:p>
+            <a:pPr algn="l"/>
+            <a:r>
+              <a:rPr sz="1300" dirty="0">
                 <a:solidFill>
                   <a:srgbClr val="A855F7"/>
                 </a:solidFill>
-                <a:latin typeface="Consolas"/>
+                <a:latin typeface="Xolonium" panose="02000503000000000000" pitchFamily="2" charset="0"/>
               </a:rPr>
               <a:t>Nov 2026</a:t>
             </a:r>
@@ -7278,7 +7377,7 @@
           <a:noFill/>
         </p:spPr>
         <p:txBody>
-          <a:bodyPr wrap="square" lIns="0" rIns="0" tIns="0" bIns="0" anchor="t">
+          <a:bodyPr wrap="square" lIns="0" tIns="0" rIns="0" bIns="0" anchor="t">
             <a:spAutoFit/>
           </a:bodyPr>
           <a:lstStyle/>
@@ -7305,26 +7404,26 @@
         <p:spPr>
           <a:xfrm>
             <a:off x="640080" y="3383280"/>
-            <a:ext cx="1828800" cy="365760"/>
-          </a:xfrm>
-          <a:prstGeom prst="rect">
-            <a:avLst/>
-          </a:prstGeom>
-          <a:noFill/>
-        </p:spPr>
-        <p:txBody>
-          <a:bodyPr wrap="square" lIns="0" rIns="0" tIns="0" bIns="0" anchor="t">
-            <a:spAutoFit/>
-          </a:bodyPr>
-          <a:lstStyle/>
-          <a:p>
-            <a:pPr algn="l"/>
-            <a:r>
-              <a:rPr sz="1300" b="0" i="0">
+            <a:ext cx="1828800" cy="200055"/>
+          </a:xfrm>
+          <a:prstGeom prst="rect">
+            <a:avLst/>
+          </a:prstGeom>
+          <a:noFill/>
+        </p:spPr>
+        <p:txBody>
+          <a:bodyPr wrap="square" lIns="0" tIns="0" rIns="0" bIns="0" anchor="t">
+            <a:spAutoFit/>
+          </a:bodyPr>
+          <a:lstStyle/>
+          <a:p>
+            <a:pPr algn="l"/>
+            <a:r>
+              <a:rPr sz="1300" dirty="0">
                 <a:solidFill>
                   <a:srgbClr val="10B981"/>
                 </a:solidFill>
-                <a:latin typeface="Consolas"/>
+                <a:latin typeface="Xolonium" panose="02000503000000000000" pitchFamily="2" charset="0"/>
               </a:rPr>
               <a:t>Jan 2027</a:t>
             </a:r>
@@ -7348,7 +7447,7 @@
           <a:noFill/>
         </p:spPr>
         <p:txBody>
-          <a:bodyPr wrap="square" lIns="0" rIns="0" tIns="0" bIns="0" anchor="t">
+          <a:bodyPr wrap="square" lIns="0" tIns="0" rIns="0" bIns="0" anchor="t">
             <a:spAutoFit/>
           </a:bodyPr>
           <a:lstStyle/>
@@ -7375,26 +7474,26 @@
         <p:spPr>
           <a:xfrm>
             <a:off x="640080" y="3840480"/>
-            <a:ext cx="1828800" cy="365760"/>
-          </a:xfrm>
-          <a:prstGeom prst="rect">
-            <a:avLst/>
-          </a:prstGeom>
-          <a:noFill/>
-        </p:spPr>
-        <p:txBody>
-          <a:bodyPr wrap="square" lIns="0" rIns="0" tIns="0" bIns="0" anchor="t">
-            <a:spAutoFit/>
-          </a:bodyPr>
-          <a:lstStyle/>
-          <a:p>
-            <a:pPr algn="l"/>
-            <a:r>
-              <a:rPr sz="1300" b="0" i="0">
+            <a:ext cx="1828800" cy="200055"/>
+          </a:xfrm>
+          <a:prstGeom prst="rect">
+            <a:avLst/>
+          </a:prstGeom>
+          <a:noFill/>
+        </p:spPr>
+        <p:txBody>
+          <a:bodyPr wrap="square" lIns="0" tIns="0" rIns="0" bIns="0" anchor="t">
+            <a:spAutoFit/>
+          </a:bodyPr>
+          <a:lstStyle/>
+          <a:p>
+            <a:pPr algn="l"/>
+            <a:r>
+              <a:rPr sz="1300" dirty="0">
                 <a:solidFill>
                   <a:srgbClr val="34D399"/>
                 </a:solidFill>
-                <a:latin typeface="Consolas"/>
+                <a:latin typeface="Xolonium" panose="02000503000000000000" pitchFamily="2" charset="0"/>
               </a:rPr>
               <a:t>Feb 2027</a:t>
             </a:r>
@@ -7418,7 +7517,7 @@
           <a:noFill/>
         </p:spPr>
         <p:txBody>
-          <a:bodyPr wrap="square" lIns="0" rIns="0" tIns="0" bIns="0" anchor="t">
+          <a:bodyPr wrap="square" lIns="0" tIns="0" rIns="0" bIns="0" anchor="t">
             <a:spAutoFit/>
           </a:bodyPr>
           <a:lstStyle/>
@@ -7445,26 +7544,26 @@
         <p:spPr>
           <a:xfrm>
             <a:off x="640080" y="4297680"/>
-            <a:ext cx="1828800" cy="365760"/>
-          </a:xfrm>
-          <a:prstGeom prst="rect">
-            <a:avLst/>
-          </a:prstGeom>
-          <a:noFill/>
-        </p:spPr>
-        <p:txBody>
-          <a:bodyPr wrap="square" lIns="0" rIns="0" tIns="0" bIns="0" anchor="t">
-            <a:spAutoFit/>
-          </a:bodyPr>
-          <a:lstStyle/>
-          <a:p>
-            <a:pPr algn="l"/>
-            <a:r>
-              <a:rPr sz="1300" b="0" i="0">
+            <a:ext cx="1828800" cy="200055"/>
+          </a:xfrm>
+          <a:prstGeom prst="rect">
+            <a:avLst/>
+          </a:prstGeom>
+          <a:noFill/>
+        </p:spPr>
+        <p:txBody>
+          <a:bodyPr wrap="square" lIns="0" tIns="0" rIns="0" bIns="0" anchor="t">
+            <a:spAutoFit/>
+          </a:bodyPr>
+          <a:lstStyle/>
+          <a:p>
+            <a:pPr algn="l"/>
+            <a:r>
+              <a:rPr sz="1300" dirty="0">
                 <a:solidFill>
                   <a:srgbClr val="F59E0B"/>
                 </a:solidFill>
-                <a:latin typeface="Consolas"/>
+                <a:latin typeface="Xolonium" panose="02000503000000000000" pitchFamily="2" charset="0"/>
               </a:rPr>
               <a:t>Apr 2027</a:t>
             </a:r>
@@ -7488,7 +7587,7 @@
           <a:noFill/>
         </p:spPr>
         <p:txBody>
-          <a:bodyPr wrap="square" lIns="0" rIns="0" tIns="0" bIns="0" anchor="t">
+          <a:bodyPr wrap="square" lIns="0" tIns="0" rIns="0" bIns="0" anchor="t">
             <a:spAutoFit/>
           </a:bodyPr>
           <a:lstStyle/>
@@ -7515,26 +7614,26 @@
         <p:spPr>
           <a:xfrm>
             <a:off x="640080" y="4754880"/>
-            <a:ext cx="1828800" cy="365760"/>
-          </a:xfrm>
-          <a:prstGeom prst="rect">
-            <a:avLst/>
-          </a:prstGeom>
-          <a:noFill/>
-        </p:spPr>
-        <p:txBody>
-          <a:bodyPr wrap="square" lIns="0" rIns="0" tIns="0" bIns="0" anchor="t">
-            <a:spAutoFit/>
-          </a:bodyPr>
-          <a:lstStyle/>
-          <a:p>
-            <a:pPr algn="l"/>
-            <a:r>
-              <a:rPr sz="1300" b="0" i="0">
+            <a:ext cx="1828800" cy="200055"/>
+          </a:xfrm>
+          <a:prstGeom prst="rect">
+            <a:avLst/>
+          </a:prstGeom>
+          <a:noFill/>
+        </p:spPr>
+        <p:txBody>
+          <a:bodyPr wrap="square" lIns="0" tIns="0" rIns="0" bIns="0" anchor="t">
+            <a:spAutoFit/>
+          </a:bodyPr>
+          <a:lstStyle/>
+          <a:p>
+            <a:pPr algn="l"/>
+            <a:r>
+              <a:rPr sz="1300" dirty="0">
                 <a:solidFill>
                   <a:srgbClr val="A855F7"/>
                 </a:solidFill>
-                <a:latin typeface="Consolas"/>
+                <a:latin typeface="Xolonium" panose="02000503000000000000" pitchFamily="2" charset="0"/>
               </a:rPr>
               <a:t>May 2027</a:t>
             </a:r>
@@ -7558,7 +7657,7 @@
           <a:noFill/>
         </p:spPr>
         <p:txBody>
-          <a:bodyPr wrap="square" lIns="0" rIns="0" tIns="0" bIns="0" anchor="t">
+          <a:bodyPr wrap="square" lIns="0" tIns="0" rIns="0" bIns="0" anchor="t">
             <a:spAutoFit/>
           </a:bodyPr>
           <a:lstStyle/>
@@ -7620,6 +7719,7 @@
           <a:lstStyle/>
           <a:p>
             <a:pPr algn="ctr"/>
+            <a:endParaRPr/>
           </a:p>
         </p:txBody>
       </p:sp>
@@ -7632,26 +7732,26 @@
         <p:spPr>
           <a:xfrm>
             <a:off x="7315200" y="2148840"/>
-            <a:ext cx="4206240" cy="365760"/>
-          </a:xfrm>
-          <a:prstGeom prst="rect">
-            <a:avLst/>
-          </a:prstGeom>
-          <a:noFill/>
-        </p:spPr>
-        <p:txBody>
-          <a:bodyPr wrap="square" lIns="0" rIns="0" tIns="0" bIns="0" anchor="t">
-            <a:spAutoFit/>
-          </a:bodyPr>
-          <a:lstStyle/>
-          <a:p>
-            <a:pPr algn="l"/>
-            <a:r>
-              <a:rPr sz="1100" b="0" i="0">
+            <a:ext cx="4206240" cy="169277"/>
+          </a:xfrm>
+          <a:prstGeom prst="rect">
+            <a:avLst/>
+          </a:prstGeom>
+          <a:noFill/>
+        </p:spPr>
+        <p:txBody>
+          <a:bodyPr wrap="square" lIns="0" tIns="0" rIns="0" bIns="0" anchor="t">
+            <a:spAutoFit/>
+          </a:bodyPr>
+          <a:lstStyle/>
+          <a:p>
+            <a:pPr algn="l"/>
+            <a:r>
+              <a:rPr sz="1100" dirty="0">
                 <a:solidFill>
                   <a:srgbClr val="F59E0B"/>
                 </a:solidFill>
-                <a:latin typeface="Consolas"/>
+                <a:latin typeface="Xolonium" panose="02000503000000000000" pitchFamily="2" charset="0"/>
               </a:rPr>
               <a:t>RISKS  +  MITIGATIONS</a:t>
             </a:r>
@@ -7675,7 +7775,7 @@
           <a:noFill/>
         </p:spPr>
         <p:txBody>
-          <a:bodyPr wrap="square" lIns="0" rIns="0" tIns="0" bIns="0">
+          <a:bodyPr wrap="square" lIns="0" tIns="0" rIns="0" bIns="0">
             <a:spAutoFit/>
           </a:bodyPr>
           <a:lstStyle/>
@@ -7754,26 +7854,26 @@
         <p:spPr>
           <a:xfrm>
             <a:off x="640080" y="6492240"/>
-            <a:ext cx="7315200" cy="274320"/>
-          </a:xfrm>
-          <a:prstGeom prst="rect">
-            <a:avLst/>
-          </a:prstGeom>
-          <a:noFill/>
-        </p:spPr>
-        <p:txBody>
-          <a:bodyPr wrap="square" lIns="0" rIns="0" tIns="0" bIns="0" anchor="t">
-            <a:spAutoFit/>
-          </a:bodyPr>
-          <a:lstStyle/>
-          <a:p>
-            <a:pPr algn="l"/>
-            <a:r>
-              <a:rPr sz="900" b="0" i="0">
+            <a:ext cx="7315200" cy="138499"/>
+          </a:xfrm>
+          <a:prstGeom prst="rect">
+            <a:avLst/>
+          </a:prstGeom>
+          <a:noFill/>
+        </p:spPr>
+        <p:txBody>
+          <a:bodyPr wrap="square" lIns="0" tIns="0" rIns="0" bIns="0" anchor="t">
+            <a:spAutoFit/>
+          </a:bodyPr>
+          <a:lstStyle/>
+          <a:p>
+            <a:pPr algn="l"/>
+            <a:r>
+              <a:rPr sz="900" dirty="0">
                 <a:solidFill>
                   <a:srgbClr val="475569"/>
                 </a:solidFill>
-                <a:latin typeface="Consolas"/>
+                <a:latin typeface="Xolonium" panose="02000503000000000000" pitchFamily="2" charset="0"/>
               </a:rPr>
               <a:t>THOX.ai  Your AI, on silicon you own.</a:t>
             </a:r>
@@ -7789,26 +7889,26 @@
         <p:spPr>
           <a:xfrm>
             <a:off x="10972800" y="6492240"/>
-            <a:ext cx="914400" cy="274320"/>
-          </a:xfrm>
-          <a:prstGeom prst="rect">
-            <a:avLst/>
-          </a:prstGeom>
-          <a:noFill/>
-        </p:spPr>
-        <p:txBody>
-          <a:bodyPr wrap="square" lIns="0" rIns="0" tIns="0" bIns="0" anchor="t">
+            <a:ext cx="914400" cy="138499"/>
+          </a:xfrm>
+          <a:prstGeom prst="rect">
+            <a:avLst/>
+          </a:prstGeom>
+          <a:noFill/>
+        </p:spPr>
+        <p:txBody>
+          <a:bodyPr wrap="square" lIns="0" tIns="0" rIns="0" bIns="0" anchor="t">
             <a:spAutoFit/>
           </a:bodyPr>
           <a:lstStyle/>
           <a:p>
             <a:pPr algn="r"/>
             <a:r>
-              <a:rPr sz="900" b="0" i="0">
+              <a:rPr sz="900" dirty="0">
                 <a:solidFill>
                   <a:srgbClr val="475569"/>
                 </a:solidFill>
-                <a:latin typeface="Consolas"/>
+                <a:latin typeface="Xolonium" panose="02000503000000000000" pitchFamily="2" charset="0"/>
               </a:rPr>
               <a:t>13 / 14</a:t>
             </a:r>
@@ -7824,7 +7924,7 @@
 </file>
 
 <file path=ppt/slides/slide14.xml><?xml version="1.0" encoding="utf-8"?>
-<p:sld xmlns:a="http://schemas.openxmlformats.org/drawingml/2006/main" xmlns:p="http://schemas.openxmlformats.org/presentationml/2006/main" xmlns:r="http://schemas.openxmlformats.org/officeDocument/2006/relationships">
+<p:sld xmlns:a="http://schemas.openxmlformats.org/drawingml/2006/main" xmlns:r="http://schemas.openxmlformats.org/officeDocument/2006/relationships" xmlns:p="http://schemas.openxmlformats.org/presentationml/2006/main">
   <p:cSld>
     <p:spTree>
       <p:nvGrpSpPr>
@@ -7832,7 +7932,14 @@
         <p:cNvGrpSpPr/>
         <p:nvPr/>
       </p:nvGrpSpPr>
-      <p:grpSpPr/>
+      <p:grpSpPr>
+        <a:xfrm>
+          <a:off x="0" y="0"/>
+          <a:ext cx="0" cy="0"/>
+          <a:chOff x="0" y="0"/>
+          <a:chExt cx="0" cy="0"/>
+        </a:xfrm>
+      </p:grpSpPr>
       <p:sp>
         <p:nvSpPr>
           <p:cNvPr id="2" name="Rectangle 1"/>
@@ -7873,6 +7980,7 @@
           <a:lstStyle/>
           <a:p>
             <a:pPr algn="ctr"/>
+            <a:endParaRPr/>
           </a:p>
         </p:txBody>
       </p:sp>
@@ -7916,6 +8024,7 @@
           <a:lstStyle/>
           <a:p>
             <a:pPr algn="ctr"/>
+            <a:endParaRPr/>
           </a:p>
         </p:txBody>
       </p:sp>
@@ -7928,26 +8037,26 @@
         <p:spPr>
           <a:xfrm>
             <a:off x="640080" y="502920"/>
-            <a:ext cx="7315200" cy="365760"/>
-          </a:xfrm>
-          <a:prstGeom prst="rect">
-            <a:avLst/>
-          </a:prstGeom>
-          <a:noFill/>
-        </p:spPr>
-        <p:txBody>
-          <a:bodyPr wrap="square" lIns="0" rIns="0" tIns="0" bIns="0" anchor="t">
-            <a:spAutoFit/>
-          </a:bodyPr>
-          <a:lstStyle/>
-          <a:p>
-            <a:pPr algn="l"/>
-            <a:r>
-              <a:rPr sz="1200" b="0" i="0">
+            <a:ext cx="7315200" cy="184666"/>
+          </a:xfrm>
+          <a:prstGeom prst="rect">
+            <a:avLst/>
+          </a:prstGeom>
+          <a:noFill/>
+        </p:spPr>
+        <p:txBody>
+          <a:bodyPr wrap="square" lIns="0" tIns="0" rIns="0" bIns="0" anchor="t">
+            <a:spAutoFit/>
+          </a:bodyPr>
+          <a:lstStyle/>
+          <a:p>
+            <a:pPr algn="l"/>
+            <a:r>
+              <a:rPr sz="1200" dirty="0">
                 <a:solidFill>
                   <a:srgbClr val="10B981"/>
                 </a:solidFill>
-                <a:latin typeface="Consolas"/>
+                <a:latin typeface="Xolonium" panose="02000503000000000000" pitchFamily="2" charset="0"/>
               </a:rPr>
               <a:t>CLOSE</a:t>
             </a:r>
@@ -7971,7 +8080,7 @@
           <a:noFill/>
         </p:spPr>
         <p:txBody>
-          <a:bodyPr wrap="square" lIns="0" rIns="0" tIns="0" bIns="0" anchor="t">
+          <a:bodyPr wrap="square" lIns="0" tIns="0" rIns="0" bIns="0" anchor="t">
             <a:spAutoFit/>
           </a:bodyPr>
           <a:lstStyle/>
@@ -8006,7 +8115,7 @@
           <a:noFill/>
         </p:spPr>
         <p:txBody>
-          <a:bodyPr wrap="square" lIns="0" rIns="0" tIns="0" bIns="0" anchor="t">
+          <a:bodyPr wrap="square" lIns="0" tIns="0" rIns="0" bIns="0" anchor="t">
             <a:spAutoFit/>
           </a:bodyPr>
           <a:lstStyle/>
@@ -8041,7 +8150,7 @@
           <a:noFill/>
         </p:spPr>
         <p:txBody>
-          <a:bodyPr wrap="square" lIns="0" rIns="0" tIns="0" bIns="0">
+          <a:bodyPr wrap="square" lIns="0" tIns="0" rIns="0" bIns="0">
             <a:spAutoFit/>
           </a:bodyPr>
           <a:lstStyle/>
@@ -8052,7 +8161,7 @@
               </a:spcAft>
             </a:pPr>
             <a:r>
-              <a:rPr sz="1600" b="0">
+              <a:rPr sz="1600" b="0" dirty="0">
                 <a:solidFill>
                   <a:srgbClr val="FAFAFA"/>
                 </a:solidFill>
@@ -8068,13 +8177,31 @@
               </a:spcAft>
             </a:pPr>
             <a:r>
-              <a:rPr sz="1600" b="0">
+              <a:rPr sz="1600" b="0" dirty="0">
                 <a:solidFill>
                   <a:srgbClr val="FAFAFA"/>
                 </a:solidFill>
                 <a:latin typeface="Arial"/>
               </a:rPr>
-              <a:t>Schematics + Buildroot configs shipped with every device.</a:t>
+              <a:t>Schematics + </a:t>
+            </a:r>
+            <a:r>
+              <a:rPr sz="1600" b="0" dirty="0" err="1">
+                <a:solidFill>
+                  <a:srgbClr val="FAFAFA"/>
+                </a:solidFill>
+                <a:latin typeface="Arial"/>
+              </a:rPr>
+              <a:t>Buildroot</a:t>
+            </a:r>
+            <a:r>
+              <a:rPr sz="1600" b="0" dirty="0">
+                <a:solidFill>
+                  <a:srgbClr val="FAFAFA"/>
+                </a:solidFill>
+                <a:latin typeface="Arial"/>
+              </a:rPr>
+              <a:t> configs shipped with every device.</a:t>
             </a:r>
           </a:p>
           <a:p>
@@ -8084,7 +8211,7 @@
               </a:spcAft>
             </a:pPr>
             <a:r>
-              <a:rPr sz="1600" b="0">
+              <a:rPr sz="1600" b="0" dirty="0">
                 <a:solidFill>
                   <a:srgbClr val="FAFAFA"/>
                 </a:solidFill>
@@ -8103,30 +8230,99 @@
         </p:nvSpPr>
         <p:spPr>
           <a:xfrm>
-            <a:off x="640080" y="6309360"/>
-            <a:ext cx="10972800" cy="365760"/>
-          </a:xfrm>
-          <a:prstGeom prst="rect">
-            <a:avLst/>
-          </a:prstGeom>
-          <a:noFill/>
-        </p:spPr>
-        <p:txBody>
-          <a:bodyPr wrap="square" lIns="0" rIns="0" tIns="0" bIns="0" anchor="t">
-            <a:spAutoFit/>
-          </a:bodyPr>
-          <a:lstStyle/>
-          <a:p>
-            <a:pPr algn="l"/>
-            <a:r>
-              <a:rPr sz="1400" b="0" i="0">
+            <a:off x="640080" y="6247358"/>
+            <a:ext cx="10972800" cy="215444"/>
+          </a:xfrm>
+          <a:prstGeom prst="rect">
+            <a:avLst/>
+          </a:prstGeom>
+          <a:noFill/>
+        </p:spPr>
+        <p:txBody>
+          <a:bodyPr wrap="square" lIns="0" tIns="0" rIns="0" bIns="0" anchor="t">
+            <a:spAutoFit/>
+          </a:bodyPr>
+          <a:lstStyle/>
+          <a:p>
+            <a:pPr algn="l"/>
+            <a:r>
+              <a:rPr sz="1400" dirty="0" err="1">
                 <a:solidFill>
                   <a:srgbClr val="34D399"/>
                 </a:solidFill>
-                <a:latin typeface="Consolas"/>
-              </a:rPr>
-              <a:t>kickstarter.com/thox-ai   |   thox.ai   |   github.com/ttracx</a:t>
-            </a:r>
+                <a:latin typeface="Xolonium" panose="02000503000000000000" pitchFamily="2" charset="0"/>
+              </a:rPr>
+              <a:t>kickstarter.com</a:t>
+            </a:r>
+            <a:r>
+              <a:rPr sz="1400" dirty="0">
+                <a:solidFill>
+                  <a:srgbClr val="34D399"/>
+                </a:solidFill>
+                <a:latin typeface="Xolonium" panose="02000503000000000000" pitchFamily="2" charset="0"/>
+              </a:rPr>
+              <a:t>/</a:t>
+            </a:r>
+            <a:r>
+              <a:rPr sz="1400" dirty="0" err="1">
+                <a:solidFill>
+                  <a:srgbClr val="34D399"/>
+                </a:solidFill>
+                <a:latin typeface="Xolonium" panose="02000503000000000000" pitchFamily="2" charset="0"/>
+              </a:rPr>
+              <a:t>thox</a:t>
+            </a:r>
+            <a:r>
+              <a:rPr sz="1400" dirty="0">
+                <a:solidFill>
+                  <a:srgbClr val="34D399"/>
+                </a:solidFill>
+                <a:latin typeface="Xolonium" panose="02000503000000000000" pitchFamily="2" charset="0"/>
+              </a:rPr>
+              <a:t>-ai   |   thox.ai   |   </a:t>
+            </a:r>
+            <a:r>
+              <a:rPr sz="1400" dirty="0" err="1">
+                <a:solidFill>
+                  <a:srgbClr val="34D399"/>
+                </a:solidFill>
+                <a:latin typeface="Xolonium" panose="02000503000000000000" pitchFamily="2" charset="0"/>
+              </a:rPr>
+              <a:t>github.com</a:t>
+            </a:r>
+            <a:r>
+              <a:rPr sz="1400" dirty="0">
+                <a:solidFill>
+                  <a:srgbClr val="34D399"/>
+                </a:solidFill>
+                <a:latin typeface="Xolonium" panose="02000503000000000000" pitchFamily="2" charset="0"/>
+              </a:rPr>
+              <a:t>/</a:t>
+            </a:r>
+            <a:r>
+              <a:rPr lang="en-US" sz="1400" dirty="0" err="1">
+                <a:solidFill>
+                  <a:srgbClr val="34D399"/>
+                </a:solidFill>
+                <a:latin typeface="Xolonium" panose="02000503000000000000" pitchFamily="2" charset="0"/>
+              </a:rPr>
+              <a:t>thox</a:t>
+            </a:r>
+            <a:r>
+              <a:rPr lang="en-US" sz="1400" dirty="0">
+                <a:solidFill>
+                  <a:srgbClr val="34D399"/>
+                </a:solidFill>
+                <a:latin typeface="Xolonium" panose="02000503000000000000" pitchFamily="2" charset="0"/>
+              </a:rPr>
+              <a:t>-ai</a:t>
+            </a:r>
+            <a:endParaRPr sz="1400" dirty="0">
+              <a:solidFill>
+                <a:srgbClr val="34D399"/>
+              </a:solidFill>
+              <a:latin typeface="Xolonium" panose="02000503000000000000" pitchFamily="2" charset="0"/>
+            </a:endParaRPr>
           </a:p>
         </p:txBody>
       </p:sp>
@@ -8139,26 +8335,26 @@
         <p:spPr>
           <a:xfrm>
             <a:off x="640080" y="6492240"/>
-            <a:ext cx="7315200" cy="274320"/>
-          </a:xfrm>
-          <a:prstGeom prst="rect">
-            <a:avLst/>
-          </a:prstGeom>
-          <a:noFill/>
-        </p:spPr>
-        <p:txBody>
-          <a:bodyPr wrap="square" lIns="0" rIns="0" tIns="0" bIns="0" anchor="t">
-            <a:spAutoFit/>
-          </a:bodyPr>
-          <a:lstStyle/>
-          <a:p>
-            <a:pPr algn="l"/>
-            <a:r>
-              <a:rPr sz="900" b="0" i="0">
+            <a:ext cx="7315200" cy="138499"/>
+          </a:xfrm>
+          <a:prstGeom prst="rect">
+            <a:avLst/>
+          </a:prstGeom>
+          <a:noFill/>
+        </p:spPr>
+        <p:txBody>
+          <a:bodyPr wrap="square" lIns="0" tIns="0" rIns="0" bIns="0" anchor="t">
+            <a:spAutoFit/>
+          </a:bodyPr>
+          <a:lstStyle/>
+          <a:p>
+            <a:pPr algn="l"/>
+            <a:r>
+              <a:rPr sz="900" dirty="0">
                 <a:solidFill>
                   <a:srgbClr val="475569"/>
                 </a:solidFill>
-                <a:latin typeface="Consolas"/>
+                <a:latin typeface="Xolonium" panose="02000503000000000000" pitchFamily="2" charset="0"/>
               </a:rPr>
               <a:t>THOX.ai  Your AI, on silicon you own.</a:t>
             </a:r>
@@ -8174,26 +8370,26 @@
         <p:spPr>
           <a:xfrm>
             <a:off x="10972800" y="6492240"/>
-            <a:ext cx="914400" cy="274320"/>
-          </a:xfrm>
-          <a:prstGeom prst="rect">
-            <a:avLst/>
-          </a:prstGeom>
-          <a:noFill/>
-        </p:spPr>
-        <p:txBody>
-          <a:bodyPr wrap="square" lIns="0" rIns="0" tIns="0" bIns="0" anchor="t">
+            <a:ext cx="914400" cy="138499"/>
+          </a:xfrm>
+          <a:prstGeom prst="rect">
+            <a:avLst/>
+          </a:prstGeom>
+          <a:noFill/>
+        </p:spPr>
+        <p:txBody>
+          <a:bodyPr wrap="square" lIns="0" tIns="0" rIns="0" bIns="0" anchor="t">
             <a:spAutoFit/>
           </a:bodyPr>
           <a:lstStyle/>
           <a:p>
             <a:pPr algn="r"/>
             <a:r>
-              <a:rPr sz="900" b="0" i="0">
+              <a:rPr sz="900" dirty="0">
                 <a:solidFill>
                   <a:srgbClr val="475569"/>
                 </a:solidFill>
-                <a:latin typeface="Consolas"/>
+                <a:latin typeface="Xolonium" panose="02000503000000000000" pitchFamily="2" charset="0"/>
               </a:rPr>
               <a:t>14 / 14</a:t>
             </a:r>
@@ -8209,7 +8405,7 @@
 </file>
 
 <file path=ppt/slides/slide2.xml><?xml version="1.0" encoding="utf-8"?>
-<p:sld xmlns:a="http://schemas.openxmlformats.org/drawingml/2006/main" xmlns:p="http://schemas.openxmlformats.org/presentationml/2006/main" xmlns:r="http://schemas.openxmlformats.org/officeDocument/2006/relationships">
+<p:sld xmlns:a="http://schemas.openxmlformats.org/drawingml/2006/main" xmlns:r="http://schemas.openxmlformats.org/officeDocument/2006/relationships" xmlns:p="http://schemas.openxmlformats.org/presentationml/2006/main">
   <p:cSld>
     <p:spTree>
       <p:nvGrpSpPr>
@@ -8217,7 +8413,14 @@
         <p:cNvGrpSpPr/>
         <p:nvPr/>
       </p:nvGrpSpPr>
-      <p:grpSpPr/>
+      <p:grpSpPr>
+        <a:xfrm>
+          <a:off x="0" y="0"/>
+          <a:ext cx="0" cy="0"/>
+          <a:chOff x="0" y="0"/>
+          <a:chExt cx="0" cy="0"/>
+        </a:xfrm>
+      </p:grpSpPr>
       <p:sp>
         <p:nvSpPr>
           <p:cNvPr id="2" name="Rectangle 1"/>
@@ -8258,6 +8461,7 @@
           <a:lstStyle/>
           <a:p>
             <a:pPr algn="ctr"/>
+            <a:endParaRPr/>
           </a:p>
         </p:txBody>
       </p:sp>
@@ -8301,6 +8505,7 @@
           <a:lstStyle/>
           <a:p>
             <a:pPr algn="ctr"/>
+            <a:endParaRPr/>
           </a:p>
         </p:txBody>
       </p:sp>
@@ -8313,26 +8518,26 @@
         <p:spPr>
           <a:xfrm>
             <a:off x="640080" y="502920"/>
-            <a:ext cx="7315200" cy="365760"/>
-          </a:xfrm>
-          <a:prstGeom prst="rect">
-            <a:avLst/>
-          </a:prstGeom>
-          <a:noFill/>
-        </p:spPr>
-        <p:txBody>
-          <a:bodyPr wrap="square" lIns="0" rIns="0" tIns="0" bIns="0" anchor="t">
-            <a:spAutoFit/>
-          </a:bodyPr>
-          <a:lstStyle/>
-          <a:p>
-            <a:pPr algn="l"/>
-            <a:r>
-              <a:rPr sz="1200" b="0" i="0">
+            <a:ext cx="7315200" cy="184666"/>
+          </a:xfrm>
+          <a:prstGeom prst="rect">
+            <a:avLst/>
+          </a:prstGeom>
+          <a:noFill/>
+        </p:spPr>
+        <p:txBody>
+          <a:bodyPr wrap="square" lIns="0" tIns="0" rIns="0" bIns="0" anchor="t">
+            <a:spAutoFit/>
+          </a:bodyPr>
+          <a:lstStyle/>
+          <a:p>
+            <a:pPr algn="l"/>
+            <a:r>
+              <a:rPr sz="1200" dirty="0">
                 <a:solidFill>
                   <a:srgbClr val="10B981"/>
                 </a:solidFill>
-                <a:latin typeface="Consolas"/>
+                <a:latin typeface="Xolonium" panose="02000503000000000000" pitchFamily="2" charset="0"/>
               </a:rPr>
               <a:t>PROBLEM</a:t>
             </a:r>
@@ -8356,7 +8561,7 @@
           <a:noFill/>
         </p:spPr>
         <p:txBody>
-          <a:bodyPr wrap="square" lIns="0" rIns="0" tIns="0" bIns="0" anchor="t">
+          <a:bodyPr wrap="square" lIns="0" tIns="0" rIns="0" bIns="0" anchor="t">
             <a:spAutoFit/>
           </a:bodyPr>
           <a:lstStyle/>
@@ -8391,7 +8596,7 @@
           <a:noFill/>
         </p:spPr>
         <p:txBody>
-          <a:bodyPr wrap="square" lIns="0" rIns="0" tIns="0" bIns="0" anchor="t">
+          <a:bodyPr wrap="square" lIns="0" tIns="0" rIns="0" bIns="0" anchor="t">
             <a:spAutoFit/>
           </a:bodyPr>
           <a:lstStyle/>
@@ -8426,7 +8631,7 @@
           <a:noFill/>
         </p:spPr>
         <p:txBody>
-          <a:bodyPr wrap="square" lIns="0" rIns="0" tIns="0" bIns="0">
+          <a:bodyPr wrap="square" lIns="0" tIns="0" rIns="0" bIns="0">
             <a:spAutoFit/>
           </a:bodyPr>
           <a:lstStyle/>
@@ -8489,26 +8694,26 @@
         <p:spPr>
           <a:xfrm>
             <a:off x="640080" y="6492240"/>
-            <a:ext cx="7315200" cy="274320"/>
-          </a:xfrm>
-          <a:prstGeom prst="rect">
-            <a:avLst/>
-          </a:prstGeom>
-          <a:noFill/>
-        </p:spPr>
-        <p:txBody>
-          <a:bodyPr wrap="square" lIns="0" rIns="0" tIns="0" bIns="0" anchor="t">
-            <a:spAutoFit/>
-          </a:bodyPr>
-          <a:lstStyle/>
-          <a:p>
-            <a:pPr algn="l"/>
-            <a:r>
-              <a:rPr sz="900" b="0" i="0">
+            <a:ext cx="7315200" cy="138499"/>
+          </a:xfrm>
+          <a:prstGeom prst="rect">
+            <a:avLst/>
+          </a:prstGeom>
+          <a:noFill/>
+        </p:spPr>
+        <p:txBody>
+          <a:bodyPr wrap="square" lIns="0" tIns="0" rIns="0" bIns="0" anchor="t">
+            <a:spAutoFit/>
+          </a:bodyPr>
+          <a:lstStyle/>
+          <a:p>
+            <a:pPr algn="l"/>
+            <a:r>
+              <a:rPr sz="900" dirty="0">
                 <a:solidFill>
                   <a:srgbClr val="475569"/>
                 </a:solidFill>
-                <a:latin typeface="Consolas"/>
+                <a:latin typeface="Xolonium" panose="02000503000000000000" pitchFamily="2" charset="0"/>
               </a:rPr>
               <a:t>THOX.ai  Your AI, on silicon you own.</a:t>
             </a:r>
@@ -8524,26 +8729,26 @@
         <p:spPr>
           <a:xfrm>
             <a:off x="10972800" y="6492240"/>
-            <a:ext cx="914400" cy="274320"/>
-          </a:xfrm>
-          <a:prstGeom prst="rect">
-            <a:avLst/>
-          </a:prstGeom>
-          <a:noFill/>
-        </p:spPr>
-        <p:txBody>
-          <a:bodyPr wrap="square" lIns="0" rIns="0" tIns="0" bIns="0" anchor="t">
+            <a:ext cx="914400" cy="138499"/>
+          </a:xfrm>
+          <a:prstGeom prst="rect">
+            <a:avLst/>
+          </a:prstGeom>
+          <a:noFill/>
+        </p:spPr>
+        <p:txBody>
+          <a:bodyPr wrap="square" lIns="0" tIns="0" rIns="0" bIns="0" anchor="t">
             <a:spAutoFit/>
           </a:bodyPr>
           <a:lstStyle/>
           <a:p>
             <a:pPr algn="r"/>
             <a:r>
-              <a:rPr sz="900" b="0" i="0">
+              <a:rPr sz="900" dirty="0">
                 <a:solidFill>
                   <a:srgbClr val="475569"/>
                 </a:solidFill>
-                <a:latin typeface="Consolas"/>
+                <a:latin typeface="Xolonium" panose="02000503000000000000" pitchFamily="2" charset="0"/>
               </a:rPr>
               <a:t>2 / 14</a:t>
             </a:r>
@@ -8559,7 +8764,7 @@
 </file>
 
 <file path=ppt/slides/slide3.xml><?xml version="1.0" encoding="utf-8"?>
-<p:sld xmlns:a="http://schemas.openxmlformats.org/drawingml/2006/main" xmlns:p="http://schemas.openxmlformats.org/presentationml/2006/main" xmlns:r="http://schemas.openxmlformats.org/officeDocument/2006/relationships">
+<p:sld xmlns:a="http://schemas.openxmlformats.org/drawingml/2006/main" xmlns:r="http://schemas.openxmlformats.org/officeDocument/2006/relationships" xmlns:p="http://schemas.openxmlformats.org/presentationml/2006/main">
   <p:cSld>
     <p:spTree>
       <p:nvGrpSpPr>
@@ -8567,7 +8772,14 @@
         <p:cNvGrpSpPr/>
         <p:nvPr/>
       </p:nvGrpSpPr>
-      <p:grpSpPr/>
+      <p:grpSpPr>
+        <a:xfrm>
+          <a:off x="0" y="0"/>
+          <a:ext cx="0" cy="0"/>
+          <a:chOff x="0" y="0"/>
+          <a:chExt cx="0" cy="0"/>
+        </a:xfrm>
+      </p:grpSpPr>
       <p:sp>
         <p:nvSpPr>
           <p:cNvPr id="2" name="Rectangle 1"/>
@@ -8608,6 +8820,7 @@
           <a:lstStyle/>
           <a:p>
             <a:pPr algn="ctr"/>
+            <a:endParaRPr/>
           </a:p>
         </p:txBody>
       </p:sp>
@@ -8651,6 +8864,7 @@
           <a:lstStyle/>
           <a:p>
             <a:pPr algn="ctr"/>
+            <a:endParaRPr/>
           </a:p>
         </p:txBody>
       </p:sp>
@@ -8663,26 +8877,26 @@
         <p:spPr>
           <a:xfrm>
             <a:off x="640080" y="502920"/>
-            <a:ext cx="7315200" cy="365760"/>
-          </a:xfrm>
-          <a:prstGeom prst="rect">
-            <a:avLst/>
-          </a:prstGeom>
-          <a:noFill/>
-        </p:spPr>
-        <p:txBody>
-          <a:bodyPr wrap="square" lIns="0" rIns="0" tIns="0" bIns="0" anchor="t">
-            <a:spAutoFit/>
-          </a:bodyPr>
-          <a:lstStyle/>
-          <a:p>
-            <a:pPr algn="l"/>
-            <a:r>
-              <a:rPr sz="1200" b="0" i="0">
+            <a:ext cx="7315200" cy="184666"/>
+          </a:xfrm>
+          <a:prstGeom prst="rect">
+            <a:avLst/>
+          </a:prstGeom>
+          <a:noFill/>
+        </p:spPr>
+        <p:txBody>
+          <a:bodyPr wrap="square" lIns="0" tIns="0" rIns="0" bIns="0" anchor="t">
+            <a:spAutoFit/>
+          </a:bodyPr>
+          <a:lstStyle/>
+          <a:p>
+            <a:pPr algn="l"/>
+            <a:r>
+              <a:rPr sz="1200" dirty="0">
                 <a:solidFill>
                   <a:srgbClr val="C084FC"/>
                 </a:solidFill>
-                <a:latin typeface="Consolas"/>
+                <a:latin typeface="Xolonium" panose="02000503000000000000" pitchFamily="2" charset="0"/>
               </a:rPr>
               <a:t>VISION</a:t>
             </a:r>
@@ -8706,7 +8920,7 @@
           <a:noFill/>
         </p:spPr>
         <p:txBody>
-          <a:bodyPr wrap="square" lIns="0" rIns="0" tIns="0" bIns="0" anchor="t">
+          <a:bodyPr wrap="square" lIns="0" tIns="0" rIns="0" bIns="0" anchor="t">
             <a:spAutoFit/>
           </a:bodyPr>
           <a:lstStyle/>
@@ -8741,7 +8955,7 @@
           <a:noFill/>
         </p:spPr>
         <p:txBody>
-          <a:bodyPr wrap="square" lIns="0" rIns="0" tIns="0" bIns="0" anchor="t">
+          <a:bodyPr wrap="square" lIns="0" tIns="0" rIns="0" bIns="0" anchor="t">
             <a:spAutoFit/>
           </a:bodyPr>
           <a:lstStyle/>
@@ -8803,6 +9017,7 @@
           <a:lstStyle/>
           <a:p>
             <a:pPr algn="ctr"/>
+            <a:endParaRPr/>
           </a:p>
         </p:txBody>
       </p:sp>
@@ -8815,26 +9030,26 @@
         <p:spPr>
           <a:xfrm>
             <a:off x="822960" y="3794760"/>
-            <a:ext cx="2340864" cy="365760"/>
-          </a:xfrm>
-          <a:prstGeom prst="rect">
-            <a:avLst/>
-          </a:prstGeom>
-          <a:noFill/>
-        </p:spPr>
-        <p:txBody>
-          <a:bodyPr wrap="square" lIns="0" rIns="0" tIns="0" bIns="0" anchor="t">
-            <a:spAutoFit/>
-          </a:bodyPr>
-          <a:lstStyle/>
-          <a:p>
-            <a:pPr algn="l"/>
-            <a:r>
-              <a:rPr sz="1000" b="0" i="0">
+            <a:ext cx="2340864" cy="153888"/>
+          </a:xfrm>
+          <a:prstGeom prst="rect">
+            <a:avLst/>
+          </a:prstGeom>
+          <a:noFill/>
+        </p:spPr>
+        <p:txBody>
+          <a:bodyPr wrap="square" lIns="0" tIns="0" rIns="0" bIns="0" anchor="t">
+            <a:spAutoFit/>
+          </a:bodyPr>
+          <a:lstStyle/>
+          <a:p>
+            <a:pPr algn="l"/>
+            <a:r>
+              <a:rPr sz="1000" dirty="0">
                 <a:solidFill>
                   <a:srgbClr val="10B981"/>
                 </a:solidFill>
-                <a:latin typeface="Consolas"/>
+                <a:latin typeface="Xolonium" panose="02000503000000000000" pitchFamily="2" charset="0"/>
               </a:rPr>
               <a:t>WEARABLE</a:t>
             </a:r>
@@ -8858,7 +9073,7 @@
           <a:noFill/>
         </p:spPr>
         <p:txBody>
-          <a:bodyPr wrap="square" lIns="0" rIns="0" tIns="0" bIns="0" anchor="t">
+          <a:bodyPr wrap="square" lIns="0" tIns="0" rIns="0" bIns="0" anchor="t">
             <a:spAutoFit/>
           </a:bodyPr>
           <a:lstStyle/>
@@ -8893,7 +9108,7 @@
           <a:noFill/>
         </p:spPr>
         <p:txBody>
-          <a:bodyPr wrap="square" lIns="0" rIns="0" tIns="0" bIns="0" anchor="t">
+          <a:bodyPr wrap="square" lIns="0" tIns="0" rIns="0" bIns="0" anchor="t">
             <a:spAutoFit/>
           </a:bodyPr>
           <a:lstStyle/>
@@ -8955,6 +9170,7 @@
           <a:lstStyle/>
           <a:p>
             <a:pPr algn="ctr"/>
+            <a:endParaRPr/>
           </a:p>
         </p:txBody>
       </p:sp>
@@ -8967,26 +9183,26 @@
         <p:spPr>
           <a:xfrm>
             <a:off x="3621024" y="3794760"/>
-            <a:ext cx="2340864" cy="365760"/>
-          </a:xfrm>
-          <a:prstGeom prst="rect">
-            <a:avLst/>
-          </a:prstGeom>
-          <a:noFill/>
-        </p:spPr>
-        <p:txBody>
-          <a:bodyPr wrap="square" lIns="0" rIns="0" tIns="0" bIns="0" anchor="t">
-            <a:spAutoFit/>
-          </a:bodyPr>
-          <a:lstStyle/>
-          <a:p>
-            <a:pPr algn="l"/>
-            <a:r>
-              <a:rPr sz="1000" b="0" i="0">
+            <a:ext cx="2340864" cy="153888"/>
+          </a:xfrm>
+          <a:prstGeom prst="rect">
+            <a:avLst/>
+          </a:prstGeom>
+          <a:noFill/>
+        </p:spPr>
+        <p:txBody>
+          <a:bodyPr wrap="square" lIns="0" tIns="0" rIns="0" bIns="0" anchor="t">
+            <a:spAutoFit/>
+          </a:bodyPr>
+          <a:lstStyle/>
+          <a:p>
+            <a:pPr algn="l"/>
+            <a:r>
+              <a:rPr sz="1000" dirty="0">
                 <a:solidFill>
                   <a:srgbClr val="34D399"/>
                 </a:solidFill>
-                <a:latin typeface="Consolas"/>
+                <a:latin typeface="Xolonium" panose="02000503000000000000" pitchFamily="2" charset="0"/>
               </a:rPr>
               <a:t>POCKETABLE</a:t>
             </a:r>
@@ -9010,7 +9226,7 @@
           <a:noFill/>
         </p:spPr>
         <p:txBody>
-          <a:bodyPr wrap="square" lIns="0" rIns="0" tIns="0" bIns="0" anchor="t">
+          <a:bodyPr wrap="square" lIns="0" tIns="0" rIns="0" bIns="0" anchor="t">
             <a:spAutoFit/>
           </a:bodyPr>
           <a:lstStyle/>
@@ -9045,7 +9261,7 @@
           <a:noFill/>
         </p:spPr>
         <p:txBody>
-          <a:bodyPr wrap="square" lIns="0" rIns="0" tIns="0" bIns="0" anchor="t">
+          <a:bodyPr wrap="square" lIns="0" tIns="0" rIns="0" bIns="0" anchor="t">
             <a:spAutoFit/>
           </a:bodyPr>
           <a:lstStyle/>
@@ -9107,6 +9323,7 @@
           <a:lstStyle/>
           <a:p>
             <a:pPr algn="ctr"/>
+            <a:endParaRPr/>
           </a:p>
         </p:txBody>
       </p:sp>
@@ -9119,26 +9336,26 @@
         <p:spPr>
           <a:xfrm>
             <a:off x="6419088" y="3794760"/>
-            <a:ext cx="2340864" cy="365760"/>
-          </a:xfrm>
-          <a:prstGeom prst="rect">
-            <a:avLst/>
-          </a:prstGeom>
-          <a:noFill/>
-        </p:spPr>
-        <p:txBody>
-          <a:bodyPr wrap="square" lIns="0" rIns="0" tIns="0" bIns="0" anchor="t">
-            <a:spAutoFit/>
-          </a:bodyPr>
-          <a:lstStyle/>
-          <a:p>
-            <a:pPr algn="l"/>
-            <a:r>
-              <a:rPr sz="1000" b="0" i="0">
+            <a:ext cx="2340864" cy="153888"/>
+          </a:xfrm>
+          <a:prstGeom prst="rect">
+            <a:avLst/>
+          </a:prstGeom>
+          <a:noFill/>
+        </p:spPr>
+        <p:txBody>
+          <a:bodyPr wrap="square" lIns="0" tIns="0" rIns="0" bIns="0" anchor="t">
+            <a:spAutoFit/>
+          </a:bodyPr>
+          <a:lstStyle/>
+          <a:p>
+            <a:pPr algn="l"/>
+            <a:r>
+              <a:rPr sz="1000" dirty="0">
                 <a:solidFill>
                   <a:srgbClr val="A855F7"/>
                 </a:solidFill>
-                <a:latin typeface="Consolas"/>
+                <a:latin typeface="Xolonium" panose="02000503000000000000" pitchFamily="2" charset="0"/>
               </a:rPr>
               <a:t>WIRELESS</a:t>
             </a:r>
@@ -9162,7 +9379,7 @@
           <a:noFill/>
         </p:spPr>
         <p:txBody>
-          <a:bodyPr wrap="square" lIns="0" rIns="0" tIns="0" bIns="0" anchor="t">
+          <a:bodyPr wrap="square" lIns="0" tIns="0" rIns="0" bIns="0" anchor="t">
             <a:spAutoFit/>
           </a:bodyPr>
           <a:lstStyle/>
@@ -9197,7 +9414,7 @@
           <a:noFill/>
         </p:spPr>
         <p:txBody>
-          <a:bodyPr wrap="square" lIns="0" rIns="0" tIns="0" bIns="0" anchor="t">
+          <a:bodyPr wrap="square" lIns="0" tIns="0" rIns="0" bIns="0" anchor="t">
             <a:spAutoFit/>
           </a:bodyPr>
           <a:lstStyle/>
@@ -9259,6 +9476,7 @@
           <a:lstStyle/>
           <a:p>
             <a:pPr algn="ctr"/>
+            <a:endParaRPr/>
           </a:p>
         </p:txBody>
       </p:sp>
@@ -9271,26 +9489,26 @@
         <p:spPr>
           <a:xfrm>
             <a:off x="9217152" y="3794760"/>
-            <a:ext cx="2340864" cy="365760"/>
-          </a:xfrm>
-          <a:prstGeom prst="rect">
-            <a:avLst/>
-          </a:prstGeom>
-          <a:noFill/>
-        </p:spPr>
-        <p:txBody>
-          <a:bodyPr wrap="square" lIns="0" rIns="0" tIns="0" bIns="0" anchor="t">
-            <a:spAutoFit/>
-          </a:bodyPr>
-          <a:lstStyle/>
-          <a:p>
-            <a:pPr algn="l"/>
-            <a:r>
-              <a:rPr sz="1000" b="0" i="0">
+            <a:ext cx="2340864" cy="153888"/>
+          </a:xfrm>
+          <a:prstGeom prst="rect">
+            <a:avLst/>
+          </a:prstGeom>
+          <a:noFill/>
+        </p:spPr>
+        <p:txBody>
+          <a:bodyPr wrap="square" lIns="0" tIns="0" rIns="0" bIns="0" anchor="t">
+            <a:spAutoFit/>
+          </a:bodyPr>
+          <a:lstStyle/>
+          <a:p>
+            <a:pPr algn="l"/>
+            <a:r>
+              <a:rPr sz="1000" dirty="0">
                 <a:solidFill>
                   <a:srgbClr val="F59E0B"/>
                 </a:solidFill>
-                <a:latin typeface="Consolas"/>
+                <a:latin typeface="Xolonium" panose="02000503000000000000" pitchFamily="2" charset="0"/>
               </a:rPr>
               <a:t>DESKTOP</a:t>
             </a:r>
@@ -9314,7 +9532,7 @@
           <a:noFill/>
         </p:spPr>
         <p:txBody>
-          <a:bodyPr wrap="square" lIns="0" rIns="0" tIns="0" bIns="0" anchor="t">
+          <a:bodyPr wrap="square" lIns="0" tIns="0" rIns="0" bIns="0" anchor="t">
             <a:spAutoFit/>
           </a:bodyPr>
           <a:lstStyle/>
@@ -9349,7 +9567,7 @@
           <a:noFill/>
         </p:spPr>
         <p:txBody>
-          <a:bodyPr wrap="square" lIns="0" rIns="0" tIns="0" bIns="0" anchor="t">
+          <a:bodyPr wrap="square" lIns="0" tIns="0" rIns="0" bIns="0" anchor="t">
             <a:spAutoFit/>
           </a:bodyPr>
           <a:lstStyle/>
@@ -9376,26 +9594,26 @@
         <p:spPr>
           <a:xfrm>
             <a:off x="640080" y="6492240"/>
-            <a:ext cx="7315200" cy="274320"/>
-          </a:xfrm>
-          <a:prstGeom prst="rect">
-            <a:avLst/>
-          </a:prstGeom>
-          <a:noFill/>
-        </p:spPr>
-        <p:txBody>
-          <a:bodyPr wrap="square" lIns="0" rIns="0" tIns="0" bIns="0" anchor="t">
-            <a:spAutoFit/>
-          </a:bodyPr>
-          <a:lstStyle/>
-          <a:p>
-            <a:pPr algn="l"/>
-            <a:r>
-              <a:rPr sz="900" b="0" i="0">
+            <a:ext cx="7315200" cy="138499"/>
+          </a:xfrm>
+          <a:prstGeom prst="rect">
+            <a:avLst/>
+          </a:prstGeom>
+          <a:noFill/>
+        </p:spPr>
+        <p:txBody>
+          <a:bodyPr wrap="square" lIns="0" tIns="0" rIns="0" bIns="0" anchor="t">
+            <a:spAutoFit/>
+          </a:bodyPr>
+          <a:lstStyle/>
+          <a:p>
+            <a:pPr algn="l"/>
+            <a:r>
+              <a:rPr sz="900" dirty="0">
                 <a:solidFill>
                   <a:srgbClr val="475569"/>
                 </a:solidFill>
-                <a:latin typeface="Consolas"/>
+                <a:latin typeface="Xolonium" panose="02000503000000000000" pitchFamily="2" charset="0"/>
               </a:rPr>
               <a:t>THOX.ai  Your AI, on silicon you own.</a:t>
             </a:r>
@@ -9411,26 +9629,26 @@
         <p:spPr>
           <a:xfrm>
             <a:off x="10972800" y="6492240"/>
-            <a:ext cx="914400" cy="274320"/>
-          </a:xfrm>
-          <a:prstGeom prst="rect">
-            <a:avLst/>
-          </a:prstGeom>
-          <a:noFill/>
-        </p:spPr>
-        <p:txBody>
-          <a:bodyPr wrap="square" lIns="0" rIns="0" tIns="0" bIns="0" anchor="t">
+            <a:ext cx="914400" cy="138499"/>
+          </a:xfrm>
+          <a:prstGeom prst="rect">
+            <a:avLst/>
+          </a:prstGeom>
+          <a:noFill/>
+        </p:spPr>
+        <p:txBody>
+          <a:bodyPr wrap="square" lIns="0" tIns="0" rIns="0" bIns="0" anchor="t">
             <a:spAutoFit/>
           </a:bodyPr>
           <a:lstStyle/>
           <a:p>
             <a:pPr algn="r"/>
             <a:r>
-              <a:rPr sz="900" b="0" i="0">
+              <a:rPr sz="900" dirty="0">
                 <a:solidFill>
                   <a:srgbClr val="475569"/>
                 </a:solidFill>
-                <a:latin typeface="Consolas"/>
+                <a:latin typeface="Xolonium" panose="02000503000000000000" pitchFamily="2" charset="0"/>
               </a:rPr>
               <a:t>3 / 14</a:t>
             </a:r>
@@ -9446,7 +9664,7 @@
 </file>
 
 <file path=ppt/slides/slide4.xml><?xml version="1.0" encoding="utf-8"?>
-<p:sld xmlns:a="http://schemas.openxmlformats.org/drawingml/2006/main" xmlns:p="http://schemas.openxmlformats.org/presentationml/2006/main" xmlns:r="http://schemas.openxmlformats.org/officeDocument/2006/relationships">
+<p:sld xmlns:a="http://schemas.openxmlformats.org/drawingml/2006/main" xmlns:r="http://schemas.openxmlformats.org/officeDocument/2006/relationships" xmlns:p="http://schemas.openxmlformats.org/presentationml/2006/main">
   <p:cSld>
     <p:spTree>
       <p:nvGrpSpPr>
@@ -9454,7 +9672,14 @@
         <p:cNvGrpSpPr/>
         <p:nvPr/>
       </p:nvGrpSpPr>
-      <p:grpSpPr/>
+      <p:grpSpPr>
+        <a:xfrm>
+          <a:off x="0" y="0"/>
+          <a:ext cx="0" cy="0"/>
+          <a:chOff x="0" y="0"/>
+          <a:chExt cx="0" cy="0"/>
+        </a:xfrm>
+      </p:grpSpPr>
       <p:sp>
         <p:nvSpPr>
           <p:cNvPr id="2" name="Rectangle 1"/>
@@ -9495,6 +9720,7 @@
           <a:lstStyle/>
           <a:p>
             <a:pPr algn="ctr"/>
+            <a:endParaRPr/>
           </a:p>
         </p:txBody>
       </p:sp>
@@ -9538,6 +9764,7 @@
           <a:lstStyle/>
           <a:p>
             <a:pPr algn="ctr"/>
+            <a:endParaRPr/>
           </a:p>
         </p:txBody>
       </p:sp>
@@ -9550,26 +9777,26 @@
         <p:spPr>
           <a:xfrm>
             <a:off x="640080" y="502920"/>
-            <a:ext cx="7315200" cy="365760"/>
-          </a:xfrm>
-          <a:prstGeom prst="rect">
-            <a:avLst/>
-          </a:prstGeom>
-          <a:noFill/>
-        </p:spPr>
-        <p:txBody>
-          <a:bodyPr wrap="square" lIns="0" rIns="0" tIns="0" bIns="0" anchor="t">
-            <a:spAutoFit/>
-          </a:bodyPr>
-          <a:lstStyle/>
-          <a:p>
-            <a:pPr algn="l"/>
-            <a:r>
-              <a:rPr sz="1200" b="0" i="0">
+            <a:ext cx="7315200" cy="184666"/>
+          </a:xfrm>
+          <a:prstGeom prst="rect">
+            <a:avLst/>
+          </a:prstGeom>
+          <a:noFill/>
+        </p:spPr>
+        <p:txBody>
+          <a:bodyPr wrap="square" lIns="0" tIns="0" rIns="0" bIns="0" anchor="t">
+            <a:spAutoFit/>
+          </a:bodyPr>
+          <a:lstStyle/>
+          <a:p>
+            <a:pPr algn="l"/>
+            <a:r>
+              <a:rPr sz="1200" dirty="0">
                 <a:solidFill>
                   <a:srgbClr val="10B981"/>
                 </a:solidFill>
-                <a:latin typeface="Consolas"/>
+                <a:latin typeface="Xolonium" panose="02000503000000000000" pitchFamily="2" charset="0"/>
               </a:rPr>
               <a:t>PORTFOLIO</a:t>
             </a:r>
@@ -9593,7 +9820,7 @@
           <a:noFill/>
         </p:spPr>
         <p:txBody>
-          <a:bodyPr wrap="square" lIns="0" rIns="0" tIns="0" bIns="0" anchor="t">
+          <a:bodyPr wrap="square" lIns="0" tIns="0" rIns="0" bIns="0" anchor="t">
             <a:spAutoFit/>
           </a:bodyPr>
           <a:lstStyle/>
@@ -9620,26 +9847,26 @@
         <p:spPr>
           <a:xfrm>
             <a:off x="640080" y="2194560"/>
-            <a:ext cx="1645920" cy="365760"/>
-          </a:xfrm>
-          <a:prstGeom prst="rect">
-            <a:avLst/>
-          </a:prstGeom>
-          <a:noFill/>
-        </p:spPr>
-        <p:txBody>
-          <a:bodyPr wrap="square" lIns="0" rIns="0" tIns="0" bIns="0" anchor="t">
-            <a:spAutoFit/>
-          </a:bodyPr>
-          <a:lstStyle/>
-          <a:p>
-            <a:pPr algn="l"/>
-            <a:r>
-              <a:rPr sz="1100" b="0" i="0">
+            <a:ext cx="1645920" cy="169277"/>
+          </a:xfrm>
+          <a:prstGeom prst="rect">
+            <a:avLst/>
+          </a:prstGeom>
+          <a:noFill/>
+        </p:spPr>
+        <p:txBody>
+          <a:bodyPr wrap="square" lIns="0" tIns="0" rIns="0" bIns="0" anchor="t">
+            <a:spAutoFit/>
+          </a:bodyPr>
+          <a:lstStyle/>
+          <a:p>
+            <a:pPr algn="l"/>
+            <a:r>
+              <a:rPr sz="1100" dirty="0">
                 <a:solidFill>
                   <a:srgbClr val="34D399"/>
                 </a:solidFill>
-                <a:latin typeface="Consolas"/>
+                <a:latin typeface="Xolonium" panose="02000503000000000000" pitchFamily="2" charset="0"/>
               </a:rPr>
               <a:t>Device</a:t>
             </a:r>
@@ -9655,26 +9882,26 @@
         <p:spPr>
           <a:xfrm>
             <a:off x="2286000" y="2194560"/>
-            <a:ext cx="2468880" cy="365760"/>
-          </a:xfrm>
-          <a:prstGeom prst="rect">
-            <a:avLst/>
-          </a:prstGeom>
-          <a:noFill/>
-        </p:spPr>
-        <p:txBody>
-          <a:bodyPr wrap="square" lIns="0" rIns="0" tIns="0" bIns="0" anchor="t">
-            <a:spAutoFit/>
-          </a:bodyPr>
-          <a:lstStyle/>
-          <a:p>
-            <a:pPr algn="l"/>
-            <a:r>
-              <a:rPr sz="1100" b="0" i="0">
+            <a:ext cx="2468880" cy="169277"/>
+          </a:xfrm>
+          <a:prstGeom prst="rect">
+            <a:avLst/>
+          </a:prstGeom>
+          <a:noFill/>
+        </p:spPr>
+        <p:txBody>
+          <a:bodyPr wrap="square" lIns="0" tIns="0" rIns="0" bIns="0" anchor="t">
+            <a:spAutoFit/>
+          </a:bodyPr>
+          <a:lstStyle/>
+          <a:p>
+            <a:pPr algn="l"/>
+            <a:r>
+              <a:rPr sz="1100" dirty="0">
                 <a:solidFill>
                   <a:srgbClr val="34D399"/>
                 </a:solidFill>
-                <a:latin typeface="Consolas"/>
+                <a:latin typeface="Xolonium" panose="02000503000000000000" pitchFamily="2" charset="0"/>
               </a:rPr>
               <a:t>What it is</a:t>
             </a:r>
@@ -9690,26 +9917,26 @@
         <p:spPr>
           <a:xfrm>
             <a:off x="4754880" y="2194560"/>
-            <a:ext cx="5029200" cy="365760"/>
-          </a:xfrm>
-          <a:prstGeom prst="rect">
-            <a:avLst/>
-          </a:prstGeom>
-          <a:noFill/>
-        </p:spPr>
-        <p:txBody>
-          <a:bodyPr wrap="square" lIns="0" rIns="0" tIns="0" bIns="0" anchor="t">
-            <a:spAutoFit/>
-          </a:bodyPr>
-          <a:lstStyle/>
-          <a:p>
-            <a:pPr algn="l"/>
-            <a:r>
-              <a:rPr sz="1100" b="0" i="0">
+            <a:ext cx="5029200" cy="169277"/>
+          </a:xfrm>
+          <a:prstGeom prst="rect">
+            <a:avLst/>
+          </a:prstGeom>
+          <a:noFill/>
+        </p:spPr>
+        <p:txBody>
+          <a:bodyPr wrap="square" lIns="0" tIns="0" rIns="0" bIns="0" anchor="t">
+            <a:spAutoFit/>
+          </a:bodyPr>
+          <a:lstStyle/>
+          <a:p>
+            <a:pPr algn="l"/>
+            <a:r>
+              <a:rPr sz="1100" dirty="0">
                 <a:solidFill>
                   <a:srgbClr val="34D399"/>
                 </a:solidFill>
-                <a:latin typeface="Consolas"/>
+                <a:latin typeface="Xolonium" panose="02000503000000000000" pitchFamily="2" charset="0"/>
               </a:rPr>
               <a:t>Hardware floor</a:t>
             </a:r>
@@ -9725,26 +9952,26 @@
         <p:spPr>
           <a:xfrm>
             <a:off x="9784080" y="2194560"/>
-            <a:ext cx="2103120" cy="365760"/>
-          </a:xfrm>
-          <a:prstGeom prst="rect">
-            <a:avLst/>
-          </a:prstGeom>
-          <a:noFill/>
-        </p:spPr>
-        <p:txBody>
-          <a:bodyPr wrap="square" lIns="0" rIns="0" tIns="0" bIns="0" anchor="t">
-            <a:spAutoFit/>
-          </a:bodyPr>
-          <a:lstStyle/>
-          <a:p>
-            <a:pPr algn="l"/>
-            <a:r>
-              <a:rPr sz="1100" b="0" i="0">
+            <a:ext cx="2103120" cy="169277"/>
+          </a:xfrm>
+          <a:prstGeom prst="rect">
+            <a:avLst/>
+          </a:prstGeom>
+          <a:noFill/>
+        </p:spPr>
+        <p:txBody>
+          <a:bodyPr wrap="square" lIns="0" tIns="0" rIns="0" bIns="0" anchor="t">
+            <a:spAutoFit/>
+          </a:bodyPr>
+          <a:lstStyle/>
+          <a:p>
+            <a:pPr algn="l"/>
+            <a:r>
+              <a:rPr sz="1100" dirty="0">
                 <a:solidFill>
                   <a:srgbClr val="34D399"/>
                 </a:solidFill>
-                <a:latin typeface="Consolas"/>
+                <a:latin typeface="Xolonium" panose="02000503000000000000" pitchFamily="2" charset="0"/>
               </a:rPr>
               <a:t>Backer price</a:t>
             </a:r>
@@ -9826,6 +10053,7 @@
           <a:lstStyle/>
           <a:p>
             <a:pPr algn="ctr"/>
+            <a:endParaRPr/>
           </a:p>
         </p:txBody>
       </p:sp>
@@ -9846,7 +10074,7 @@
           <a:noFill/>
         </p:spPr>
         <p:txBody>
-          <a:bodyPr wrap="square" lIns="0" rIns="0" tIns="0" bIns="0" anchor="t">
+          <a:bodyPr wrap="square" lIns="0" tIns="0" rIns="0" bIns="0" anchor="t">
             <a:spAutoFit/>
           </a:bodyPr>
           <a:lstStyle/>
@@ -9881,7 +10109,7 @@
           <a:noFill/>
         </p:spPr>
         <p:txBody>
-          <a:bodyPr wrap="square" lIns="0" rIns="0" tIns="0" bIns="0" anchor="t">
+          <a:bodyPr wrap="square" lIns="0" tIns="0" rIns="0" bIns="0" anchor="t">
             <a:spAutoFit/>
           </a:bodyPr>
           <a:lstStyle/>
@@ -9908,26 +10136,26 @@
         <p:spPr>
           <a:xfrm>
             <a:off x="4754880" y="2651760"/>
-            <a:ext cx="5029200" cy="457200"/>
-          </a:xfrm>
-          <a:prstGeom prst="rect">
-            <a:avLst/>
-          </a:prstGeom>
-          <a:noFill/>
-        </p:spPr>
-        <p:txBody>
-          <a:bodyPr wrap="square" lIns="0" rIns="0" tIns="0" bIns="0" anchor="t">
-            <a:spAutoFit/>
-          </a:bodyPr>
-          <a:lstStyle/>
-          <a:p>
-            <a:pPr algn="l"/>
-            <a:r>
-              <a:rPr sz="1200" b="0" i="0">
+            <a:ext cx="5029200" cy="184666"/>
+          </a:xfrm>
+          <a:prstGeom prst="rect">
+            <a:avLst/>
+          </a:prstGeom>
+          <a:noFill/>
+        </p:spPr>
+        <p:txBody>
+          <a:bodyPr wrap="square" lIns="0" tIns="0" rIns="0" bIns="0" anchor="t">
+            <a:spAutoFit/>
+          </a:bodyPr>
+          <a:lstStyle/>
+          <a:p>
+            <a:pPr algn="l"/>
+            <a:r>
+              <a:rPr sz="1200" dirty="0">
                 <a:solidFill>
                   <a:srgbClr val="34D399"/>
                 </a:solidFill>
-                <a:latin typeface="Consolas"/>
+                <a:latin typeface="Xolonium" panose="02000503000000000000" pitchFamily="2" charset="0"/>
               </a:rPr>
               <a:t>nRF52840 + dual mic + IMU + BLE 5.3</a:t>
             </a:r>
@@ -9943,26 +10171,26 @@
         <p:spPr>
           <a:xfrm>
             <a:off x="9784080" y="2651760"/>
-            <a:ext cx="2103120" cy="457200"/>
-          </a:xfrm>
-          <a:prstGeom prst="rect">
-            <a:avLst/>
-          </a:prstGeom>
-          <a:noFill/>
-        </p:spPr>
-        <p:txBody>
-          <a:bodyPr wrap="square" lIns="0" rIns="0" tIns="0" bIns="0" anchor="t">
-            <a:spAutoFit/>
-          </a:bodyPr>
-          <a:lstStyle/>
-          <a:p>
-            <a:pPr algn="l"/>
-            <a:r>
-              <a:rPr sz="1400" b="0" i="0">
+            <a:ext cx="2103120" cy="215444"/>
+          </a:xfrm>
+          <a:prstGeom prst="rect">
+            <a:avLst/>
+          </a:prstGeom>
+          <a:noFill/>
+        </p:spPr>
+        <p:txBody>
+          <a:bodyPr wrap="square" lIns="0" tIns="0" rIns="0" bIns="0" anchor="t">
+            <a:spAutoFit/>
+          </a:bodyPr>
+          <a:lstStyle/>
+          <a:p>
+            <a:pPr algn="l"/>
+            <a:r>
+              <a:rPr sz="1400" dirty="0">
                 <a:solidFill>
                   <a:srgbClr val="FAFAFA"/>
                 </a:solidFill>
-                <a:latin typeface="Consolas"/>
+                <a:latin typeface="Xolonium" panose="02000503000000000000" pitchFamily="2" charset="0"/>
               </a:rPr>
               <a:t>$39 early / $49</a:t>
             </a:r>
@@ -10009,6 +10237,7 @@
           <a:lstStyle/>
           <a:p>
             <a:pPr algn="ctr"/>
+            <a:endParaRPr/>
           </a:p>
         </p:txBody>
       </p:sp>
@@ -10029,7 +10258,7 @@
           <a:noFill/>
         </p:spPr>
         <p:txBody>
-          <a:bodyPr wrap="square" lIns="0" rIns="0" tIns="0" bIns="0" anchor="t">
+          <a:bodyPr wrap="square" lIns="0" tIns="0" rIns="0" bIns="0" anchor="t">
             <a:spAutoFit/>
           </a:bodyPr>
           <a:lstStyle/>
@@ -10064,7 +10293,7 @@
           <a:noFill/>
         </p:spPr>
         <p:txBody>
-          <a:bodyPr wrap="square" lIns="0" rIns="0" tIns="0" bIns="0" anchor="t">
+          <a:bodyPr wrap="square" lIns="0" tIns="0" rIns="0" bIns="0" anchor="t">
             <a:spAutoFit/>
           </a:bodyPr>
           <a:lstStyle/>
@@ -10091,26 +10320,26 @@
         <p:spPr>
           <a:xfrm>
             <a:off x="4754880" y="3520440"/>
-            <a:ext cx="5029200" cy="457200"/>
-          </a:xfrm>
-          <a:prstGeom prst="rect">
-            <a:avLst/>
-          </a:prstGeom>
-          <a:noFill/>
-        </p:spPr>
-        <p:txBody>
-          <a:bodyPr wrap="square" lIns="0" rIns="0" tIns="0" bIns="0" anchor="t">
-            <a:spAutoFit/>
-          </a:bodyPr>
-          <a:lstStyle/>
-          <a:p>
-            <a:pPr algn="l"/>
-            <a:r>
-              <a:rPr sz="1200" b="0" i="0">
+            <a:ext cx="5029200" cy="184666"/>
+          </a:xfrm>
+          <a:prstGeom prst="rect">
+            <a:avLst/>
+          </a:prstGeom>
+          <a:noFill/>
+        </p:spPr>
+        <p:txBody>
+          <a:bodyPr wrap="square" lIns="0" tIns="0" rIns="0" bIns="0" anchor="t">
+            <a:spAutoFit/>
+          </a:bodyPr>
+          <a:lstStyle/>
+          <a:p>
+            <a:pPr algn="l"/>
+            <a:r>
+              <a:rPr sz="1200" dirty="0">
                 <a:solidFill>
                   <a:srgbClr val="34D399"/>
                 </a:solidFill>
-                <a:latin typeface="Consolas"/>
+                <a:latin typeface="Xolonium" panose="02000503000000000000" pitchFamily="2" charset="0"/>
               </a:rPr>
               <a:t>Milk-V Duo CV1800B / 64 MB / sub-1W</a:t>
             </a:r>
@@ -10126,26 +10355,26 @@
         <p:spPr>
           <a:xfrm>
             <a:off x="9784080" y="3520440"/>
-            <a:ext cx="2103120" cy="457200"/>
-          </a:xfrm>
-          <a:prstGeom prst="rect">
-            <a:avLst/>
-          </a:prstGeom>
-          <a:noFill/>
-        </p:spPr>
-        <p:txBody>
-          <a:bodyPr wrap="square" lIns="0" rIns="0" tIns="0" bIns="0" anchor="t">
-            <a:spAutoFit/>
-          </a:bodyPr>
-          <a:lstStyle/>
-          <a:p>
-            <a:pPr algn="l"/>
-            <a:r>
-              <a:rPr sz="1400" b="0" i="0">
+            <a:ext cx="2103120" cy="215444"/>
+          </a:xfrm>
+          <a:prstGeom prst="rect">
+            <a:avLst/>
+          </a:prstGeom>
+          <a:noFill/>
+        </p:spPr>
+        <p:txBody>
+          <a:bodyPr wrap="square" lIns="0" tIns="0" rIns="0" bIns="0" anchor="t">
+            <a:spAutoFit/>
+          </a:bodyPr>
+          <a:lstStyle/>
+          <a:p>
+            <a:pPr algn="l"/>
+            <a:r>
+              <a:rPr sz="1400" dirty="0">
                 <a:solidFill>
                   <a:srgbClr val="FAFAFA"/>
                 </a:solidFill>
-                <a:latin typeface="Consolas"/>
+                <a:latin typeface="Xolonium" panose="02000503000000000000" pitchFamily="2" charset="0"/>
               </a:rPr>
               <a:t>$69</a:t>
             </a:r>
@@ -10192,6 +10421,7 @@
           <a:lstStyle/>
           <a:p>
             <a:pPr algn="ctr"/>
+            <a:endParaRPr/>
           </a:p>
         </p:txBody>
       </p:sp>
@@ -10212,7 +10442,7 @@
           <a:noFill/>
         </p:spPr>
         <p:txBody>
-          <a:bodyPr wrap="square" lIns="0" rIns="0" tIns="0" bIns="0" anchor="t">
+          <a:bodyPr wrap="square" lIns="0" tIns="0" rIns="0" bIns="0" anchor="t">
             <a:spAutoFit/>
           </a:bodyPr>
           <a:lstStyle/>
@@ -10247,7 +10477,7 @@
           <a:noFill/>
         </p:spPr>
         <p:txBody>
-          <a:bodyPr wrap="square" lIns="0" rIns="0" tIns="0" bIns="0" anchor="t">
+          <a:bodyPr wrap="square" lIns="0" tIns="0" rIns="0" bIns="0" anchor="t">
             <a:spAutoFit/>
           </a:bodyPr>
           <a:lstStyle/>
@@ -10274,28 +10504,46 @@
         <p:spPr>
           <a:xfrm>
             <a:off x="4754880" y="4389120"/>
-            <a:ext cx="5029200" cy="457200"/>
-          </a:xfrm>
-          <a:prstGeom prst="rect">
-            <a:avLst/>
-          </a:prstGeom>
-          <a:noFill/>
-        </p:spPr>
-        <p:txBody>
-          <a:bodyPr wrap="square" lIns="0" rIns="0" tIns="0" bIns="0" anchor="t">
-            <a:spAutoFit/>
-          </a:bodyPr>
-          <a:lstStyle/>
-          <a:p>
-            <a:pPr algn="l"/>
-            <a:r>
-              <a:rPr sz="1200" b="0" i="0">
+            <a:ext cx="5029200" cy="184666"/>
+          </a:xfrm>
+          <a:prstGeom prst="rect">
+            <a:avLst/>
+          </a:prstGeom>
+          <a:noFill/>
+        </p:spPr>
+        <p:txBody>
+          <a:bodyPr wrap="square" lIns="0" tIns="0" rIns="0" bIns="0" anchor="t">
+            <a:spAutoFit/>
+          </a:bodyPr>
+          <a:lstStyle/>
+          <a:p>
+            <a:pPr algn="l"/>
+            <a:r>
+              <a:rPr sz="1200" dirty="0">
                 <a:solidFill>
                   <a:srgbClr val="34D399"/>
                 </a:solidFill>
-                <a:latin typeface="Consolas"/>
-              </a:rPr>
-              <a:t>Pi Zero W class / 512 MB / 2.4 GHz WiFi + BT</a:t>
+                <a:latin typeface="Xolonium" panose="02000503000000000000" pitchFamily="2" charset="0"/>
+              </a:rPr>
+              <a:t>Pi Zero W class / 512 MB / 2.4 GHz </a:t>
+            </a:r>
+            <a:r>
+              <a:rPr sz="1200" dirty="0" err="1">
+                <a:solidFill>
+                  <a:srgbClr val="34D399"/>
+                </a:solidFill>
+                <a:latin typeface="Xolonium" panose="02000503000000000000" pitchFamily="2" charset="0"/>
+              </a:rPr>
+              <a:t>WiFi</a:t>
+            </a:r>
+            <a:r>
+              <a:rPr sz="1200" dirty="0">
+                <a:solidFill>
+                  <a:srgbClr val="34D399"/>
+                </a:solidFill>
+                <a:latin typeface="Xolonium" panose="02000503000000000000" pitchFamily="2" charset="0"/>
+              </a:rPr>
+              <a:t> + BT</a:t>
             </a:r>
           </a:p>
         </p:txBody>
@@ -10309,26 +10557,26 @@
         <p:spPr>
           <a:xfrm>
             <a:off x="9784080" y="4389120"/>
-            <a:ext cx="2103120" cy="457200"/>
-          </a:xfrm>
-          <a:prstGeom prst="rect">
-            <a:avLst/>
-          </a:prstGeom>
-          <a:noFill/>
-        </p:spPr>
-        <p:txBody>
-          <a:bodyPr wrap="square" lIns="0" rIns="0" tIns="0" bIns="0" anchor="t">
-            <a:spAutoFit/>
-          </a:bodyPr>
-          <a:lstStyle/>
-          <a:p>
-            <a:pPr algn="l"/>
-            <a:r>
-              <a:rPr sz="1400" b="0" i="0">
+            <a:ext cx="2103120" cy="430887"/>
+          </a:xfrm>
+          <a:prstGeom prst="rect">
+            <a:avLst/>
+          </a:prstGeom>
+          <a:noFill/>
+        </p:spPr>
+        <p:txBody>
+          <a:bodyPr wrap="square" lIns="0" tIns="0" rIns="0" bIns="0" anchor="t">
+            <a:spAutoFit/>
+          </a:bodyPr>
+          <a:lstStyle/>
+          <a:p>
+            <a:pPr algn="l"/>
+            <a:r>
+              <a:rPr sz="1400" dirty="0">
                 <a:solidFill>
                   <a:srgbClr val="FAFAFA"/>
                 </a:solidFill>
-                <a:latin typeface="Consolas"/>
+                <a:latin typeface="Xolonium" panose="02000503000000000000" pitchFamily="2" charset="0"/>
               </a:rPr>
               <a:t>$79 / $349 (4-pack)</a:t>
             </a:r>
@@ -10375,6 +10623,7 @@
           <a:lstStyle/>
           <a:p>
             <a:pPr algn="ctr"/>
+            <a:endParaRPr/>
           </a:p>
         </p:txBody>
       </p:sp>
@@ -10395,7 +10644,7 @@
           <a:noFill/>
         </p:spPr>
         <p:txBody>
-          <a:bodyPr wrap="square" lIns="0" rIns="0" tIns="0" bIns="0" anchor="t">
+          <a:bodyPr wrap="square" lIns="0" tIns="0" rIns="0" bIns="0" anchor="t">
             <a:spAutoFit/>
           </a:bodyPr>
           <a:lstStyle/>
@@ -10430,7 +10679,7 @@
           <a:noFill/>
         </p:spPr>
         <p:txBody>
-          <a:bodyPr wrap="square" lIns="0" rIns="0" tIns="0" bIns="0" anchor="t">
+          <a:bodyPr wrap="square" lIns="0" tIns="0" rIns="0" bIns="0" anchor="t">
             <a:spAutoFit/>
           </a:bodyPr>
           <a:lstStyle/>
@@ -10457,29 +10706,44 @@
         <p:spPr>
           <a:xfrm>
             <a:off x="4754880" y="5257800"/>
-            <a:ext cx="5029200" cy="457200"/>
-          </a:xfrm>
-          <a:prstGeom prst="rect">
-            <a:avLst/>
-          </a:prstGeom>
-          <a:noFill/>
-        </p:spPr>
-        <p:txBody>
-          <a:bodyPr wrap="square" lIns="0" rIns="0" tIns="0" bIns="0" anchor="t">
-            <a:spAutoFit/>
-          </a:bodyPr>
-          <a:lstStyle/>
-          <a:p>
-            <a:pPr algn="l"/>
-            <a:r>
-              <a:rPr sz="1200" b="0" i="0">
+            <a:ext cx="5029200" cy="184666"/>
+          </a:xfrm>
+          <a:prstGeom prst="rect">
+            <a:avLst/>
+          </a:prstGeom>
+          <a:noFill/>
+        </p:spPr>
+        <p:txBody>
+          <a:bodyPr wrap="square" lIns="0" tIns="0" rIns="0" bIns="0" anchor="t">
+            <a:spAutoFit/>
+          </a:bodyPr>
+          <a:lstStyle/>
+          <a:p>
+            <a:pPr algn="l"/>
+            <a:r>
+              <a:rPr sz="1200" dirty="0">
                 <a:solidFill>
                   <a:srgbClr val="34D399"/>
                 </a:solidFill>
-                <a:latin typeface="Consolas"/>
-              </a:rPr>
-              <a:t>Intel N100 / 16 GB / passive / iGPU</a:t>
-            </a:r>
+                <a:latin typeface="Xolonium" panose="02000503000000000000" pitchFamily="2" charset="0"/>
+              </a:rPr>
+              <a:t>Intel N100 / 16 GB / passive / </a:t>
+            </a:r>
+            <a:r>
+              <a:rPr sz="1200" dirty="0" err="1">
+                <a:solidFill>
+                  <a:srgbClr val="34D399"/>
+                </a:solidFill>
+                <a:latin typeface="Xolonium" panose="02000503000000000000" pitchFamily="2" charset="0"/>
+              </a:rPr>
+              <a:t>iGPU</a:t>
+            </a:r>
+            <a:endParaRPr sz="1200" dirty="0">
+              <a:solidFill>
+                <a:srgbClr val="34D399"/>
+              </a:solidFill>
+              <a:latin typeface="Xolonium" panose="02000503000000000000" pitchFamily="2" charset="0"/>
+            </a:endParaRPr>
           </a:p>
         </p:txBody>
       </p:sp>
@@ -10492,26 +10756,26 @@
         <p:spPr>
           <a:xfrm>
             <a:off x="9784080" y="5257800"/>
-            <a:ext cx="2103120" cy="457200"/>
-          </a:xfrm>
-          <a:prstGeom prst="rect">
-            <a:avLst/>
-          </a:prstGeom>
-          <a:noFill/>
-        </p:spPr>
-        <p:txBody>
-          <a:bodyPr wrap="square" lIns="0" rIns="0" tIns="0" bIns="0" anchor="t">
-            <a:spAutoFit/>
-          </a:bodyPr>
-          <a:lstStyle/>
-          <a:p>
-            <a:pPr algn="l"/>
-            <a:r>
-              <a:rPr sz="1400" b="0" i="0">
+            <a:ext cx="2103120" cy="215444"/>
+          </a:xfrm>
+          <a:prstGeom prst="rect">
+            <a:avLst/>
+          </a:prstGeom>
+          <a:noFill/>
+        </p:spPr>
+        <p:txBody>
+          <a:bodyPr wrap="square" lIns="0" tIns="0" rIns="0" bIns="0" anchor="t">
+            <a:spAutoFit/>
+          </a:bodyPr>
+          <a:lstStyle/>
+          <a:p>
+            <a:pPr algn="l"/>
+            <a:r>
+              <a:rPr sz="1400" dirty="0">
                 <a:solidFill>
                   <a:srgbClr val="FAFAFA"/>
                 </a:solidFill>
-                <a:latin typeface="Consolas"/>
+                <a:latin typeface="Xolonium" panose="02000503000000000000" pitchFamily="2" charset="0"/>
               </a:rPr>
               <a:t>$499</a:t>
             </a:r>
@@ -10527,26 +10791,26 @@
         <p:spPr>
           <a:xfrm>
             <a:off x="640080" y="6492240"/>
-            <a:ext cx="7315200" cy="274320"/>
-          </a:xfrm>
-          <a:prstGeom prst="rect">
-            <a:avLst/>
-          </a:prstGeom>
-          <a:noFill/>
-        </p:spPr>
-        <p:txBody>
-          <a:bodyPr wrap="square" lIns="0" rIns="0" tIns="0" bIns="0" anchor="t">
-            <a:spAutoFit/>
-          </a:bodyPr>
-          <a:lstStyle/>
-          <a:p>
-            <a:pPr algn="l"/>
-            <a:r>
-              <a:rPr sz="900" b="0" i="0">
+            <a:ext cx="7315200" cy="138499"/>
+          </a:xfrm>
+          <a:prstGeom prst="rect">
+            <a:avLst/>
+          </a:prstGeom>
+          <a:noFill/>
+        </p:spPr>
+        <p:txBody>
+          <a:bodyPr wrap="square" lIns="0" tIns="0" rIns="0" bIns="0" anchor="t">
+            <a:spAutoFit/>
+          </a:bodyPr>
+          <a:lstStyle/>
+          <a:p>
+            <a:pPr algn="l"/>
+            <a:r>
+              <a:rPr sz="900" dirty="0">
                 <a:solidFill>
                   <a:srgbClr val="475569"/>
                 </a:solidFill>
-                <a:latin typeface="Consolas"/>
+                <a:latin typeface="Xolonium" panose="02000503000000000000" pitchFamily="2" charset="0"/>
               </a:rPr>
               <a:t>THOX.ai  Your AI, on silicon you own.</a:t>
             </a:r>
@@ -10562,26 +10826,26 @@
         <p:spPr>
           <a:xfrm>
             <a:off x="10972800" y="6492240"/>
-            <a:ext cx="914400" cy="274320"/>
-          </a:xfrm>
-          <a:prstGeom prst="rect">
-            <a:avLst/>
-          </a:prstGeom>
-          <a:noFill/>
-        </p:spPr>
-        <p:txBody>
-          <a:bodyPr wrap="square" lIns="0" rIns="0" tIns="0" bIns="0" anchor="t">
+            <a:ext cx="914400" cy="138499"/>
+          </a:xfrm>
+          <a:prstGeom prst="rect">
+            <a:avLst/>
+          </a:prstGeom>
+          <a:noFill/>
+        </p:spPr>
+        <p:txBody>
+          <a:bodyPr wrap="square" lIns="0" tIns="0" rIns="0" bIns="0" anchor="t">
             <a:spAutoFit/>
           </a:bodyPr>
           <a:lstStyle/>
           <a:p>
             <a:pPr algn="r"/>
             <a:r>
-              <a:rPr sz="900" b="0" i="0">
+              <a:rPr sz="900" dirty="0">
                 <a:solidFill>
                   <a:srgbClr val="475569"/>
                 </a:solidFill>
-                <a:latin typeface="Consolas"/>
+                <a:latin typeface="Xolonium" panose="02000503000000000000" pitchFamily="2" charset="0"/>
               </a:rPr>
               <a:t>4 / 14</a:t>
             </a:r>
@@ -10597,7 +10861,7 @@
 </file>
 
 <file path=ppt/slides/slide5.xml><?xml version="1.0" encoding="utf-8"?>
-<p:sld xmlns:a="http://schemas.openxmlformats.org/drawingml/2006/main" xmlns:p="http://schemas.openxmlformats.org/presentationml/2006/main" xmlns:r="http://schemas.openxmlformats.org/officeDocument/2006/relationships">
+<p:sld xmlns:a="http://schemas.openxmlformats.org/drawingml/2006/main" xmlns:r="http://schemas.openxmlformats.org/officeDocument/2006/relationships" xmlns:p="http://schemas.openxmlformats.org/presentationml/2006/main">
   <p:cSld>
     <p:spTree>
       <p:nvGrpSpPr>
@@ -10605,7 +10869,14 @@
         <p:cNvGrpSpPr/>
         <p:nvPr/>
       </p:nvGrpSpPr>
-      <p:grpSpPr/>
+      <p:grpSpPr>
+        <a:xfrm>
+          <a:off x="0" y="0"/>
+          <a:ext cx="0" cy="0"/>
+          <a:chOff x="0" y="0"/>
+          <a:chExt cx="0" cy="0"/>
+        </a:xfrm>
+      </p:grpSpPr>
       <p:sp>
         <p:nvSpPr>
           <p:cNvPr id="2" name="Rectangle 1"/>
@@ -10646,6 +10917,7 @@
           <a:lstStyle/>
           <a:p>
             <a:pPr algn="ctr"/>
+            <a:endParaRPr/>
           </a:p>
         </p:txBody>
       </p:sp>
@@ -10689,6 +10961,7 @@
           <a:lstStyle/>
           <a:p>
             <a:pPr algn="ctr"/>
+            <a:endParaRPr/>
           </a:p>
         </p:txBody>
       </p:sp>
@@ -10701,26 +10974,26 @@
         <p:spPr>
           <a:xfrm>
             <a:off x="640080" y="502920"/>
-            <a:ext cx="7315200" cy="365760"/>
-          </a:xfrm>
-          <a:prstGeom prst="rect">
-            <a:avLst/>
-          </a:prstGeom>
-          <a:noFill/>
-        </p:spPr>
-        <p:txBody>
-          <a:bodyPr wrap="square" lIns="0" rIns="0" tIns="0" bIns="0" anchor="t">
-            <a:spAutoFit/>
-          </a:bodyPr>
-          <a:lstStyle/>
-          <a:p>
-            <a:pPr algn="l"/>
-            <a:r>
-              <a:rPr sz="1200" b="0" i="0">
+            <a:ext cx="7315200" cy="184666"/>
+          </a:xfrm>
+          <a:prstGeom prst="rect">
+            <a:avLst/>
+          </a:prstGeom>
+          <a:noFill/>
+        </p:spPr>
+        <p:txBody>
+          <a:bodyPr wrap="square" lIns="0" tIns="0" rIns="0" bIns="0" anchor="t">
+            <a:spAutoFit/>
+          </a:bodyPr>
+          <a:lstStyle/>
+          <a:p>
+            <a:pPr algn="l"/>
+            <a:r>
+              <a:rPr sz="1200" dirty="0">
                 <a:solidFill>
                   <a:srgbClr val="10B981"/>
                 </a:solidFill>
-                <a:latin typeface="Consolas"/>
+                <a:latin typeface="Xolonium" panose="02000503000000000000" pitchFamily="2" charset="0"/>
               </a:rPr>
               <a:t>THE FRONT DOOR</a:t>
             </a:r>
@@ -10744,7 +11017,7 @@
           <a:noFill/>
         </p:spPr>
         <p:txBody>
-          <a:bodyPr wrap="square" lIns="0" rIns="0" tIns="0" bIns="0" anchor="t">
+          <a:bodyPr wrap="square" lIns="0" tIns="0" rIns="0" bIns="0" anchor="t">
             <a:spAutoFit/>
           </a:bodyPr>
           <a:lstStyle/>
@@ -10779,7 +11052,7 @@
           <a:noFill/>
         </p:spPr>
         <p:txBody>
-          <a:bodyPr wrap="square" lIns="0" rIns="0" tIns="0" bIns="0" anchor="t">
+          <a:bodyPr wrap="square" lIns="0" tIns="0" rIns="0" bIns="0" anchor="t">
             <a:spAutoFit/>
           </a:bodyPr>
           <a:lstStyle/>
@@ -10814,7 +11087,7 @@
           <a:noFill/>
         </p:spPr>
         <p:txBody>
-          <a:bodyPr wrap="square" lIns="0" rIns="0" tIns="0" bIns="0">
+          <a:bodyPr wrap="square" lIns="0" tIns="0" rIns="0" bIns="0">
             <a:spAutoFit/>
           </a:bodyPr>
           <a:lstStyle/>
@@ -10928,6 +11201,7 @@
           <a:lstStyle/>
           <a:p>
             <a:pPr algn="ctr"/>
+            <a:endParaRPr/>
           </a:p>
         </p:txBody>
       </p:sp>
@@ -10940,26 +11214,26 @@
         <p:spPr>
           <a:xfrm>
             <a:off x="8046720" y="3246120"/>
-            <a:ext cx="3291840" cy="365760"/>
-          </a:xfrm>
-          <a:prstGeom prst="rect">
-            <a:avLst/>
-          </a:prstGeom>
-          <a:noFill/>
-        </p:spPr>
-        <p:txBody>
-          <a:bodyPr wrap="square" lIns="0" rIns="0" tIns="0" bIns="0" anchor="t">
-            <a:spAutoFit/>
-          </a:bodyPr>
-          <a:lstStyle/>
-          <a:p>
-            <a:pPr algn="l"/>
-            <a:r>
-              <a:rPr sz="1000" b="0" i="0">
+            <a:ext cx="3291840" cy="153888"/>
+          </a:xfrm>
+          <a:prstGeom prst="rect">
+            <a:avLst/>
+          </a:prstGeom>
+          <a:noFill/>
+        </p:spPr>
+        <p:txBody>
+          <a:bodyPr wrap="square" lIns="0" tIns="0" rIns="0" bIns="0" anchor="t">
+            <a:spAutoFit/>
+          </a:bodyPr>
+          <a:lstStyle/>
+          <a:p>
+            <a:pPr algn="l"/>
+            <a:r>
+              <a:rPr sz="1000" dirty="0">
                 <a:solidFill>
                   <a:srgbClr val="10B981"/>
                 </a:solidFill>
-                <a:latin typeface="Consolas"/>
+                <a:latin typeface="Xolonium" panose="02000503000000000000" pitchFamily="2" charset="0"/>
               </a:rPr>
               <a:t>SPECS</a:t>
             </a:r>
@@ -10975,15 +11249,15 @@
         <p:spPr>
           <a:xfrm>
             <a:off x="8046720" y="3611880"/>
-            <a:ext cx="3291840" cy="2103120"/>
-          </a:xfrm>
-          <a:prstGeom prst="rect">
-            <a:avLst/>
-          </a:prstGeom>
-          <a:noFill/>
-        </p:spPr>
-        <p:txBody>
-          <a:bodyPr wrap="square" lIns="0" rIns="0" tIns="0" bIns="0">
+            <a:ext cx="3291840" cy="1400383"/>
+          </a:xfrm>
+          <a:prstGeom prst="rect">
+            <a:avLst/>
+          </a:prstGeom>
+          <a:noFill/>
+        </p:spPr>
+        <p:txBody>
+          <a:bodyPr wrap="square" lIns="0" tIns="0" rIns="0" bIns="0">
             <a:spAutoFit/>
           </a:bodyPr>
           <a:lstStyle/>
@@ -10994,11 +11268,11 @@
               </a:spcAft>
             </a:pPr>
             <a:r>
-              <a:rPr sz="1100" b="0">
+              <a:rPr sz="1100" dirty="0">
                 <a:solidFill>
                   <a:srgbClr val="FAFAFA"/>
                 </a:solidFill>
-                <a:latin typeface="Consolas"/>
+                <a:latin typeface="Xolonium" panose="02000503000000000000" pitchFamily="2" charset="0"/>
               </a:rPr>
               <a:t>SoC      nRF52840</a:t>
             </a:r>
@@ -11010,11 +11284,11 @@
               </a:spcAft>
             </a:pPr>
             <a:r>
-              <a:rPr sz="1100" b="0">
+              <a:rPr sz="1100" dirty="0">
                 <a:solidFill>
                   <a:srgbClr val="FAFAFA"/>
                 </a:solidFill>
-                <a:latin typeface="Consolas"/>
+                <a:latin typeface="Xolonium" panose="02000503000000000000" pitchFamily="2" charset="0"/>
               </a:rPr>
               <a:t>Mics     2 × MEMS</a:t>
             </a:r>
@@ -11026,11 +11300,11 @@
               </a:spcAft>
             </a:pPr>
             <a:r>
-              <a:rPr sz="1100" b="0">
+              <a:rPr sz="1100" dirty="0">
                 <a:solidFill>
                   <a:srgbClr val="FAFAFA"/>
                 </a:solidFill>
-                <a:latin typeface="Consolas"/>
+                <a:latin typeface="Xolonium" panose="02000503000000000000" pitchFamily="2" charset="0"/>
               </a:rPr>
               <a:t>Sensors  6-axis IMU</a:t>
             </a:r>
@@ -11042,11 +11316,11 @@
               </a:spcAft>
             </a:pPr>
             <a:r>
-              <a:rPr sz="1100" b="0">
+              <a:rPr sz="1100" dirty="0">
                 <a:solidFill>
                   <a:srgbClr val="FAFAFA"/>
                 </a:solidFill>
-                <a:latin typeface="Consolas"/>
+                <a:latin typeface="Xolonium" panose="02000503000000000000" pitchFamily="2" charset="0"/>
               </a:rPr>
               <a:t>Radio    BLE 5.3</a:t>
             </a:r>
@@ -11058,14 +11332,29 @@
               </a:spcAft>
             </a:pPr>
             <a:r>
-              <a:rPr sz="1100" b="0">
+              <a:rPr sz="1100" dirty="0">
                 <a:solidFill>
                   <a:srgbClr val="FAFAFA"/>
                 </a:solidFill>
-                <a:latin typeface="Consolas"/>
-              </a:rPr>
-              <a:t>Power    USB-C, 12 hr</a:t>
-            </a:r>
+                <a:latin typeface="Xolonium" panose="02000503000000000000" pitchFamily="2" charset="0"/>
+              </a:rPr>
+              <a:t>Power    USB-C, 12 </a:t>
+            </a:r>
+            <a:r>
+              <a:rPr sz="1100" dirty="0" err="1">
+                <a:solidFill>
+                  <a:srgbClr val="FAFAFA"/>
+                </a:solidFill>
+                <a:latin typeface="Xolonium" panose="02000503000000000000" pitchFamily="2" charset="0"/>
+              </a:rPr>
+              <a:t>hr</a:t>
+            </a:r>
+            <a:endParaRPr sz="1100" dirty="0">
+              <a:solidFill>
+                <a:srgbClr val="FAFAFA"/>
+              </a:solidFill>
+              <a:latin typeface="Xolonium" panose="02000503000000000000" pitchFamily="2" charset="0"/>
+            </a:endParaRPr>
           </a:p>
           <a:p>
             <a:pPr algn="l">
@@ -11074,11 +11363,11 @@
               </a:spcAft>
             </a:pPr>
             <a:r>
-              <a:rPr sz="1100" b="0">
+              <a:rPr sz="1100" dirty="0">
                 <a:solidFill>
                   <a:srgbClr val="FAFAFA"/>
                 </a:solidFill>
-                <a:latin typeface="Consolas"/>
+                <a:latin typeface="Xolonium" panose="02000503000000000000" pitchFamily="2" charset="0"/>
               </a:rPr>
               <a:t>Body     Anodized Al</a:t>
             </a:r>
@@ -11094,26 +11383,26 @@
         <p:spPr>
           <a:xfrm>
             <a:off x="640080" y="6035040"/>
-            <a:ext cx="10972800" cy="365760"/>
-          </a:xfrm>
-          <a:prstGeom prst="rect">
-            <a:avLst/>
-          </a:prstGeom>
-          <a:noFill/>
-        </p:spPr>
-        <p:txBody>
-          <a:bodyPr wrap="square" lIns="0" rIns="0" tIns="0" bIns="0" anchor="t">
-            <a:spAutoFit/>
-          </a:bodyPr>
-          <a:lstStyle/>
-          <a:p>
-            <a:pPr algn="l"/>
-            <a:r>
-              <a:rPr sz="1400" b="0" i="0">
+            <a:ext cx="10972800" cy="215444"/>
+          </a:xfrm>
+          <a:prstGeom prst="rect">
+            <a:avLst/>
+          </a:prstGeom>
+          <a:noFill/>
+        </p:spPr>
+        <p:txBody>
+          <a:bodyPr wrap="square" lIns="0" tIns="0" rIns="0" bIns="0" anchor="t">
+            <a:spAutoFit/>
+          </a:bodyPr>
+          <a:lstStyle/>
+          <a:p>
+            <a:pPr algn="l"/>
+            <a:r>
+              <a:rPr sz="1400" dirty="0">
                 <a:solidFill>
                   <a:srgbClr val="10B981"/>
                 </a:solidFill>
-                <a:latin typeface="Consolas"/>
+                <a:latin typeface="Xolonium" panose="02000503000000000000" pitchFamily="2" charset="0"/>
               </a:rPr>
               <a:t>Price  $39 early-bird  |  $49 list  |  $109 with ThoxMini (Maker Kit)</a:t>
             </a:r>
@@ -11129,26 +11418,26 @@
         <p:spPr>
           <a:xfrm>
             <a:off x="640080" y="6492240"/>
-            <a:ext cx="7315200" cy="274320"/>
-          </a:xfrm>
-          <a:prstGeom prst="rect">
-            <a:avLst/>
-          </a:prstGeom>
-          <a:noFill/>
-        </p:spPr>
-        <p:txBody>
-          <a:bodyPr wrap="square" lIns="0" rIns="0" tIns="0" bIns="0" anchor="t">
-            <a:spAutoFit/>
-          </a:bodyPr>
-          <a:lstStyle/>
-          <a:p>
-            <a:pPr algn="l"/>
-            <a:r>
-              <a:rPr sz="900" b="0" i="0">
+            <a:ext cx="7315200" cy="138499"/>
+          </a:xfrm>
+          <a:prstGeom prst="rect">
+            <a:avLst/>
+          </a:prstGeom>
+          <a:noFill/>
+        </p:spPr>
+        <p:txBody>
+          <a:bodyPr wrap="square" lIns="0" tIns="0" rIns="0" bIns="0" anchor="t">
+            <a:spAutoFit/>
+          </a:bodyPr>
+          <a:lstStyle/>
+          <a:p>
+            <a:pPr algn="l"/>
+            <a:r>
+              <a:rPr sz="900" dirty="0">
                 <a:solidFill>
                   <a:srgbClr val="475569"/>
                 </a:solidFill>
-                <a:latin typeface="Consolas"/>
+                <a:latin typeface="Xolonium" panose="02000503000000000000" pitchFamily="2" charset="0"/>
               </a:rPr>
               <a:t>THOX.ai  Your AI, on silicon you own.</a:t>
             </a:r>
@@ -11164,26 +11453,26 @@
         <p:spPr>
           <a:xfrm>
             <a:off x="10972800" y="6492240"/>
-            <a:ext cx="914400" cy="274320"/>
-          </a:xfrm>
-          <a:prstGeom prst="rect">
-            <a:avLst/>
-          </a:prstGeom>
-          <a:noFill/>
-        </p:spPr>
-        <p:txBody>
-          <a:bodyPr wrap="square" lIns="0" rIns="0" tIns="0" bIns="0" anchor="t">
+            <a:ext cx="914400" cy="138499"/>
+          </a:xfrm>
+          <a:prstGeom prst="rect">
+            <a:avLst/>
+          </a:prstGeom>
+          <a:noFill/>
+        </p:spPr>
+        <p:txBody>
+          <a:bodyPr wrap="square" lIns="0" tIns="0" rIns="0" bIns="0" anchor="t">
             <a:spAutoFit/>
           </a:bodyPr>
           <a:lstStyle/>
           <a:p>
             <a:pPr algn="r"/>
             <a:r>
-              <a:rPr sz="900" b="0" i="0">
+              <a:rPr sz="900" dirty="0">
                 <a:solidFill>
                   <a:srgbClr val="475569"/>
                 </a:solidFill>
-                <a:latin typeface="Consolas"/>
+                <a:latin typeface="Xolonium" panose="02000503000000000000" pitchFamily="2" charset="0"/>
               </a:rPr>
               <a:t>5 / 14</a:t>
             </a:r>
@@ -11199,7 +11488,7 @@
 </file>
 
 <file path=ppt/slides/slide6.xml><?xml version="1.0" encoding="utf-8"?>
-<p:sld xmlns:a="http://schemas.openxmlformats.org/drawingml/2006/main" xmlns:p="http://schemas.openxmlformats.org/presentationml/2006/main" xmlns:r="http://schemas.openxmlformats.org/officeDocument/2006/relationships">
+<p:sld xmlns:a="http://schemas.openxmlformats.org/drawingml/2006/main" xmlns:r="http://schemas.openxmlformats.org/officeDocument/2006/relationships" xmlns:p="http://schemas.openxmlformats.org/presentationml/2006/main">
   <p:cSld>
     <p:spTree>
       <p:nvGrpSpPr>
@@ -11207,7 +11496,14 @@
         <p:cNvGrpSpPr/>
         <p:nvPr/>
       </p:nvGrpSpPr>
-      <p:grpSpPr/>
+      <p:grpSpPr>
+        <a:xfrm>
+          <a:off x="0" y="0"/>
+          <a:ext cx="0" cy="0"/>
+          <a:chOff x="0" y="0"/>
+          <a:chExt cx="0" cy="0"/>
+        </a:xfrm>
+      </p:grpSpPr>
       <p:sp>
         <p:nvSpPr>
           <p:cNvPr id="2" name="Rectangle 1"/>
@@ -11248,6 +11544,7 @@
           <a:lstStyle/>
           <a:p>
             <a:pPr algn="ctr"/>
+            <a:endParaRPr/>
           </a:p>
         </p:txBody>
       </p:sp>
@@ -11291,6 +11588,7 @@
           <a:lstStyle/>
           <a:p>
             <a:pPr algn="ctr"/>
+            <a:endParaRPr/>
           </a:p>
         </p:txBody>
       </p:sp>
@@ -11303,26 +11601,26 @@
         <p:spPr>
           <a:xfrm>
             <a:off x="640080" y="502920"/>
-            <a:ext cx="7315200" cy="365760"/>
-          </a:xfrm>
-          <a:prstGeom prst="rect">
-            <a:avLst/>
-          </a:prstGeom>
-          <a:noFill/>
-        </p:spPr>
-        <p:txBody>
-          <a:bodyPr wrap="square" lIns="0" rIns="0" tIns="0" bIns="0" anchor="t">
-            <a:spAutoFit/>
-          </a:bodyPr>
-          <a:lstStyle/>
-          <a:p>
-            <a:pPr algn="l"/>
-            <a:r>
-              <a:rPr sz="1200" b="0" i="0">
+            <a:ext cx="7315200" cy="184666"/>
+          </a:xfrm>
+          <a:prstGeom prst="rect">
+            <a:avLst/>
+          </a:prstGeom>
+          <a:noFill/>
+        </p:spPr>
+        <p:txBody>
+          <a:bodyPr wrap="square" lIns="0" tIns="0" rIns="0" bIns="0" anchor="t">
+            <a:spAutoFit/>
+          </a:bodyPr>
+          <a:lstStyle/>
+          <a:p>
+            <a:pPr algn="l"/>
+            <a:r>
+              <a:rPr sz="1200" dirty="0">
                 <a:solidFill>
                   <a:srgbClr val="34D399"/>
                 </a:solidFill>
-                <a:latin typeface="Consolas"/>
+                <a:latin typeface="Xolonium" panose="02000503000000000000" pitchFamily="2" charset="0"/>
               </a:rPr>
               <a:t>THE POCKET NODE</a:t>
             </a:r>
@@ -11346,7 +11644,7 @@
           <a:noFill/>
         </p:spPr>
         <p:txBody>
-          <a:bodyPr wrap="square" lIns="0" rIns="0" tIns="0" bIns="0" anchor="t">
+          <a:bodyPr wrap="square" lIns="0" tIns="0" rIns="0" bIns="0" anchor="t">
             <a:spAutoFit/>
           </a:bodyPr>
           <a:lstStyle/>
@@ -11381,7 +11679,7 @@
           <a:noFill/>
         </p:spPr>
         <p:txBody>
-          <a:bodyPr wrap="square" lIns="0" rIns="0" tIns="0" bIns="0" anchor="t">
+          <a:bodyPr wrap="square" lIns="0" tIns="0" rIns="0" bIns="0" anchor="t">
             <a:spAutoFit/>
           </a:bodyPr>
           <a:lstStyle/>
@@ -11416,7 +11714,7 @@
           <a:noFill/>
         </p:spPr>
         <p:txBody>
-          <a:bodyPr wrap="square" lIns="0" rIns="0" tIns="0" bIns="0">
+          <a:bodyPr wrap="square" lIns="0" tIns="0" rIns="0" bIns="0">
             <a:spAutoFit/>
           </a:bodyPr>
           <a:lstStyle/>
@@ -11530,6 +11828,7 @@
           <a:lstStyle/>
           <a:p>
             <a:pPr algn="ctr"/>
+            <a:endParaRPr/>
           </a:p>
         </p:txBody>
       </p:sp>
@@ -11542,26 +11841,26 @@
         <p:spPr>
           <a:xfrm>
             <a:off x="8046720" y="3246120"/>
-            <a:ext cx="3291840" cy="365760"/>
-          </a:xfrm>
-          <a:prstGeom prst="rect">
-            <a:avLst/>
-          </a:prstGeom>
-          <a:noFill/>
-        </p:spPr>
-        <p:txBody>
-          <a:bodyPr wrap="square" lIns="0" rIns="0" tIns="0" bIns="0" anchor="t">
-            <a:spAutoFit/>
-          </a:bodyPr>
-          <a:lstStyle/>
-          <a:p>
-            <a:pPr algn="l"/>
-            <a:r>
-              <a:rPr sz="1000" b="0" i="0">
+            <a:ext cx="3291840" cy="153888"/>
+          </a:xfrm>
+          <a:prstGeom prst="rect">
+            <a:avLst/>
+          </a:prstGeom>
+          <a:noFill/>
+        </p:spPr>
+        <p:txBody>
+          <a:bodyPr wrap="square" lIns="0" tIns="0" rIns="0" bIns="0" anchor="t">
+            <a:spAutoFit/>
+          </a:bodyPr>
+          <a:lstStyle/>
+          <a:p>
+            <a:pPr algn="l"/>
+            <a:r>
+              <a:rPr sz="1000" dirty="0">
                 <a:solidFill>
                   <a:srgbClr val="34D399"/>
                 </a:solidFill>
-                <a:latin typeface="Consolas"/>
+                <a:latin typeface="Xolonium" panose="02000503000000000000" pitchFamily="2" charset="0"/>
               </a:rPr>
               <a:t>SPECS</a:t>
             </a:r>
@@ -11577,15 +11876,15 @@
         <p:spPr>
           <a:xfrm>
             <a:off x="8046720" y="3611880"/>
-            <a:ext cx="3291840" cy="2103120"/>
-          </a:xfrm>
-          <a:prstGeom prst="rect">
-            <a:avLst/>
-          </a:prstGeom>
-          <a:noFill/>
-        </p:spPr>
-        <p:txBody>
-          <a:bodyPr wrap="square" lIns="0" rIns="0" tIns="0" bIns="0">
+            <a:ext cx="3291840" cy="1400383"/>
+          </a:xfrm>
+          <a:prstGeom prst="rect">
+            <a:avLst/>
+          </a:prstGeom>
+          <a:noFill/>
+        </p:spPr>
+        <p:txBody>
+          <a:bodyPr wrap="square" lIns="0" tIns="0" rIns="0" bIns="0">
             <a:spAutoFit/>
           </a:bodyPr>
           <a:lstStyle/>
@@ -11596,11 +11895,11 @@
               </a:spcAft>
             </a:pPr>
             <a:r>
-              <a:rPr sz="1100" b="0">
+              <a:rPr sz="1100" dirty="0">
                 <a:solidFill>
                   <a:srgbClr val="FAFAFA"/>
                 </a:solidFill>
-                <a:latin typeface="Consolas"/>
+                <a:latin typeface="Xolonium" panose="02000503000000000000" pitchFamily="2" charset="0"/>
               </a:rPr>
               <a:t>SoC      Milk-V Duo (CV1800B)</a:t>
             </a:r>
@@ -11612,11 +11911,11 @@
               </a:spcAft>
             </a:pPr>
             <a:r>
-              <a:rPr sz="1100" b="0">
+              <a:rPr sz="1100" dirty="0">
                 <a:solidFill>
                   <a:srgbClr val="FAFAFA"/>
                 </a:solidFill>
-                <a:latin typeface="Consolas"/>
+                <a:latin typeface="Xolonium" panose="02000503000000000000" pitchFamily="2" charset="0"/>
               </a:rPr>
               <a:t>Cores    2 × RISC-V @ 1 GHz</a:t>
             </a:r>
@@ -11628,11 +11927,11 @@
               </a:spcAft>
             </a:pPr>
             <a:r>
-              <a:rPr sz="1100" b="0">
+              <a:rPr sz="1100" dirty="0">
                 <a:solidFill>
                   <a:srgbClr val="FAFAFA"/>
                 </a:solidFill>
-                <a:latin typeface="Consolas"/>
+                <a:latin typeface="Xolonium" panose="02000503000000000000" pitchFamily="2" charset="0"/>
               </a:rPr>
               <a:t>Memory   64 MB SRAM</a:t>
             </a:r>
@@ -11644,11 +11943,11 @@
               </a:spcAft>
             </a:pPr>
             <a:r>
-              <a:rPr sz="1100" b="0">
+              <a:rPr sz="1100" dirty="0">
                 <a:solidFill>
                   <a:srgbClr val="FAFAFA"/>
                 </a:solidFill>
-                <a:latin typeface="Consolas"/>
+                <a:latin typeface="Xolonium" panose="02000503000000000000" pitchFamily="2" charset="0"/>
               </a:rPr>
               <a:t>Storage  microSD</a:t>
             </a:r>
@@ -11660,11 +11959,11 @@
               </a:spcAft>
             </a:pPr>
             <a:r>
-              <a:rPr sz="1100" b="0">
+              <a:rPr sz="1100" dirty="0">
                 <a:solidFill>
                   <a:srgbClr val="FAFAFA"/>
                 </a:solidFill>
-                <a:latin typeface="Consolas"/>
+                <a:latin typeface="Xolonium" panose="02000503000000000000" pitchFamily="2" charset="0"/>
               </a:rPr>
               <a:t>Power    &lt;1 W sustained</a:t>
             </a:r>
@@ -11676,11 +11975,11 @@
               </a:spcAft>
             </a:pPr>
             <a:r>
-              <a:rPr sz="1100" b="0">
+              <a:rPr sz="1100" dirty="0">
                 <a:solidFill>
                   <a:srgbClr val="FAFAFA"/>
                 </a:solidFill>
-                <a:latin typeface="Consolas"/>
+                <a:latin typeface="Xolonium" panose="02000503000000000000" pitchFamily="2" charset="0"/>
               </a:rPr>
               <a:t>I/O      USB-C, 3 UART, 2 I2C</a:t>
             </a:r>
@@ -11696,26 +11995,26 @@
         <p:spPr>
           <a:xfrm>
             <a:off x="640080" y="6035040"/>
-            <a:ext cx="10972800" cy="365760"/>
-          </a:xfrm>
-          <a:prstGeom prst="rect">
-            <a:avLst/>
-          </a:prstGeom>
-          <a:noFill/>
-        </p:spPr>
-        <p:txBody>
-          <a:bodyPr wrap="square" lIns="0" rIns="0" tIns="0" bIns="0" anchor="t">
-            <a:spAutoFit/>
-          </a:bodyPr>
-          <a:lstStyle/>
-          <a:p>
-            <a:pPr algn="l"/>
-            <a:r>
-              <a:rPr sz="1400" b="0" i="0">
+            <a:ext cx="10972800" cy="215444"/>
+          </a:xfrm>
+          <a:prstGeom prst="rect">
+            <a:avLst/>
+          </a:prstGeom>
+          <a:noFill/>
+        </p:spPr>
+        <p:txBody>
+          <a:bodyPr wrap="square" lIns="0" tIns="0" rIns="0" bIns="0" anchor="t">
+            <a:spAutoFit/>
+          </a:bodyPr>
+          <a:lstStyle/>
+          <a:p>
+            <a:pPr algn="l"/>
+            <a:r>
+              <a:rPr sz="1400" dirty="0">
                 <a:solidFill>
                   <a:srgbClr val="34D399"/>
                 </a:solidFill>
-                <a:latin typeface="Consolas"/>
+                <a:latin typeface="Xolonium" panose="02000503000000000000" pitchFamily="2" charset="0"/>
               </a:rPr>
               <a:t>Price  $69  |  Maker Kit (ThoxMini + ThoxClip) $109</a:t>
             </a:r>
@@ -11731,26 +12030,26 @@
         <p:spPr>
           <a:xfrm>
             <a:off x="640080" y="6492240"/>
-            <a:ext cx="7315200" cy="274320"/>
-          </a:xfrm>
-          <a:prstGeom prst="rect">
-            <a:avLst/>
-          </a:prstGeom>
-          <a:noFill/>
-        </p:spPr>
-        <p:txBody>
-          <a:bodyPr wrap="square" lIns="0" rIns="0" tIns="0" bIns="0" anchor="t">
-            <a:spAutoFit/>
-          </a:bodyPr>
-          <a:lstStyle/>
-          <a:p>
-            <a:pPr algn="l"/>
-            <a:r>
-              <a:rPr sz="900" b="0" i="0">
+            <a:ext cx="7315200" cy="138499"/>
+          </a:xfrm>
+          <a:prstGeom prst="rect">
+            <a:avLst/>
+          </a:prstGeom>
+          <a:noFill/>
+        </p:spPr>
+        <p:txBody>
+          <a:bodyPr wrap="square" lIns="0" tIns="0" rIns="0" bIns="0" anchor="t">
+            <a:spAutoFit/>
+          </a:bodyPr>
+          <a:lstStyle/>
+          <a:p>
+            <a:pPr algn="l"/>
+            <a:r>
+              <a:rPr sz="900" dirty="0">
                 <a:solidFill>
                   <a:srgbClr val="475569"/>
                 </a:solidFill>
-                <a:latin typeface="Consolas"/>
+                <a:latin typeface="Xolonium" panose="02000503000000000000" pitchFamily="2" charset="0"/>
               </a:rPr>
               <a:t>THOX.ai  Your AI, on silicon you own.</a:t>
             </a:r>
@@ -11766,26 +12065,26 @@
         <p:spPr>
           <a:xfrm>
             <a:off x="10972800" y="6492240"/>
-            <a:ext cx="914400" cy="274320"/>
-          </a:xfrm>
-          <a:prstGeom prst="rect">
-            <a:avLst/>
-          </a:prstGeom>
-          <a:noFill/>
-        </p:spPr>
-        <p:txBody>
-          <a:bodyPr wrap="square" lIns="0" rIns="0" tIns="0" bIns="0" anchor="t">
+            <a:ext cx="914400" cy="138499"/>
+          </a:xfrm>
+          <a:prstGeom prst="rect">
+            <a:avLst/>
+          </a:prstGeom>
+          <a:noFill/>
+        </p:spPr>
+        <p:txBody>
+          <a:bodyPr wrap="square" lIns="0" tIns="0" rIns="0" bIns="0" anchor="t">
             <a:spAutoFit/>
           </a:bodyPr>
           <a:lstStyle/>
           <a:p>
             <a:pPr algn="r"/>
             <a:r>
-              <a:rPr sz="900" b="0" i="0">
+              <a:rPr sz="900" dirty="0">
                 <a:solidFill>
                   <a:srgbClr val="475569"/>
                 </a:solidFill>
-                <a:latin typeface="Consolas"/>
+                <a:latin typeface="Xolonium" panose="02000503000000000000" pitchFamily="2" charset="0"/>
               </a:rPr>
               <a:t>6 / 14</a:t>
             </a:r>
@@ -11801,7 +12100,7 @@
 </file>
 
 <file path=ppt/slides/slide7.xml><?xml version="1.0" encoding="utf-8"?>
-<p:sld xmlns:a="http://schemas.openxmlformats.org/drawingml/2006/main" xmlns:p="http://schemas.openxmlformats.org/presentationml/2006/main" xmlns:r="http://schemas.openxmlformats.org/officeDocument/2006/relationships">
+<p:sld xmlns:a="http://schemas.openxmlformats.org/drawingml/2006/main" xmlns:r="http://schemas.openxmlformats.org/officeDocument/2006/relationships" xmlns:p="http://schemas.openxmlformats.org/presentationml/2006/main">
   <p:cSld>
     <p:spTree>
       <p:nvGrpSpPr>
@@ -11809,7 +12108,14 @@
         <p:cNvGrpSpPr/>
         <p:nvPr/>
       </p:nvGrpSpPr>
-      <p:grpSpPr/>
+      <p:grpSpPr>
+        <a:xfrm>
+          <a:off x="0" y="0"/>
+          <a:ext cx="0" cy="0"/>
+          <a:chOff x="0" y="0"/>
+          <a:chExt cx="0" cy="0"/>
+        </a:xfrm>
+      </p:grpSpPr>
       <p:sp>
         <p:nvSpPr>
           <p:cNvPr id="2" name="Rectangle 1"/>
@@ -11850,6 +12156,7 @@
           <a:lstStyle/>
           <a:p>
             <a:pPr algn="ctr"/>
+            <a:endParaRPr/>
           </a:p>
         </p:txBody>
       </p:sp>
@@ -11893,6 +12200,7 @@
           <a:lstStyle/>
           <a:p>
             <a:pPr algn="ctr"/>
+            <a:endParaRPr/>
           </a:p>
         </p:txBody>
       </p:sp>
@@ -11905,26 +12213,26 @@
         <p:spPr>
           <a:xfrm>
             <a:off x="640080" y="502920"/>
-            <a:ext cx="7315200" cy="365760"/>
-          </a:xfrm>
-          <a:prstGeom prst="rect">
-            <a:avLst/>
-          </a:prstGeom>
-          <a:noFill/>
-        </p:spPr>
-        <p:txBody>
-          <a:bodyPr wrap="square" lIns="0" rIns="0" tIns="0" bIns="0" anchor="t">
-            <a:spAutoFit/>
-          </a:bodyPr>
-          <a:lstStyle/>
-          <a:p>
-            <a:pPr algn="l"/>
-            <a:r>
-              <a:rPr sz="1200" b="0" i="0">
+            <a:ext cx="7315200" cy="184666"/>
+          </a:xfrm>
+          <a:prstGeom prst="rect">
+            <a:avLst/>
+          </a:prstGeom>
+          <a:noFill/>
+        </p:spPr>
+        <p:txBody>
+          <a:bodyPr wrap="square" lIns="0" tIns="0" rIns="0" bIns="0" anchor="t">
+            <a:spAutoFit/>
+          </a:bodyPr>
+          <a:lstStyle/>
+          <a:p>
+            <a:pPr algn="l"/>
+            <a:r>
+              <a:rPr sz="1200" dirty="0">
                 <a:solidFill>
                   <a:srgbClr val="A855F7"/>
                 </a:solidFill>
-                <a:latin typeface="Consolas"/>
+                <a:latin typeface="Xolonium" panose="02000503000000000000" pitchFamily="2" charset="0"/>
               </a:rPr>
               <a:t>THE WIRELESS NODE</a:t>
             </a:r>
@@ -11948,7 +12256,7 @@
           <a:noFill/>
         </p:spPr>
         <p:txBody>
-          <a:bodyPr wrap="square" lIns="0" rIns="0" tIns="0" bIns="0" anchor="t">
+          <a:bodyPr wrap="square" lIns="0" tIns="0" rIns="0" bIns="0" anchor="t">
             <a:spAutoFit/>
           </a:bodyPr>
           <a:lstStyle/>
@@ -11983,7 +12291,7 @@
           <a:noFill/>
         </p:spPr>
         <p:txBody>
-          <a:bodyPr wrap="square" lIns="0" rIns="0" tIns="0" bIns="0" anchor="t">
+          <a:bodyPr wrap="square" lIns="0" tIns="0" rIns="0" bIns="0" anchor="t">
             <a:spAutoFit/>
           </a:bodyPr>
           <a:lstStyle/>
@@ -12018,7 +12326,7 @@
           <a:noFill/>
         </p:spPr>
         <p:txBody>
-          <a:bodyPr wrap="square" lIns="0" rIns="0" tIns="0" bIns="0">
+          <a:bodyPr wrap="square" lIns="0" tIns="0" rIns="0" bIns="0">
             <a:spAutoFit/>
           </a:bodyPr>
           <a:lstStyle/>
@@ -12132,6 +12440,7 @@
           <a:lstStyle/>
           <a:p>
             <a:pPr algn="ctr"/>
+            <a:endParaRPr/>
           </a:p>
         </p:txBody>
       </p:sp>
@@ -12144,26 +12453,26 @@
         <p:spPr>
           <a:xfrm>
             <a:off x="8046720" y="3246120"/>
-            <a:ext cx="3291840" cy="365760"/>
-          </a:xfrm>
-          <a:prstGeom prst="rect">
-            <a:avLst/>
-          </a:prstGeom>
-          <a:noFill/>
-        </p:spPr>
-        <p:txBody>
-          <a:bodyPr wrap="square" lIns="0" rIns="0" tIns="0" bIns="0" anchor="t">
-            <a:spAutoFit/>
-          </a:bodyPr>
-          <a:lstStyle/>
-          <a:p>
-            <a:pPr algn="l"/>
-            <a:r>
-              <a:rPr sz="1000" b="0" i="0">
+            <a:ext cx="3291840" cy="153888"/>
+          </a:xfrm>
+          <a:prstGeom prst="rect">
+            <a:avLst/>
+          </a:prstGeom>
+          <a:noFill/>
+        </p:spPr>
+        <p:txBody>
+          <a:bodyPr wrap="square" lIns="0" tIns="0" rIns="0" bIns="0" anchor="t">
+            <a:spAutoFit/>
+          </a:bodyPr>
+          <a:lstStyle/>
+          <a:p>
+            <a:pPr algn="l"/>
+            <a:r>
+              <a:rPr sz="1000" dirty="0">
                 <a:solidFill>
                   <a:srgbClr val="A855F7"/>
                 </a:solidFill>
-                <a:latin typeface="Consolas"/>
+                <a:latin typeface="Xolonium" panose="02000503000000000000" pitchFamily="2" charset="0"/>
               </a:rPr>
               <a:t>SPECS</a:t>
             </a:r>
@@ -12179,15 +12488,15 @@
         <p:spPr>
           <a:xfrm>
             <a:off x="8046720" y="3611880"/>
-            <a:ext cx="3291840" cy="2103120"/>
-          </a:xfrm>
-          <a:prstGeom prst="rect">
-            <a:avLst/>
-          </a:prstGeom>
-          <a:noFill/>
-        </p:spPr>
-        <p:txBody>
-          <a:bodyPr wrap="square" lIns="0" rIns="0" tIns="0" bIns="0">
+            <a:ext cx="3291840" cy="1400383"/>
+          </a:xfrm>
+          <a:prstGeom prst="rect">
+            <a:avLst/>
+          </a:prstGeom>
+          <a:noFill/>
+        </p:spPr>
+        <p:txBody>
+          <a:bodyPr wrap="square" lIns="0" tIns="0" rIns="0" bIns="0">
             <a:spAutoFit/>
           </a:bodyPr>
           <a:lstStyle/>
@@ -12198,11 +12507,11 @@
               </a:spcAft>
             </a:pPr>
             <a:r>
-              <a:rPr sz="1100" b="0">
+              <a:rPr sz="1100" dirty="0">
                 <a:solidFill>
                   <a:srgbClr val="FAFAFA"/>
                 </a:solidFill>
-                <a:latin typeface="Consolas"/>
+                <a:latin typeface="Xolonium" panose="02000503000000000000" pitchFamily="2" charset="0"/>
               </a:rPr>
               <a:t>SoC      BCM2835</a:t>
             </a:r>
@@ -12214,11 +12523,11 @@
               </a:spcAft>
             </a:pPr>
             <a:r>
-              <a:rPr sz="1100" b="0">
+              <a:rPr sz="1100" dirty="0">
                 <a:solidFill>
                   <a:srgbClr val="FAFAFA"/>
                 </a:solidFill>
-                <a:latin typeface="Consolas"/>
+                <a:latin typeface="Xolonium" panose="02000503000000000000" pitchFamily="2" charset="0"/>
               </a:rPr>
               <a:t>Memory   512 MB</a:t>
             </a:r>
@@ -12230,13 +12539,31 @@
               </a:spcAft>
             </a:pPr>
             <a:r>
-              <a:rPr sz="1100" b="0">
+              <a:rPr sz="1100" dirty="0">
                 <a:solidFill>
                   <a:srgbClr val="FAFAFA"/>
                 </a:solidFill>
-                <a:latin typeface="Consolas"/>
-              </a:rPr>
-              <a:t>Radio    2.4 GHz WiFi + BT</a:t>
+                <a:latin typeface="Xolonium" panose="02000503000000000000" pitchFamily="2" charset="0"/>
+              </a:rPr>
+              <a:t>Radio    2.4 GHz </a:t>
+            </a:r>
+            <a:r>
+              <a:rPr sz="1100" dirty="0" err="1">
+                <a:solidFill>
+                  <a:srgbClr val="FAFAFA"/>
+                </a:solidFill>
+                <a:latin typeface="Xolonium" panose="02000503000000000000" pitchFamily="2" charset="0"/>
+              </a:rPr>
+              <a:t>WiFi</a:t>
+            </a:r>
+            <a:r>
+              <a:rPr sz="1100" dirty="0">
+                <a:solidFill>
+                  <a:srgbClr val="FAFAFA"/>
+                </a:solidFill>
+                <a:latin typeface="Xolonium" panose="02000503000000000000" pitchFamily="2" charset="0"/>
+              </a:rPr>
+              <a:t> + BT</a:t>
             </a:r>
           </a:p>
           <a:p>
@@ -12246,11 +12573,11 @@
               </a:spcAft>
             </a:pPr>
             <a:r>
-              <a:rPr sz="1100" b="0">
+              <a:rPr sz="1100" dirty="0">
                 <a:solidFill>
                   <a:srgbClr val="FAFAFA"/>
                 </a:solidFill>
-                <a:latin typeface="Consolas"/>
+                <a:latin typeface="Xolonium" panose="02000503000000000000" pitchFamily="2" charset="0"/>
               </a:rPr>
               <a:t>Storage  microSD</a:t>
             </a:r>
@@ -12262,11 +12589,11 @@
               </a:spcAft>
             </a:pPr>
             <a:r>
-              <a:rPr sz="1100" b="0">
+              <a:rPr sz="1100" dirty="0">
                 <a:solidFill>
                   <a:srgbClr val="FAFAFA"/>
                 </a:solidFill>
-                <a:latin typeface="Consolas"/>
+                <a:latin typeface="Xolonium" panose="02000503000000000000" pitchFamily="2" charset="0"/>
               </a:rPr>
               <a:t>Stack    Magnetic 6-pin pogo</a:t>
             </a:r>
@@ -12278,11 +12605,11 @@
               </a:spcAft>
             </a:pPr>
             <a:r>
-              <a:rPr sz="1100" b="0">
+              <a:rPr sz="1100" dirty="0">
                 <a:solidFill>
                   <a:srgbClr val="FAFAFA"/>
                 </a:solidFill>
-                <a:latin typeface="Consolas"/>
+                <a:latin typeface="Xolonium" panose="02000503000000000000" pitchFamily="2" charset="0"/>
               </a:rPr>
               <a:t>Cluster  MagStack Air</a:t>
             </a:r>
@@ -12298,28 +12625,46 @@
         <p:spPr>
           <a:xfrm>
             <a:off x="640080" y="6035040"/>
-            <a:ext cx="10972800" cy="365760"/>
-          </a:xfrm>
-          <a:prstGeom prst="rect">
-            <a:avLst/>
-          </a:prstGeom>
-          <a:noFill/>
-        </p:spPr>
-        <p:txBody>
-          <a:bodyPr wrap="square" lIns="0" rIns="0" tIns="0" bIns="0" anchor="t">
-            <a:spAutoFit/>
-          </a:bodyPr>
-          <a:lstStyle/>
-          <a:p>
-            <a:pPr algn="l"/>
-            <a:r>
-              <a:rPr sz="1400" b="0" i="0">
+            <a:ext cx="10972800" cy="215444"/>
+          </a:xfrm>
+          <a:prstGeom prst="rect">
+            <a:avLst/>
+          </a:prstGeom>
+          <a:noFill/>
+        </p:spPr>
+        <p:txBody>
+          <a:bodyPr wrap="square" lIns="0" tIns="0" rIns="0" bIns="0" anchor="t">
+            <a:spAutoFit/>
+          </a:bodyPr>
+          <a:lstStyle/>
+          <a:p>
+            <a:pPr algn="l"/>
+            <a:r>
+              <a:rPr sz="1400" dirty="0">
                 <a:solidFill>
                   <a:srgbClr val="A855F7"/>
                 </a:solidFill>
-                <a:latin typeface="Consolas"/>
-              </a:rPr>
-              <a:t>Price  $79  |  Cluster Pack (4 + base) $349  |  Air Kit (ThoxAir + ThoxClip) $119</a:t>
+                <a:latin typeface="Xolonium" panose="02000503000000000000" pitchFamily="2" charset="0"/>
+              </a:rPr>
+              <a:t>Price  $79  |  Cluster Pack (4 + base) $349  |  Air Kit (</a:t>
+            </a:r>
+            <a:r>
+              <a:rPr sz="1400" dirty="0" err="1">
+                <a:solidFill>
+                  <a:srgbClr val="A855F7"/>
+                </a:solidFill>
+                <a:latin typeface="Xolonium" panose="02000503000000000000" pitchFamily="2" charset="0"/>
+              </a:rPr>
+              <a:t>ThoxAir</a:t>
+            </a:r>
+            <a:r>
+              <a:rPr sz="1400" dirty="0">
+                <a:solidFill>
+                  <a:srgbClr val="A855F7"/>
+                </a:solidFill>
+                <a:latin typeface="Xolonium" panose="02000503000000000000" pitchFamily="2" charset="0"/>
+              </a:rPr>
+              <a:t> + ThoxClip) $119</a:t>
             </a:r>
           </a:p>
         </p:txBody>
@@ -12333,26 +12678,26 @@
         <p:spPr>
           <a:xfrm>
             <a:off x="640080" y="6492240"/>
-            <a:ext cx="7315200" cy="274320"/>
-          </a:xfrm>
-          <a:prstGeom prst="rect">
-            <a:avLst/>
-          </a:prstGeom>
-          <a:noFill/>
-        </p:spPr>
-        <p:txBody>
-          <a:bodyPr wrap="square" lIns="0" rIns="0" tIns="0" bIns="0" anchor="t">
-            <a:spAutoFit/>
-          </a:bodyPr>
-          <a:lstStyle/>
-          <a:p>
-            <a:pPr algn="l"/>
-            <a:r>
-              <a:rPr sz="900" b="0" i="0">
+            <a:ext cx="7315200" cy="138499"/>
+          </a:xfrm>
+          <a:prstGeom prst="rect">
+            <a:avLst/>
+          </a:prstGeom>
+          <a:noFill/>
+        </p:spPr>
+        <p:txBody>
+          <a:bodyPr wrap="square" lIns="0" tIns="0" rIns="0" bIns="0" anchor="t">
+            <a:spAutoFit/>
+          </a:bodyPr>
+          <a:lstStyle/>
+          <a:p>
+            <a:pPr algn="l"/>
+            <a:r>
+              <a:rPr sz="900" dirty="0">
                 <a:solidFill>
                   <a:srgbClr val="475569"/>
                 </a:solidFill>
-                <a:latin typeface="Consolas"/>
+                <a:latin typeface="Xolonium" panose="02000503000000000000" pitchFamily="2" charset="0"/>
               </a:rPr>
               <a:t>THOX.ai  Your AI, on silicon you own.</a:t>
             </a:r>
@@ -12368,26 +12713,26 @@
         <p:spPr>
           <a:xfrm>
             <a:off x="10972800" y="6492240"/>
-            <a:ext cx="914400" cy="274320"/>
-          </a:xfrm>
-          <a:prstGeom prst="rect">
-            <a:avLst/>
-          </a:prstGeom>
-          <a:noFill/>
-        </p:spPr>
-        <p:txBody>
-          <a:bodyPr wrap="square" lIns="0" rIns="0" tIns="0" bIns="0" anchor="t">
+            <a:ext cx="914400" cy="138499"/>
+          </a:xfrm>
+          <a:prstGeom prst="rect">
+            <a:avLst/>
+          </a:prstGeom>
+          <a:noFill/>
+        </p:spPr>
+        <p:txBody>
+          <a:bodyPr wrap="square" lIns="0" tIns="0" rIns="0" bIns="0" anchor="t">
             <a:spAutoFit/>
           </a:bodyPr>
           <a:lstStyle/>
           <a:p>
             <a:pPr algn="r"/>
             <a:r>
-              <a:rPr sz="900" b="0" i="0">
+              <a:rPr sz="900" dirty="0">
                 <a:solidFill>
                   <a:srgbClr val="475569"/>
                 </a:solidFill>
-                <a:latin typeface="Consolas"/>
+                <a:latin typeface="Xolonium" panose="02000503000000000000" pitchFamily="2" charset="0"/>
               </a:rPr>
               <a:t>7 / 14</a:t>
             </a:r>
@@ -12403,7 +12748,7 @@
 </file>
 
 <file path=ppt/slides/slide8.xml><?xml version="1.0" encoding="utf-8"?>
-<p:sld xmlns:a="http://schemas.openxmlformats.org/drawingml/2006/main" xmlns:p="http://schemas.openxmlformats.org/presentationml/2006/main" xmlns:r="http://schemas.openxmlformats.org/officeDocument/2006/relationships">
+<p:sld xmlns:a="http://schemas.openxmlformats.org/drawingml/2006/main" xmlns:r="http://schemas.openxmlformats.org/officeDocument/2006/relationships" xmlns:p="http://schemas.openxmlformats.org/presentationml/2006/main">
   <p:cSld>
     <p:spTree>
       <p:nvGrpSpPr>
@@ -12411,7 +12756,14 @@
         <p:cNvGrpSpPr/>
         <p:nvPr/>
       </p:nvGrpSpPr>
-      <p:grpSpPr/>
+      <p:grpSpPr>
+        <a:xfrm>
+          <a:off x="0" y="0"/>
+          <a:ext cx="0" cy="0"/>
+          <a:chOff x="0" y="0"/>
+          <a:chExt cx="0" cy="0"/>
+        </a:xfrm>
+      </p:grpSpPr>
       <p:sp>
         <p:nvSpPr>
           <p:cNvPr id="2" name="Rectangle 1"/>
@@ -12452,6 +12804,7 @@
           <a:lstStyle/>
           <a:p>
             <a:pPr algn="ctr"/>
+            <a:endParaRPr/>
           </a:p>
         </p:txBody>
       </p:sp>
@@ -12495,6 +12848,7 @@
           <a:lstStyle/>
           <a:p>
             <a:pPr algn="ctr"/>
+            <a:endParaRPr/>
           </a:p>
         </p:txBody>
       </p:sp>
@@ -12507,26 +12861,26 @@
         <p:spPr>
           <a:xfrm>
             <a:off x="640080" y="502920"/>
-            <a:ext cx="7315200" cy="365760"/>
-          </a:xfrm>
-          <a:prstGeom prst="rect">
-            <a:avLst/>
-          </a:prstGeom>
-          <a:noFill/>
-        </p:spPr>
-        <p:txBody>
-          <a:bodyPr wrap="square" lIns="0" rIns="0" tIns="0" bIns="0" anchor="t">
-            <a:spAutoFit/>
-          </a:bodyPr>
-          <a:lstStyle/>
-          <a:p>
-            <a:pPr algn="l"/>
-            <a:r>
-              <a:rPr sz="1200" b="0" i="0">
+            <a:ext cx="7315200" cy="184666"/>
+          </a:xfrm>
+          <a:prstGeom prst="rect">
+            <a:avLst/>
+          </a:prstGeom>
+          <a:noFill/>
+        </p:spPr>
+        <p:txBody>
+          <a:bodyPr wrap="square" lIns="0" tIns="0" rIns="0" bIns="0" anchor="t">
+            <a:spAutoFit/>
+          </a:bodyPr>
+          <a:lstStyle/>
+          <a:p>
+            <a:pPr algn="l"/>
+            <a:r>
+              <a:rPr sz="1200" dirty="0">
                 <a:solidFill>
                   <a:srgbClr val="F59E0B"/>
                 </a:solidFill>
-                <a:latin typeface="Consolas"/>
+                <a:latin typeface="Xolonium" panose="02000503000000000000" pitchFamily="2" charset="0"/>
               </a:rPr>
               <a:t>THE DESKTOP HUB</a:t>
             </a:r>
@@ -12550,7 +12904,7 @@
           <a:noFill/>
         </p:spPr>
         <p:txBody>
-          <a:bodyPr wrap="square" lIns="0" rIns="0" tIns="0" bIns="0" anchor="t">
+          <a:bodyPr wrap="square" lIns="0" tIns="0" rIns="0" bIns="0" anchor="t">
             <a:spAutoFit/>
           </a:bodyPr>
           <a:lstStyle/>
@@ -12585,7 +12939,7 @@
           <a:noFill/>
         </p:spPr>
         <p:txBody>
-          <a:bodyPr wrap="square" lIns="0" rIns="0" tIns="0" bIns="0" anchor="t">
+          <a:bodyPr wrap="square" lIns="0" tIns="0" rIns="0" bIns="0" anchor="t">
             <a:spAutoFit/>
           </a:bodyPr>
           <a:lstStyle/>
@@ -12620,7 +12974,7 @@
           <a:noFill/>
         </p:spPr>
         <p:txBody>
-          <a:bodyPr wrap="square" lIns="0" rIns="0" tIns="0" bIns="0">
+          <a:bodyPr wrap="square" lIns="0" tIns="0" rIns="0" bIns="0">
             <a:spAutoFit/>
           </a:bodyPr>
           <a:lstStyle/>
@@ -12734,6 +13088,7 @@
           <a:lstStyle/>
           <a:p>
             <a:pPr algn="ctr"/>
+            <a:endParaRPr/>
           </a:p>
         </p:txBody>
       </p:sp>
@@ -12746,26 +13101,26 @@
         <p:spPr>
           <a:xfrm>
             <a:off x="8046720" y="3246120"/>
-            <a:ext cx="3291840" cy="365760"/>
-          </a:xfrm>
-          <a:prstGeom prst="rect">
-            <a:avLst/>
-          </a:prstGeom>
-          <a:noFill/>
-        </p:spPr>
-        <p:txBody>
-          <a:bodyPr wrap="square" lIns="0" rIns="0" tIns="0" bIns="0" anchor="t">
-            <a:spAutoFit/>
-          </a:bodyPr>
-          <a:lstStyle/>
-          <a:p>
-            <a:pPr algn="l"/>
-            <a:r>
-              <a:rPr sz="1000" b="0" i="0">
+            <a:ext cx="3291840" cy="153888"/>
+          </a:xfrm>
+          <a:prstGeom prst="rect">
+            <a:avLst/>
+          </a:prstGeom>
+          <a:noFill/>
+        </p:spPr>
+        <p:txBody>
+          <a:bodyPr wrap="square" lIns="0" tIns="0" rIns="0" bIns="0" anchor="t">
+            <a:spAutoFit/>
+          </a:bodyPr>
+          <a:lstStyle/>
+          <a:p>
+            <a:pPr algn="l"/>
+            <a:r>
+              <a:rPr sz="1000" dirty="0">
                 <a:solidFill>
                   <a:srgbClr val="F59E0B"/>
                 </a:solidFill>
-                <a:latin typeface="Consolas"/>
+                <a:latin typeface="Xolonium" panose="02000503000000000000" pitchFamily="2" charset="0"/>
               </a:rPr>
               <a:t>SPECS</a:t>
             </a:r>
@@ -12781,15 +13136,15 @@
         <p:spPr>
           <a:xfrm>
             <a:off x="8046720" y="3611880"/>
-            <a:ext cx="3291840" cy="2103120"/>
-          </a:xfrm>
-          <a:prstGeom prst="rect">
-            <a:avLst/>
-          </a:prstGeom>
-          <a:noFill/>
-        </p:spPr>
-        <p:txBody>
-          <a:bodyPr wrap="square" lIns="0" rIns="0" tIns="0" bIns="0">
+            <a:ext cx="3291840" cy="1400383"/>
+          </a:xfrm>
+          <a:prstGeom prst="rect">
+            <a:avLst/>
+          </a:prstGeom>
+          <a:noFill/>
+        </p:spPr>
+        <p:txBody>
+          <a:bodyPr wrap="square" lIns="0" tIns="0" rIns="0" bIns="0">
             <a:spAutoFit/>
           </a:bodyPr>
           <a:lstStyle/>
@@ -12800,11 +13155,11 @@
               </a:spcAft>
             </a:pPr>
             <a:r>
-              <a:rPr sz="1100" b="0">
+              <a:rPr sz="1100" dirty="0">
                 <a:solidFill>
                   <a:srgbClr val="FAFAFA"/>
                 </a:solidFill>
-                <a:latin typeface="Consolas"/>
+                <a:latin typeface="Xolonium" panose="02000503000000000000" pitchFamily="2" charset="0"/>
               </a:rPr>
               <a:t>CPU      Intel N100 4C / 4T</a:t>
             </a:r>
@@ -12816,11 +13171,11 @@
               </a:spcAft>
             </a:pPr>
             <a:r>
-              <a:rPr sz="1100" b="0">
+              <a:rPr sz="1100" dirty="0">
                 <a:solidFill>
                   <a:srgbClr val="FAFAFA"/>
                 </a:solidFill>
-                <a:latin typeface="Consolas"/>
+                <a:latin typeface="Xolonium" panose="02000503000000000000" pitchFamily="2" charset="0"/>
               </a:rPr>
               <a:t>Memory   16 GB DDR5</a:t>
             </a:r>
@@ -12832,11 +13187,11 @@
               </a:spcAft>
             </a:pPr>
             <a:r>
-              <a:rPr sz="1100" b="0">
+              <a:rPr sz="1100" dirty="0">
                 <a:solidFill>
                   <a:srgbClr val="FAFAFA"/>
                 </a:solidFill>
-                <a:latin typeface="Consolas"/>
+                <a:latin typeface="Xolonium" panose="02000503000000000000" pitchFamily="2" charset="0"/>
               </a:rPr>
               <a:t>Storage  256 GB NVMe</a:t>
             </a:r>
@@ -12848,13 +13203,31 @@
               </a:spcAft>
             </a:pPr>
             <a:r>
-              <a:rPr sz="1100" b="0">
+              <a:rPr sz="1100" dirty="0">
                 <a:solidFill>
                   <a:srgbClr val="FAFAFA"/>
                 </a:solidFill>
-                <a:latin typeface="Consolas"/>
-              </a:rPr>
-              <a:t>Network  Ethernet, WiFi 6, BT 5.3</a:t>
+                <a:latin typeface="Xolonium" panose="02000503000000000000" pitchFamily="2" charset="0"/>
+              </a:rPr>
+              <a:t>Network  Ethernet, </a:t>
+            </a:r>
+            <a:r>
+              <a:rPr sz="1100" dirty="0" err="1">
+                <a:solidFill>
+                  <a:srgbClr val="FAFAFA"/>
+                </a:solidFill>
+                <a:latin typeface="Xolonium" panose="02000503000000000000" pitchFamily="2" charset="0"/>
+              </a:rPr>
+              <a:t>WiFi</a:t>
+            </a:r>
+            <a:r>
+              <a:rPr sz="1100" dirty="0">
+                <a:solidFill>
+                  <a:srgbClr val="FAFAFA"/>
+                </a:solidFill>
+                <a:latin typeface="Xolonium" panose="02000503000000000000" pitchFamily="2" charset="0"/>
+              </a:rPr>
+              <a:t> 6, BT 5.3</a:t>
             </a:r>
           </a:p>
           <a:p>
@@ -12864,11 +13237,11 @@
               </a:spcAft>
             </a:pPr>
             <a:r>
-              <a:rPr sz="1100" b="0">
+              <a:rPr sz="1100" dirty="0">
                 <a:solidFill>
                   <a:srgbClr val="FAFAFA"/>
                 </a:solidFill>
-                <a:latin typeface="Consolas"/>
+                <a:latin typeface="Xolonium" panose="02000503000000000000" pitchFamily="2" charset="0"/>
               </a:rPr>
               <a:t>I/O      USB-C, USB-A, HDMI</a:t>
             </a:r>
@@ -12880,11 +13253,11 @@
               </a:spcAft>
             </a:pPr>
             <a:r>
-              <a:rPr sz="1100" b="0">
+              <a:rPr sz="1100" dirty="0">
                 <a:solidFill>
                   <a:srgbClr val="FAFAFA"/>
                 </a:solidFill>
-                <a:latin typeface="Consolas"/>
+                <a:latin typeface="Xolonium" panose="02000503000000000000" pitchFamily="2" charset="0"/>
               </a:rPr>
               <a:t>Power    12 V DC, passive</a:t>
             </a:r>
@@ -12900,26 +13273,26 @@
         <p:spPr>
           <a:xfrm>
             <a:off x="640080" y="6035040"/>
-            <a:ext cx="10972800" cy="365760"/>
-          </a:xfrm>
-          <a:prstGeom prst="rect">
-            <a:avLst/>
-          </a:prstGeom>
-          <a:noFill/>
-        </p:spPr>
-        <p:txBody>
-          <a:bodyPr wrap="square" lIns="0" rIns="0" tIns="0" bIns="0" anchor="t">
-            <a:spAutoFit/>
-          </a:bodyPr>
-          <a:lstStyle/>
-          <a:p>
-            <a:pPr algn="l"/>
-            <a:r>
-              <a:rPr sz="1400" b="0" i="0">
+            <a:ext cx="10972800" cy="215444"/>
+          </a:xfrm>
+          <a:prstGeom prst="rect">
+            <a:avLst/>
+          </a:prstGeom>
+          <a:noFill/>
+        </p:spPr>
+        <p:txBody>
+          <a:bodyPr wrap="square" lIns="0" tIns="0" rIns="0" bIns="0" anchor="t">
+            <a:spAutoFit/>
+          </a:bodyPr>
+          <a:lstStyle/>
+          <a:p>
+            <a:pPr algn="l"/>
+            <a:r>
+              <a:rPr sz="1400" dirty="0">
                 <a:solidFill>
                   <a:srgbClr val="F59E0B"/>
                 </a:solidFill>
-                <a:latin typeface="Consolas"/>
+                <a:latin typeface="Xolonium" panose="02000503000000000000" pitchFamily="2" charset="0"/>
               </a:rPr>
               <a:t>Price  $499  |  Family Bundle (Nova + Mini + Air + Clip) $599</a:t>
             </a:r>
@@ -12935,26 +13308,26 @@
         <p:spPr>
           <a:xfrm>
             <a:off x="640080" y="6492240"/>
-            <a:ext cx="7315200" cy="274320"/>
-          </a:xfrm>
-          <a:prstGeom prst="rect">
-            <a:avLst/>
-          </a:prstGeom>
-          <a:noFill/>
-        </p:spPr>
-        <p:txBody>
-          <a:bodyPr wrap="square" lIns="0" rIns="0" tIns="0" bIns="0" anchor="t">
-            <a:spAutoFit/>
-          </a:bodyPr>
-          <a:lstStyle/>
-          <a:p>
-            <a:pPr algn="l"/>
-            <a:r>
-              <a:rPr sz="900" b="0" i="0">
+            <a:ext cx="7315200" cy="138499"/>
+          </a:xfrm>
+          <a:prstGeom prst="rect">
+            <a:avLst/>
+          </a:prstGeom>
+          <a:noFill/>
+        </p:spPr>
+        <p:txBody>
+          <a:bodyPr wrap="square" lIns="0" tIns="0" rIns="0" bIns="0" anchor="t">
+            <a:spAutoFit/>
+          </a:bodyPr>
+          <a:lstStyle/>
+          <a:p>
+            <a:pPr algn="l"/>
+            <a:r>
+              <a:rPr sz="900" dirty="0">
                 <a:solidFill>
                   <a:srgbClr val="475569"/>
                 </a:solidFill>
-                <a:latin typeface="Consolas"/>
+                <a:latin typeface="Xolonium" panose="02000503000000000000" pitchFamily="2" charset="0"/>
               </a:rPr>
               <a:t>THOX.ai  Your AI, on silicon you own.</a:t>
             </a:r>
@@ -12970,26 +13343,26 @@
         <p:spPr>
           <a:xfrm>
             <a:off x="10972800" y="6492240"/>
-            <a:ext cx="914400" cy="274320"/>
-          </a:xfrm>
-          <a:prstGeom prst="rect">
-            <a:avLst/>
-          </a:prstGeom>
-          <a:noFill/>
-        </p:spPr>
-        <p:txBody>
-          <a:bodyPr wrap="square" lIns="0" rIns="0" tIns="0" bIns="0" anchor="t">
+            <a:ext cx="914400" cy="138499"/>
+          </a:xfrm>
+          <a:prstGeom prst="rect">
+            <a:avLst/>
+          </a:prstGeom>
+          <a:noFill/>
+        </p:spPr>
+        <p:txBody>
+          <a:bodyPr wrap="square" lIns="0" tIns="0" rIns="0" bIns="0" anchor="t">
             <a:spAutoFit/>
           </a:bodyPr>
           <a:lstStyle/>
           <a:p>
             <a:pPr algn="r"/>
             <a:r>
-              <a:rPr sz="900" b="0" i="0">
+              <a:rPr sz="900" dirty="0">
                 <a:solidFill>
                   <a:srgbClr val="475569"/>
                 </a:solidFill>
-                <a:latin typeface="Consolas"/>
+                <a:latin typeface="Xolonium" panose="02000503000000000000" pitchFamily="2" charset="0"/>
               </a:rPr>
               <a:t>8 / 14</a:t>
             </a:r>
@@ -13005,7 +13378,7 @@
 </file>
 
 <file path=ppt/slides/slide9.xml><?xml version="1.0" encoding="utf-8"?>
-<p:sld xmlns:a="http://schemas.openxmlformats.org/drawingml/2006/main" xmlns:p="http://schemas.openxmlformats.org/presentationml/2006/main" xmlns:r="http://schemas.openxmlformats.org/officeDocument/2006/relationships">
+<p:sld xmlns:a="http://schemas.openxmlformats.org/drawingml/2006/main" xmlns:r="http://schemas.openxmlformats.org/officeDocument/2006/relationships" xmlns:p="http://schemas.openxmlformats.org/presentationml/2006/main">
   <p:cSld>
     <p:spTree>
       <p:nvGrpSpPr>
@@ -13013,7 +13386,14 @@
         <p:cNvGrpSpPr/>
         <p:nvPr/>
       </p:nvGrpSpPr>
-      <p:grpSpPr/>
+      <p:grpSpPr>
+        <a:xfrm>
+          <a:off x="0" y="0"/>
+          <a:ext cx="0" cy="0"/>
+          <a:chOff x="0" y="0"/>
+          <a:chExt cx="0" cy="0"/>
+        </a:xfrm>
+      </p:grpSpPr>
       <p:sp>
         <p:nvSpPr>
           <p:cNvPr id="2" name="Rectangle 1"/>
@@ -13054,6 +13434,7 @@
           <a:lstStyle/>
           <a:p>
             <a:pPr algn="ctr"/>
+            <a:endParaRPr/>
           </a:p>
         </p:txBody>
       </p:sp>
@@ -13097,6 +13478,7 @@
           <a:lstStyle/>
           <a:p>
             <a:pPr algn="ctr"/>
+            <a:endParaRPr/>
           </a:p>
         </p:txBody>
       </p:sp>
@@ -13109,26 +13491,26 @@
         <p:spPr>
           <a:xfrm>
             <a:off x="640080" y="502920"/>
-            <a:ext cx="7315200" cy="365760"/>
-          </a:xfrm>
-          <a:prstGeom prst="rect">
-            <a:avLst/>
-          </a:prstGeom>
-          <a:noFill/>
-        </p:spPr>
-        <p:txBody>
-          <a:bodyPr wrap="square" lIns="0" rIns="0" tIns="0" bIns="0" anchor="t">
-            <a:spAutoFit/>
-          </a:bodyPr>
-          <a:lstStyle/>
-          <a:p>
-            <a:pPr algn="l"/>
-            <a:r>
-              <a:rPr sz="1200" b="0" i="0">
+            <a:ext cx="7315200" cy="184666"/>
+          </a:xfrm>
+          <a:prstGeom prst="rect">
+            <a:avLst/>
+          </a:prstGeom>
+          <a:noFill/>
+        </p:spPr>
+        <p:txBody>
+          <a:bodyPr wrap="square" lIns="0" tIns="0" rIns="0" bIns="0" anchor="t">
+            <a:spAutoFit/>
+          </a:bodyPr>
+          <a:lstStyle/>
+          <a:p>
+            <a:pPr algn="l"/>
+            <a:r>
+              <a:rPr sz="1200" dirty="0">
                 <a:solidFill>
                   <a:srgbClr val="10B981"/>
                 </a:solidFill>
-                <a:latin typeface="Consolas"/>
+                <a:latin typeface="Xolonium" panose="02000503000000000000" pitchFamily="2" charset="0"/>
               </a:rPr>
               <a:t>TOPOLOGY</a:t>
             </a:r>
@@ -13152,7 +13534,7 @@
           <a:noFill/>
         </p:spPr>
         <p:txBody>
-          <a:bodyPr wrap="square" lIns="0" rIns="0" tIns="0" bIns="0" anchor="t">
+          <a:bodyPr wrap="square" lIns="0" tIns="0" rIns="0" bIns="0" anchor="t">
             <a:spAutoFit/>
           </a:bodyPr>
           <a:lstStyle/>
@@ -13214,6 +13596,7 @@
           <a:lstStyle/>
           <a:p>
             <a:pPr algn="ctr"/>
+            <a:endParaRPr/>
           </a:p>
         </p:txBody>
       </p:sp>
@@ -13234,7 +13617,7 @@
           <a:noFill/>
         </p:spPr>
         <p:txBody>
-          <a:bodyPr wrap="square" lIns="0" rIns="0" tIns="0" bIns="0" anchor="t">
+          <a:bodyPr wrap="square" lIns="0" tIns="0" rIns="0" bIns="0" anchor="t">
             <a:spAutoFit/>
           </a:bodyPr>
           <a:lstStyle/>
@@ -13261,26 +13644,26 @@
         <p:spPr>
           <a:xfrm>
             <a:off x="960120" y="3063240"/>
-            <a:ext cx="1737360" cy="457200"/>
-          </a:xfrm>
-          <a:prstGeom prst="rect">
-            <a:avLst/>
-          </a:prstGeom>
-          <a:noFill/>
-        </p:spPr>
-        <p:txBody>
-          <a:bodyPr wrap="square" lIns="0" rIns="0" tIns="0" bIns="0" anchor="t">
-            <a:spAutoFit/>
-          </a:bodyPr>
-          <a:lstStyle/>
-          <a:p>
-            <a:pPr algn="l"/>
-            <a:r>
-              <a:rPr sz="900" b="0" i="0">
+            <a:ext cx="1737360" cy="138499"/>
+          </a:xfrm>
+          <a:prstGeom prst="rect">
+            <a:avLst/>
+          </a:prstGeom>
+          <a:noFill/>
+        </p:spPr>
+        <p:txBody>
+          <a:bodyPr wrap="square" lIns="0" tIns="0" rIns="0" bIns="0" anchor="t">
+            <a:spAutoFit/>
+          </a:bodyPr>
+          <a:lstStyle/>
+          <a:p>
+            <a:pPr algn="l"/>
+            <a:r>
+              <a:rPr sz="900" dirty="0">
                 <a:solidFill>
                   <a:srgbClr val="10B981"/>
                 </a:solidFill>
-                <a:latin typeface="Consolas"/>
+                <a:latin typeface="Xolonium" panose="02000503000000000000" pitchFamily="2" charset="0"/>
               </a:rPr>
               <a:t>BLE 5.3</a:t>
             </a:r>
@@ -13331,6 +13714,7 @@
           <a:lstStyle/>
           <a:p>
             <a:pPr algn="ctr"/>
+            <a:endParaRPr/>
           </a:p>
         </p:txBody>
       </p:sp>
@@ -13351,7 +13735,7 @@
           <a:noFill/>
         </p:spPr>
         <p:txBody>
-          <a:bodyPr wrap="square" lIns="0" rIns="0" tIns="0" bIns="0" anchor="t">
+          <a:bodyPr wrap="square" lIns="0" tIns="0" rIns="0" bIns="0" anchor="t">
             <a:spAutoFit/>
           </a:bodyPr>
           <a:lstStyle/>
@@ -13378,29 +13762,44 @@
         <p:spPr>
           <a:xfrm>
             <a:off x="3794760" y="2057400"/>
-            <a:ext cx="2103120" cy="457200"/>
-          </a:xfrm>
-          <a:prstGeom prst="rect">
-            <a:avLst/>
-          </a:prstGeom>
-          <a:noFill/>
-        </p:spPr>
-        <p:txBody>
-          <a:bodyPr wrap="square" lIns="0" rIns="0" tIns="0" bIns="0" anchor="t">
-            <a:spAutoFit/>
-          </a:bodyPr>
-          <a:lstStyle/>
-          <a:p>
-            <a:pPr algn="l"/>
-            <a:r>
-              <a:rPr sz="900" b="0" i="0">
+            <a:ext cx="2103120" cy="138499"/>
+          </a:xfrm>
+          <a:prstGeom prst="rect">
+            <a:avLst/>
+          </a:prstGeom>
+          <a:noFill/>
+        </p:spPr>
+        <p:txBody>
+          <a:bodyPr wrap="square" lIns="0" tIns="0" rIns="0" bIns="0" anchor="t">
+            <a:spAutoFit/>
+          </a:bodyPr>
+          <a:lstStyle/>
+          <a:p>
+            <a:pPr algn="l"/>
+            <a:r>
+              <a:rPr sz="900" dirty="0">
                 <a:solidFill>
                   <a:srgbClr val="34D399"/>
                 </a:solidFill>
-                <a:latin typeface="Consolas"/>
-              </a:rPr>
-              <a:t>USB / WiFi</a:t>
-            </a:r>
+                <a:latin typeface="Xolonium" panose="02000503000000000000" pitchFamily="2" charset="0"/>
+              </a:rPr>
+              <a:t>USB / </a:t>
+            </a:r>
+            <a:r>
+              <a:rPr sz="900" dirty="0" err="1">
+                <a:solidFill>
+                  <a:srgbClr val="34D399"/>
+                </a:solidFill>
+                <a:latin typeface="Xolonium" panose="02000503000000000000" pitchFamily="2" charset="0"/>
+              </a:rPr>
+              <a:t>WiFi</a:t>
+            </a:r>
+            <a:endParaRPr sz="900" dirty="0">
+              <a:solidFill>
+                <a:srgbClr val="34D399"/>
+              </a:solidFill>
+              <a:latin typeface="Xolonium" panose="02000503000000000000" pitchFamily="2" charset="0"/>
+            </a:endParaRPr>
           </a:p>
         </p:txBody>
       </p:sp>
@@ -13448,6 +13847,7 @@
           <a:lstStyle/>
           <a:p>
             <a:pPr algn="ctr"/>
+            <a:endParaRPr/>
           </a:p>
         </p:txBody>
       </p:sp>
@@ -13468,7 +13868,7 @@
           <a:noFill/>
         </p:spPr>
         <p:txBody>
-          <a:bodyPr wrap="square" lIns="0" rIns="0" tIns="0" bIns="0" anchor="t">
+          <a:bodyPr wrap="square" lIns="0" tIns="0" rIns="0" bIns="0" anchor="t">
             <a:spAutoFit/>
           </a:bodyPr>
           <a:lstStyle/>
@@ -13495,29 +13895,44 @@
         <p:spPr>
           <a:xfrm>
             <a:off x="3794760" y="4343400"/>
-            <a:ext cx="2103120" cy="457200"/>
-          </a:xfrm>
-          <a:prstGeom prst="rect">
-            <a:avLst/>
-          </a:prstGeom>
-          <a:noFill/>
-        </p:spPr>
-        <p:txBody>
-          <a:bodyPr wrap="square" lIns="0" rIns="0" tIns="0" bIns="0" anchor="t">
-            <a:spAutoFit/>
-          </a:bodyPr>
-          <a:lstStyle/>
-          <a:p>
-            <a:pPr algn="l"/>
-            <a:r>
-              <a:rPr sz="900" b="0" i="0">
+            <a:ext cx="2103120" cy="138499"/>
+          </a:xfrm>
+          <a:prstGeom prst="rect">
+            <a:avLst/>
+          </a:prstGeom>
+          <a:noFill/>
+        </p:spPr>
+        <p:txBody>
+          <a:bodyPr wrap="square" lIns="0" tIns="0" rIns="0" bIns="0" anchor="t">
+            <a:spAutoFit/>
+          </a:bodyPr>
+          <a:lstStyle/>
+          <a:p>
+            <a:pPr algn="l"/>
+            <a:r>
+              <a:rPr sz="900" dirty="0">
                 <a:solidFill>
                   <a:srgbClr val="A855F7"/>
                 </a:solidFill>
-                <a:latin typeface="Consolas"/>
-              </a:rPr>
-              <a:t>MagStack Air WiFi</a:t>
-            </a:r>
+                <a:latin typeface="Xolonium" panose="02000503000000000000" pitchFamily="2" charset="0"/>
+              </a:rPr>
+              <a:t>MagStack Air </a:t>
+            </a:r>
+            <a:r>
+              <a:rPr sz="900" dirty="0" err="1">
+                <a:solidFill>
+                  <a:srgbClr val="A855F7"/>
+                </a:solidFill>
+                <a:latin typeface="Xolonium" panose="02000503000000000000" pitchFamily="2" charset="0"/>
+              </a:rPr>
+              <a:t>WiFi</a:t>
+            </a:r>
+            <a:endParaRPr sz="900" dirty="0">
+              <a:solidFill>
+                <a:srgbClr val="A855F7"/>
+              </a:solidFill>
+              <a:latin typeface="Xolonium" panose="02000503000000000000" pitchFamily="2" charset="0"/>
+            </a:endParaRPr>
           </a:p>
         </p:txBody>
       </p:sp>
@@ -13565,6 +13980,7 @@
           <a:lstStyle/>
           <a:p>
             <a:pPr algn="ctr"/>
+            <a:endParaRPr/>
           </a:p>
         </p:txBody>
       </p:sp>
@@ -13585,7 +14001,7 @@
           <a:noFill/>
         </p:spPr>
         <p:txBody>
-          <a:bodyPr wrap="square" lIns="0" rIns="0" tIns="0" bIns="0" anchor="t">
+          <a:bodyPr wrap="square" lIns="0" tIns="0" rIns="0" bIns="0" anchor="t">
             <a:spAutoFit/>
           </a:bodyPr>
           <a:lstStyle/>
@@ -13612,26 +14028,26 @@
         <p:spPr>
           <a:xfrm>
             <a:off x="7086600" y="3063240"/>
-            <a:ext cx="2286000" cy="457200"/>
-          </a:xfrm>
-          <a:prstGeom prst="rect">
-            <a:avLst/>
-          </a:prstGeom>
-          <a:noFill/>
-        </p:spPr>
-        <p:txBody>
-          <a:bodyPr wrap="square" lIns="0" rIns="0" tIns="0" bIns="0" anchor="t">
-            <a:spAutoFit/>
-          </a:bodyPr>
-          <a:lstStyle/>
-          <a:p>
-            <a:pPr algn="l"/>
-            <a:r>
-              <a:rPr sz="900" b="0" i="0">
+            <a:ext cx="2286000" cy="138499"/>
+          </a:xfrm>
+          <a:prstGeom prst="rect">
+            <a:avLst/>
+          </a:prstGeom>
+          <a:noFill/>
+        </p:spPr>
+        <p:txBody>
+          <a:bodyPr wrap="square" lIns="0" tIns="0" rIns="0" bIns="0" anchor="t">
+            <a:spAutoFit/>
+          </a:bodyPr>
+          <a:lstStyle/>
+          <a:p>
+            <a:pPr algn="l"/>
+            <a:r>
+              <a:rPr sz="900" dirty="0">
                 <a:solidFill>
                   <a:srgbClr val="F59E0B"/>
                 </a:solidFill>
-                <a:latin typeface="Consolas"/>
+                <a:latin typeface="Xolonium" panose="02000503000000000000" pitchFamily="2" charset="0"/>
               </a:rPr>
               <a:t>LLM host / dashboard</a:t>
             </a:r>
@@ -13682,6 +14098,7 @@
           <a:lstStyle/>
           <a:p>
             <a:pPr algn="ctr"/>
+            <a:endParaRPr/>
           </a:p>
         </p:txBody>
       </p:sp>
@@ -13702,7 +14119,7 @@
           <a:noFill/>
         </p:spPr>
         <p:txBody>
-          <a:bodyPr wrap="square" lIns="0" rIns="0" tIns="0" bIns="0" anchor="t">
+          <a:bodyPr wrap="square" lIns="0" tIns="0" rIns="0" bIns="0" anchor="t">
             <a:spAutoFit/>
           </a:bodyPr>
           <a:lstStyle/>
@@ -13729,26 +14146,26 @@
         <p:spPr>
           <a:xfrm>
             <a:off x="10195560" y="3063240"/>
-            <a:ext cx="1554480" cy="457200"/>
-          </a:xfrm>
-          <a:prstGeom prst="rect">
-            <a:avLst/>
-          </a:prstGeom>
-          <a:noFill/>
-        </p:spPr>
-        <p:txBody>
-          <a:bodyPr wrap="square" lIns="0" rIns="0" tIns="0" bIns="0" anchor="t">
-            <a:spAutoFit/>
-          </a:bodyPr>
-          <a:lstStyle/>
-          <a:p>
-            <a:pPr algn="l"/>
-            <a:r>
-              <a:rPr sz="900" b="0" i="0">
+            <a:ext cx="1554480" cy="138499"/>
+          </a:xfrm>
+          <a:prstGeom prst="rect">
+            <a:avLst/>
+          </a:prstGeom>
+          <a:noFill/>
+        </p:spPr>
+        <p:txBody>
+          <a:bodyPr wrap="square" lIns="0" tIns="0" rIns="0" bIns="0" anchor="t">
+            <a:spAutoFit/>
+          </a:bodyPr>
+          <a:lstStyle/>
+          <a:p>
+            <a:pPr algn="l"/>
+            <a:r>
+              <a:rPr sz="900" dirty="0">
                 <a:solidFill>
                   <a:srgbClr val="94A3B8"/>
                 </a:solidFill>
-                <a:latin typeface="Consolas"/>
+                <a:latin typeface="Xolonium" panose="02000503000000000000" pitchFamily="2" charset="0"/>
               </a:rPr>
               <a:t>optional, your terms</a:t>
             </a:r>
@@ -13939,28 +14356,46 @@
         <p:spPr>
           <a:xfrm>
             <a:off x="640080" y="5852160"/>
-            <a:ext cx="10972800" cy="365760"/>
-          </a:xfrm>
-          <a:prstGeom prst="rect">
-            <a:avLst/>
-          </a:prstGeom>
-          <a:noFill/>
-        </p:spPr>
-        <p:txBody>
-          <a:bodyPr wrap="square" lIns="0" rIns="0" tIns="0" bIns="0" anchor="t">
-            <a:spAutoFit/>
-          </a:bodyPr>
-          <a:lstStyle/>
-          <a:p>
-            <a:pPr algn="l"/>
-            <a:r>
-              <a:rPr sz="1300" b="0" i="0">
+            <a:ext cx="10972800" cy="200055"/>
+          </a:xfrm>
+          <a:prstGeom prst="rect">
+            <a:avLst/>
+          </a:prstGeom>
+          <a:noFill/>
+        </p:spPr>
+        <p:txBody>
+          <a:bodyPr wrap="square" lIns="0" tIns="0" rIns="0" bIns="0" anchor="t">
+            <a:spAutoFit/>
+          </a:bodyPr>
+          <a:lstStyle/>
+          <a:p>
+            <a:pPr algn="l"/>
+            <a:r>
+              <a:rPr sz="1300" dirty="0">
                 <a:solidFill>
                   <a:srgbClr val="94A3B8"/>
                 </a:solidFill>
-                <a:latin typeface="Consolas"/>
-              </a:rPr>
-              <a:t>ThoxClip listens.  ThoxMini and ThoxAir route.  ThoxNova hosts.  Cloud is optional and on your terms.</a:t>
+                <a:latin typeface="Xolonium" panose="02000503000000000000" pitchFamily="2" charset="0"/>
+              </a:rPr>
+              <a:t>ThoxClip listens.  ThoxMini and </a:t>
+            </a:r>
+            <a:r>
+              <a:rPr sz="1300" dirty="0" err="1">
+                <a:solidFill>
+                  <a:srgbClr val="94A3B8"/>
+                </a:solidFill>
+                <a:latin typeface="Xolonium" panose="02000503000000000000" pitchFamily="2" charset="0"/>
+              </a:rPr>
+              <a:t>ThoxAir</a:t>
+            </a:r>
+            <a:r>
+              <a:rPr sz="1300" dirty="0">
+                <a:solidFill>
+                  <a:srgbClr val="94A3B8"/>
+                </a:solidFill>
+                <a:latin typeface="Xolonium" panose="02000503000000000000" pitchFamily="2" charset="0"/>
+              </a:rPr>
+              <a:t> route.  ThoxNova hosts.  Cloud is optional and on your terms.</a:t>
             </a:r>
           </a:p>
         </p:txBody>
@@ -13974,26 +14409,26 @@
         <p:spPr>
           <a:xfrm>
             <a:off x="640080" y="6492240"/>
-            <a:ext cx="7315200" cy="274320"/>
-          </a:xfrm>
-          <a:prstGeom prst="rect">
-            <a:avLst/>
-          </a:prstGeom>
-          <a:noFill/>
-        </p:spPr>
-        <p:txBody>
-          <a:bodyPr wrap="square" lIns="0" rIns="0" tIns="0" bIns="0" anchor="t">
-            <a:spAutoFit/>
-          </a:bodyPr>
-          <a:lstStyle/>
-          <a:p>
-            <a:pPr algn="l"/>
-            <a:r>
-              <a:rPr sz="900" b="0" i="0">
+            <a:ext cx="7315200" cy="138499"/>
+          </a:xfrm>
+          <a:prstGeom prst="rect">
+            <a:avLst/>
+          </a:prstGeom>
+          <a:noFill/>
+        </p:spPr>
+        <p:txBody>
+          <a:bodyPr wrap="square" lIns="0" tIns="0" rIns="0" bIns="0" anchor="t">
+            <a:spAutoFit/>
+          </a:bodyPr>
+          <a:lstStyle/>
+          <a:p>
+            <a:pPr algn="l"/>
+            <a:r>
+              <a:rPr sz="900" dirty="0">
                 <a:solidFill>
                   <a:srgbClr val="475569"/>
                 </a:solidFill>
-                <a:latin typeface="Consolas"/>
+                <a:latin typeface="Xolonium" panose="02000503000000000000" pitchFamily="2" charset="0"/>
               </a:rPr>
               <a:t>THOX.ai  Your AI, on silicon you own.</a:t>
             </a:r>
@@ -14009,26 +14444,26 @@
         <p:spPr>
           <a:xfrm>
             <a:off x="10972800" y="6492240"/>
-            <a:ext cx="914400" cy="274320"/>
-          </a:xfrm>
-          <a:prstGeom prst="rect">
-            <a:avLst/>
-          </a:prstGeom>
-          <a:noFill/>
-        </p:spPr>
-        <p:txBody>
-          <a:bodyPr wrap="square" lIns="0" rIns="0" tIns="0" bIns="0" anchor="t">
+            <a:ext cx="914400" cy="138499"/>
+          </a:xfrm>
+          <a:prstGeom prst="rect">
+            <a:avLst/>
+          </a:prstGeom>
+          <a:noFill/>
+        </p:spPr>
+        <p:txBody>
+          <a:bodyPr wrap="square" lIns="0" tIns="0" rIns="0" bIns="0" anchor="t">
             <a:spAutoFit/>
           </a:bodyPr>
           <a:lstStyle/>
           <a:p>
             <a:pPr algn="r"/>
             <a:r>
-              <a:rPr sz="900" b="0" i="0">
+              <a:rPr sz="900" dirty="0">
                 <a:solidFill>
                   <a:srgbClr val="475569"/>
                 </a:solidFill>
-                <a:latin typeface="Consolas"/>
+                <a:latin typeface="Xolonium" panose="02000503000000000000" pitchFamily="2" charset="0"/>
               </a:rPr>
               <a:t>9 / 14</a:t>
             </a:r>

--- a/deliverables/THOX_Kickstarter_Deck.pptx
+++ b/deliverables/THOX_Kickstarter_Deck.pptx
@@ -3300,7 +3300,7 @@
                 </a:solidFill>
                 <a:latin typeface="Arial"/>
               </a:rPr>
-              <a:t>Your AI, on silicon you own.</a:t>
+              <a:t>Your AI. Your Data. Your Rules.</a:t>
             </a:r>
           </a:p>
         </p:txBody>
@@ -3567,7 +3567,7 @@
                 </a:solidFill>
                 <a:latin typeface="Xolonium" panose="02000503000000000000" pitchFamily="2" charset="0"/>
               </a:rPr>
-              <a:t>THOX.ai  Your AI, on silicon you own.</a:t>
+              <a:t>THOX.ai  Your AI. Your Data. Your Rules.</a:t>
             </a:r>
           </a:p>
         </p:txBody>
@@ -4282,7 +4282,7 @@
                 </a:solidFill>
                 <a:latin typeface="Xolonium" panose="02000503000000000000" pitchFamily="2" charset="0"/>
               </a:rPr>
-              <a:t>THOX.ai  Your AI, on silicon you own.</a:t>
+              <a:t>THOX.ai  Your AI. Your Data. Your Rules.</a:t>
             </a:r>
           </a:p>
         </p:txBody>
@@ -6025,7 +6025,7 @@
                 </a:solidFill>
                 <a:latin typeface="Xolonium" panose="02000503000000000000" pitchFamily="2" charset="0"/>
               </a:rPr>
-              <a:t>THOX.ai  Your AI, on silicon you own.</a:t>
+              <a:t>THOX.ai  Your AI. Your Data. Your Rules.</a:t>
             </a:r>
           </a:p>
         </p:txBody>
@@ -6962,7 +6962,7 @@
                 </a:solidFill>
                 <a:latin typeface="Xolonium" panose="02000503000000000000" pitchFamily="2" charset="0"/>
               </a:rPr>
-              <a:t>THOX.ai  Your AI, on silicon you own.</a:t>
+              <a:t>THOX.ai  Your AI. Your Data. Your Rules.</a:t>
             </a:r>
           </a:p>
         </p:txBody>
@@ -7875,7 +7875,7 @@
                 </a:solidFill>
                 <a:latin typeface="Xolonium" panose="02000503000000000000" pitchFamily="2" charset="0"/>
               </a:rPr>
-              <a:t>THOX.ai  Your AI, on silicon you own.</a:t>
+              <a:t>THOX.ai  Your AI. Your Data. Your Rules.</a:t>
             </a:r>
           </a:p>
         </p:txBody>
@@ -8128,7 +8128,7 @@
                 </a:solidFill>
                 <a:latin typeface="Arial"/>
               </a:rPr>
-              <a:t>Your AI, on silicon you own.</a:t>
+              <a:t>Your AI. Your Data. Your Rules.</a:t>
             </a:r>
           </a:p>
         </p:txBody>
@@ -8356,7 +8356,7 @@
                 </a:solidFill>
                 <a:latin typeface="Xolonium" panose="02000503000000000000" pitchFamily="2" charset="0"/>
               </a:rPr>
-              <a:t>THOX.ai  Your AI, on silicon you own.</a:t>
+              <a:t>THOX.ai  Your AI. Your Data. Your Rules.</a:t>
             </a:r>
           </a:p>
         </p:txBody>
@@ -8715,7 +8715,7 @@
                 </a:solidFill>
                 <a:latin typeface="Xolonium" panose="02000503000000000000" pitchFamily="2" charset="0"/>
               </a:rPr>
-              <a:t>THOX.ai  Your AI, on silicon you own.</a:t>
+              <a:t>THOX.ai  Your AI. Your Data. Your Rules.</a:t>
             </a:r>
           </a:p>
         </p:txBody>
@@ -9615,7 +9615,7 @@
                 </a:solidFill>
                 <a:latin typeface="Xolonium" panose="02000503000000000000" pitchFamily="2" charset="0"/>
               </a:rPr>
-              <a:t>THOX.ai  Your AI, on silicon you own.</a:t>
+              <a:t>THOX.ai  Your AI. Your Data. Your Rules.</a:t>
             </a:r>
           </a:p>
         </p:txBody>
@@ -10812,7 +10812,7 @@
                 </a:solidFill>
                 <a:latin typeface="Xolonium" panose="02000503000000000000" pitchFamily="2" charset="0"/>
               </a:rPr>
-              <a:t>THOX.ai  Your AI, on silicon you own.</a:t>
+              <a:t>THOX.ai  Your AI. Your Data. Your Rules.</a:t>
             </a:r>
           </a:p>
         </p:txBody>
@@ -11439,7 +11439,7 @@
                 </a:solidFill>
                 <a:latin typeface="Xolonium" panose="02000503000000000000" pitchFamily="2" charset="0"/>
               </a:rPr>
-              <a:t>THOX.ai  Your AI, on silicon you own.</a:t>
+              <a:t>THOX.ai  Your AI. Your Data. Your Rules.</a:t>
             </a:r>
           </a:p>
         </p:txBody>
@@ -12051,7 +12051,7 @@
                 </a:solidFill>
                 <a:latin typeface="Xolonium" panose="02000503000000000000" pitchFamily="2" charset="0"/>
               </a:rPr>
-              <a:t>THOX.ai  Your AI, on silicon you own.</a:t>
+              <a:t>THOX.ai  Your AI. Your Data. Your Rules.</a:t>
             </a:r>
           </a:p>
         </p:txBody>
@@ -12699,7 +12699,7 @@
                 </a:solidFill>
                 <a:latin typeface="Xolonium" panose="02000503000000000000" pitchFamily="2" charset="0"/>
               </a:rPr>
-              <a:t>THOX.ai  Your AI, on silicon you own.</a:t>
+              <a:t>THOX.ai  Your AI. Your Data. Your Rules.</a:t>
             </a:r>
           </a:p>
         </p:txBody>
@@ -13329,7 +13329,7 @@
                 </a:solidFill>
                 <a:latin typeface="Xolonium" panose="02000503000000000000" pitchFamily="2" charset="0"/>
               </a:rPr>
-              <a:t>THOX.ai  Your AI, on silicon you own.</a:t>
+              <a:t>THOX.ai  Your AI. Your Data. Your Rules.</a:t>
             </a:r>
           </a:p>
         </p:txBody>
@@ -14430,7 +14430,7 @@
                 </a:solidFill>
                 <a:latin typeface="Xolonium" panose="02000503000000000000" pitchFamily="2" charset="0"/>
               </a:rPr>
-              <a:t>THOX.ai  Your AI, on silicon you own.</a:t>
+              <a:t>THOX.ai  Your AI. Your Data. Your Rules.</a:t>
             </a:r>
           </a:p>
         </p:txBody>
